--- a/2. 【ESP-IDF+VSCode】導入手順書_AI作成版/【claude作成版】ESP-IDF_VSCode_overview_slides.pptx
+++ b/2. 【ESP-IDF+VSCode】導入手順書_AI作成版/【claude作成版】ESP-IDF_VSCode_overview_slides.pptx
@@ -4,6 +4,9 @@
   <p:sldMasterIdLst>
     <p:sldMasterId id="2147483648" r:id="rId1"/>
   </p:sldMasterIdLst>
+  <p:notesMasterIdLst>
+    <p:notesMasterId r:id="rId13"/>
+  </p:notesMasterIdLst>
   <p:sldIdLst>
     <p:sldId id="256" r:id="rId2"/>
     <p:sldId id="257" r:id="rId3"/>
@@ -17,9 +20,6 @@
     <p:sldId id="265" r:id="rId11"/>
     <p:sldId id="266" r:id="rId12"/>
   </p:sldIdLst>
-  <p:notesMasterIdLst>
-    <p:notesMasterId r:id="rId13"/>
-  </p:notesMasterIdLst>
   <p:sldSz cx="12192000" cy="6858000"/>
   <p:notesSz cx="6858000" cy="12192000"/>
   <p:defaultTextStyle>
@@ -114,6 +114,11 @@
       </a:defRPr>
     </a:lvl9pPr>
   </p:defaultTextStyle>
+  <p:extLst>
+    <p:ext uri="{EFAFB233-063F-42B5-8137-9DF3F51BA10A}">
+      <p15:sldGuideLst xmlns:p15="http://schemas.microsoft.com/office/powerpoint/2012/main"/>
+    </p:ext>
+  </p:extLst>
 </p:presentation>
 </file>
 
@@ -139,241 +144,17 @@
           <a:chExt cx="0" cy="0"/>
         </a:xfrm>
       </p:grpSpPr>
-      <p:sp>
-        <p:nvSpPr>
-          <p:cNvPr id="2" name="Header Placeholder 1"/>
-          <p:cNvSpPr>
-            <a:spLocks noGrp="1"/>
-          </p:cNvSpPr>
-          <p:nvPr>
-            <p:ph type="hdr" sz="quarter"/>
-          </p:nvPr>
-        </p:nvSpPr>
-        <p:spPr>
-          <a:xfrm>
-            <a:off x="0" y="0"/>
-            <a:ext cx="2971800" cy="458788"/>
-          </a:xfrm>
-          <a:prstGeom prst="rect">
-            <a:avLst/>
-          </a:prstGeom>
-        </p:spPr>
-        <p:txBody>
-          <a:bodyPr vert="horz" lIns="91440" tIns="45720" rIns="91440" bIns="45720" rtlCol="0"/>
-          <a:lstStyle>
-            <a:lvl1pPr algn="l">
-              <a:defRPr sz="1200"/>
-            </a:lvl1pPr>
-          </a:lstStyle>
-          <a:p>
-            <a:endParaRPr lang="en-US"/>
-          </a:p>
-        </p:txBody>
-      </p:sp>
-      <p:sp>
-        <p:nvSpPr>
-          <p:cNvPr id="3" name="Date Placeholder 2"/>
-          <p:cNvSpPr>
-            <a:spLocks noGrp="1"/>
-          </p:cNvSpPr>
-          <p:nvPr>
-            <p:ph type="dt" idx="1"/>
-          </p:nvPr>
-        </p:nvSpPr>
-        <p:spPr>
-          <a:xfrm>
-            <a:off x="3884613" y="0"/>
-            <a:ext cx="2971800" cy="458788"/>
-          </a:xfrm>
-          <a:prstGeom prst="rect">
-            <a:avLst/>
-          </a:prstGeom>
-        </p:spPr>
-        <p:txBody>
-          <a:bodyPr vert="horz" lIns="91440" tIns="45720" rIns="91440" bIns="45720" rtlCol="0"/>
-          <a:lstStyle>
-            <a:lvl1pPr algn="r">
-              <a:defRPr sz="1200"/>
-            </a:lvl1pPr>
-          </a:lstStyle>
-          <a:p>
-            <a:fld id="{5282F153-3F37-0F45-9E97-73ACFA13230C}" type="datetimeFigureOut">
-              <a:rPr lang="en-US"/>
-              <a:t>7/23/19</a:t>
-            </a:fld>
-            <a:endParaRPr lang="en-US"/>
-          </a:p>
-        </p:txBody>
-      </p:sp>
-      <p:sp>
-        <p:nvSpPr>
-          <p:cNvPr id="4" name="Slide Image Placeholder 3"/>
-          <p:cNvSpPr>
-            <a:spLocks noGrp="1" noRot="1" noChangeAspect="1"/>
-          </p:cNvSpPr>
-          <p:nvPr>
-            <p:ph type="sldImg" idx="2"/>
-          </p:nvPr>
-        </p:nvSpPr>
-        <p:spPr>
-          <a:xfrm>
-            <a:off x="685800" y="1143000"/>
-            <a:ext cx="5486400" cy="3086100"/>
-          </a:xfrm>
-          <a:prstGeom prst="rect">
-            <a:avLst/>
-          </a:prstGeom>
-          <a:noFill/>
-          <a:ln w="12700">
-            <a:solidFill>
-              <a:prstClr val="black"/>
-            </a:solidFill>
-          </a:ln>
-        </p:spPr>
-        <p:txBody>
-          <a:bodyPr vert="horz" lIns="91440" tIns="45720" rIns="91440" bIns="45720" rtlCol="0" anchor="ctr"/>
-          <a:lstStyle/>
-          <a:p>
-            <a:endParaRPr lang="en-US"/>
-          </a:p>
-        </p:txBody>
-      </p:sp>
-      <p:sp>
-        <p:nvSpPr>
-          <p:cNvPr id="5" name="Notes Placeholder 4"/>
-          <p:cNvSpPr>
-            <a:spLocks noGrp="1"/>
-          </p:cNvSpPr>
-          <p:nvPr>
-            <p:ph type="body" sz="quarter" idx="3"/>
-          </p:nvPr>
-        </p:nvSpPr>
-        <p:spPr>
-          <a:xfrm>
-            <a:off x="685800" y="4400550"/>
-            <a:ext cx="5486400" cy="3600450"/>
-          </a:xfrm>
-          <a:prstGeom prst="rect">
-            <a:avLst/>
-          </a:prstGeom>
-        </p:spPr>
-        <p:txBody>
-          <a:bodyPr vert="horz" lIns="91440" tIns="45720" rIns="91440" bIns="45720" rtlCol="0"/>
-          <a:lstStyle/>
-          <a:p>
-            <a:pPr lvl="0"/>
-            <a:r>
-              <a:rPr lang="en-US"/>
-              <a:t>Click to edit Master text styles</a:t>
-            </a:r>
-          </a:p>
-          <a:p>
-            <a:pPr lvl="1"/>
-            <a:r>
-              <a:rPr lang="en-US"/>
-              <a:t>Second level</a:t>
-            </a:r>
-          </a:p>
-          <a:p>
-            <a:pPr lvl="2"/>
-            <a:r>
-              <a:rPr lang="en-US"/>
-              <a:t>Third level</a:t>
-            </a:r>
-          </a:p>
-          <a:p>
-            <a:pPr lvl="3"/>
-            <a:r>
-              <a:rPr lang="en-US"/>
-              <a:t>Fourth level</a:t>
-            </a:r>
-          </a:p>
-          <a:p>
-            <a:pPr lvl="4"/>
-            <a:r>
-              <a:rPr lang="en-US"/>
-              <a:t>Fifth level</a:t>
-            </a:r>
-          </a:p>
-        </p:txBody>
-      </p:sp>
-      <p:sp>
-        <p:nvSpPr>
-          <p:cNvPr id="6" name="Footer Placeholder 5"/>
-          <p:cNvSpPr>
-            <a:spLocks noGrp="1"/>
-          </p:cNvSpPr>
-          <p:nvPr>
-            <p:ph type="ftr" sz="quarter" idx="4"/>
-          </p:nvPr>
-        </p:nvSpPr>
-        <p:spPr>
-          <a:xfrm>
-            <a:off x="0" y="8685213"/>
-            <a:ext cx="2971800" cy="458787"/>
-          </a:xfrm>
-          <a:prstGeom prst="rect">
-            <a:avLst/>
-          </a:prstGeom>
-        </p:spPr>
-        <p:txBody>
-          <a:bodyPr vert="horz" lIns="91440" tIns="45720" rIns="91440" bIns="45720" rtlCol="0" anchor="b"/>
-          <a:lstStyle>
-            <a:lvl1pPr algn="l">
-              <a:defRPr sz="1200"/>
-            </a:lvl1pPr>
-          </a:lstStyle>
-          <a:p>
-            <a:endParaRPr lang="en-US"/>
-          </a:p>
-        </p:txBody>
-      </p:sp>
-      <p:sp>
-        <p:nvSpPr>
-          <p:cNvPr id="7" name="Slide Number Placeholder 6"/>
-          <p:cNvSpPr>
-            <a:spLocks noGrp="1"/>
-          </p:cNvSpPr>
-          <p:nvPr>
-            <p:ph type="sldNum" sz="quarter" idx="5"/>
-          </p:nvPr>
-        </p:nvSpPr>
-        <p:spPr>
-          <a:xfrm>
-            <a:off x="3884613" y="8685213"/>
-            <a:ext cx="2971800" cy="458787"/>
-          </a:xfrm>
-          <a:prstGeom prst="rect">
-            <a:avLst/>
-          </a:prstGeom>
-        </p:spPr>
-        <p:txBody>
-          <a:bodyPr vert="horz" lIns="91440" tIns="45720" rIns="91440" bIns="45720" rtlCol="0" anchor="b"/>
-          <a:lstStyle>
-            <a:lvl1pPr algn="r">
-              <a:defRPr sz="1200"/>
-            </a:lvl1pPr>
-          </a:lstStyle>
-          <a:p>
-            <a:fld id="{CE5E9CC1-C706-0F49-92D6-E571CC5EEA8F}" type="slidenum">
-              <a:rPr lang="en-US"/>
-              <a:t>‹#›</a:t>
-            </a:fld>
-            <a:endParaRPr lang="en-US"/>
-          </a:p>
-        </p:txBody>
-      </p:sp>
     </p:spTree>
     <p:extLst>
       <p:ext uri="{BB962C8B-B14F-4D97-AF65-F5344CB8AC3E}">
-        <p14:creationId xmlns:p14="http://schemas.microsoft.com/office/powerpoint/2010/main" val="1024086991"/>
+        <p14:creationId xmlns:p14="http://schemas.microsoft.com/office/powerpoint/2010/main" val="1811418383"/>
       </p:ext>
     </p:extLst>
   </p:cSld>
   <p:clrMap bg1="lt1" tx1="dk1" bg2="lt2" tx2="dk2" accent1="accent1" accent2="accent2" accent3="accent3" accent4="accent4" accent5="accent5" accent6="accent6" hlink="hlink" folHlink="folHlink"/>
   <p:notesStyle>
     <a:lvl1pPr marL="0" algn="l" defTabSz="914400" rtl="0" eaLnBrk="1" latinLnBrk="0" hangingPunct="1">
-      <a:defRPr sz="1200" kern="1200">
+      <a:defRPr kumimoji="1" sz="1200" kern="1200">
         <a:solidFill>
           <a:schemeClr val="tx1"/>
         </a:solidFill>
@@ -383,7 +164,7 @@
       </a:defRPr>
     </a:lvl1pPr>
     <a:lvl2pPr marL="457200" algn="l" defTabSz="914400" rtl="0" eaLnBrk="1" latinLnBrk="0" hangingPunct="1">
-      <a:defRPr sz="1200" kern="1200">
+      <a:defRPr kumimoji="1" sz="1200" kern="1200">
         <a:solidFill>
           <a:schemeClr val="tx1"/>
         </a:solidFill>
@@ -393,7 +174,7 @@
       </a:defRPr>
     </a:lvl2pPr>
     <a:lvl3pPr marL="914400" algn="l" defTabSz="914400" rtl="0" eaLnBrk="1" latinLnBrk="0" hangingPunct="1">
-      <a:defRPr sz="1200" kern="1200">
+      <a:defRPr kumimoji="1" sz="1200" kern="1200">
         <a:solidFill>
           <a:schemeClr val="tx1"/>
         </a:solidFill>
@@ -403,7 +184,7 @@
       </a:defRPr>
     </a:lvl3pPr>
     <a:lvl4pPr marL="1371600" algn="l" defTabSz="914400" rtl="0" eaLnBrk="1" latinLnBrk="0" hangingPunct="1">
-      <a:defRPr sz="1200" kern="1200">
+      <a:defRPr kumimoji="1" sz="1200" kern="1200">
         <a:solidFill>
           <a:schemeClr val="tx1"/>
         </a:solidFill>
@@ -413,7 +194,7 @@
       </a:defRPr>
     </a:lvl4pPr>
     <a:lvl5pPr marL="1828800" algn="l" defTabSz="914400" rtl="0" eaLnBrk="1" latinLnBrk="0" hangingPunct="1">
-      <a:defRPr sz="1200" kern="1200">
+      <a:defRPr kumimoji="1" sz="1200" kern="1200">
         <a:solidFill>
           <a:schemeClr val="tx1"/>
         </a:solidFill>
@@ -423,7 +204,7 @@
       </a:defRPr>
     </a:lvl5pPr>
     <a:lvl6pPr marL="2286000" algn="l" defTabSz="914400" rtl="0" eaLnBrk="1" latinLnBrk="0" hangingPunct="1">
-      <a:defRPr sz="1200" kern="1200">
+      <a:defRPr kumimoji="1" sz="1200" kern="1200">
         <a:solidFill>
           <a:schemeClr val="tx1"/>
         </a:solidFill>
@@ -433,7 +214,7 @@
       </a:defRPr>
     </a:lvl6pPr>
     <a:lvl7pPr marL="2743200" algn="l" defTabSz="914400" rtl="0" eaLnBrk="1" latinLnBrk="0" hangingPunct="1">
-      <a:defRPr sz="1200" kern="1200">
+      <a:defRPr kumimoji="1" sz="1200" kern="1200">
         <a:solidFill>
           <a:schemeClr val="tx1"/>
         </a:solidFill>
@@ -443,7 +224,7 @@
       </a:defRPr>
     </a:lvl7pPr>
     <a:lvl8pPr marL="3200400" algn="l" defTabSz="914400" rtl="0" eaLnBrk="1" latinLnBrk="0" hangingPunct="1">
-      <a:defRPr sz="1200" kern="1200">
+      <a:defRPr kumimoji="1" sz="1200" kern="1200">
         <a:solidFill>
           <a:schemeClr val="tx1"/>
         </a:solidFill>
@@ -453,7 +234,7 @@
       </a:defRPr>
     </a:lvl8pPr>
     <a:lvl9pPr marL="3657600" algn="l" defTabSz="914400" rtl="0" eaLnBrk="1" latinLnBrk="0" hangingPunct="1">
-      <a:defRPr sz="1200" kern="1200">
+      <a:defRPr kumimoji="1" sz="1200" kern="1200">
         <a:solidFill>
           <a:schemeClr val="tx1"/>
         </a:solidFill>
@@ -510,10 +291,6 @@
           <a:bodyPr/>
           <a:lstStyle/>
           <a:p>
-            <a:r>
-              <a:rPr lang="en-US" dirty="0"/>
-              <a:t/>
-            </a:r>
             <a:endParaRPr lang="en-US" dirty="0"/>
           </a:p>
         </p:txBody>
@@ -598,10 +375,6 @@
           <a:bodyPr/>
           <a:lstStyle/>
           <a:p>
-            <a:r>
-              <a:rPr lang="en-US" dirty="0"/>
-              <a:t/>
-            </a:r>
             <a:endParaRPr lang="en-US" dirty="0"/>
           </a:p>
         </p:txBody>
@@ -686,10 +459,6 @@
           <a:bodyPr/>
           <a:lstStyle/>
           <a:p>
-            <a:r>
-              <a:rPr lang="en-US" dirty="0"/>
-              <a:t/>
-            </a:r>
             <a:endParaRPr lang="en-US" dirty="0"/>
           </a:p>
         </p:txBody>
@@ -774,10 +543,6 @@
           <a:bodyPr/>
           <a:lstStyle/>
           <a:p>
-            <a:r>
-              <a:rPr lang="en-US" dirty="0"/>
-              <a:t/>
-            </a:r>
             <a:endParaRPr lang="en-US" dirty="0"/>
           </a:p>
         </p:txBody>
@@ -862,10 +627,6 @@
           <a:bodyPr/>
           <a:lstStyle/>
           <a:p>
-            <a:r>
-              <a:rPr lang="en-US" dirty="0"/>
-              <a:t/>
-            </a:r>
             <a:endParaRPr lang="en-US" dirty="0"/>
           </a:p>
         </p:txBody>
@@ -950,10 +711,6 @@
           <a:bodyPr/>
           <a:lstStyle/>
           <a:p>
-            <a:r>
-              <a:rPr lang="en-US" dirty="0"/>
-              <a:t/>
-            </a:r>
             <a:endParaRPr lang="en-US" dirty="0"/>
           </a:p>
         </p:txBody>
@@ -1038,10 +795,6 @@
           <a:bodyPr/>
           <a:lstStyle/>
           <a:p>
-            <a:r>
-              <a:rPr lang="en-US" dirty="0"/>
-              <a:t/>
-            </a:r>
             <a:endParaRPr lang="en-US" dirty="0"/>
           </a:p>
         </p:txBody>
@@ -1126,10 +879,6 @@
           <a:bodyPr/>
           <a:lstStyle/>
           <a:p>
-            <a:r>
-              <a:rPr lang="en-US" dirty="0"/>
-              <a:t/>
-            </a:r>
             <a:endParaRPr lang="en-US" dirty="0"/>
           </a:p>
         </p:txBody>
@@ -1214,10 +963,6 @@
           <a:bodyPr/>
           <a:lstStyle/>
           <a:p>
-            <a:r>
-              <a:rPr lang="en-US" dirty="0"/>
-              <a:t/>
-            </a:r>
             <a:endParaRPr lang="en-US" dirty="0"/>
           </a:p>
         </p:txBody>
@@ -1302,10 +1047,6 @@
           <a:bodyPr/>
           <a:lstStyle/>
           <a:p>
-            <a:r>
-              <a:rPr lang="en-US" dirty="0"/>
-              <a:t/>
-            </a:r>
             <a:endParaRPr lang="en-US" dirty="0"/>
           </a:p>
         </p:txBody>
@@ -1390,10 +1131,6 @@
           <a:bodyPr/>
           <a:lstStyle/>
           <a:p>
-            <a:r>
-              <a:rPr lang="en-US" dirty="0"/>
-              <a:t/>
-            </a:r>
             <a:endParaRPr lang="en-US" dirty="0"/>
           </a:p>
         </p:txBody>
@@ -1467,6 +1204,11 @@
 <file path=ppt/slideMasters/slideMaster1.xml><?xml version="1.0" encoding="utf-8"?>
 <p:sldMaster xmlns:a="http://schemas.openxmlformats.org/drawingml/2006/main" xmlns:r="http://schemas.openxmlformats.org/officeDocument/2006/relationships" xmlns:p="http://schemas.openxmlformats.org/presentationml/2006/main">
   <p:cSld>
+    <p:bg>
+      <p:bgRef idx="1001">
+        <a:schemeClr val="bg1"/>
+      </p:bgRef>
+    </p:bg>
     <p:spTree>
       <p:nvGrpSpPr>
         <p:cNvPr id="1" name=""/>
@@ -1749,6 +1491,7 @@
         <a:solidFill>
           <a:srgbClr val="0D2036"/>
         </a:solidFill>
+        <a:effectLst/>
       </p:bgPr>
     </p:bg>
     <p:spTree>
@@ -1786,6 +1529,13 @@
           </a:solidFill>
           <a:ln/>
         </p:spPr>
+        <p:txBody>
+          <a:bodyPr/>
+          <a:lstStyle/>
+          <a:p>
+            <a:endParaRPr lang="ja-JP" altLang="en-US"/>
+          </a:p>
+        </p:txBody>
       </p:sp>
       <p:sp>
         <p:nvSpPr>
@@ -1808,7 +1558,7 @@
           <a:bodyPr wrap="square" lIns="0" tIns="0" rIns="0" bIns="0" rtlCol="0" anchor="ctr"/>
           <a:lstStyle/>
           <a:p>
-            <a:pPr algn="ctr" indent="0" marL="0">
+            <a:pPr marL="0" indent="0" algn="ctr">
               <a:buNone/>
             </a:pPr>
             <a:r>
@@ -1847,7 +1597,7 @@
           <a:bodyPr wrap="square" lIns="0" tIns="0" rIns="0" bIns="0" rtlCol="0" anchor="t"/>
           <a:lstStyle/>
           <a:p>
-            <a:pPr algn="l" indent="0" marL="0">
+            <a:pPr marL="0" indent="0" algn="l">
               <a:lnSpc>
                 <a:spcPct val="108000"/>
               </a:lnSpc>
@@ -1867,7 +1617,7 @@
             <a:endParaRPr lang="en-US" sz="4000" dirty="0"/>
           </a:p>
           <a:p>
-            <a:pPr algn="l" indent="0" marL="0">
+            <a:pPr marL="0" indent="0" algn="l">
               <a:lnSpc>
                 <a:spcPct val="108000"/>
               </a:lnSpc>
@@ -1909,7 +1659,7 @@
           <a:bodyPr wrap="square" lIns="0" tIns="0" rIns="0" bIns="0" rtlCol="0" anchor="ctr"/>
           <a:lstStyle/>
           <a:p>
-            <a:pPr indent="0" marL="0">
+            <a:pPr marL="0" indent="0">
               <a:buNone/>
             </a:pPr>
             <a:r>
@@ -1946,17 +1696,24 @@
           </a:solidFill>
           <a:ln/>
         </p:spPr>
+        <p:txBody>
+          <a:bodyPr/>
+          <a:lstStyle/>
+          <a:p>
+            <a:endParaRPr lang="ja-JP" altLang="en-US"/>
+          </a:p>
+        </p:txBody>
       </p:sp>
       <p:pic>
         <p:nvPicPr>
-          <p:cNvPr id="7" name="Image 0" descr="/tmp/esp32p4_guide/icons/chip_FFFFFF.png">    </p:cNvPr>
+          <p:cNvPr id="7" name="Image 0" descr="/tmp/esp32p4_guide/icons/chip_FFFFFF.png"/>
           <p:cNvPicPr>
             <a:picLocks noChangeAspect="1"/>
           </p:cNvPicPr>
           <p:nvPr/>
         </p:nvPicPr>
         <p:blipFill>
-          <a:blip r:embed="rId1"/>
+          <a:blip r:embed="rId3"/>
           <a:stretch>
             <a:fillRect/>
           </a:stretch>
@@ -1997,6 +1754,13 @@
             <a:prstDash val="solid"/>
           </a:ln>
         </p:spPr>
+        <p:txBody>
+          <a:bodyPr/>
+          <a:lstStyle/>
+          <a:p>
+            <a:endParaRPr lang="ja-JP" altLang="en-US"/>
+          </a:p>
+        </p:txBody>
       </p:sp>
       <p:sp>
         <p:nvSpPr>
@@ -2019,7 +1783,7 @@
           <a:bodyPr wrap="square" lIns="0" tIns="0" rIns="0" bIns="0" rtlCol="0" anchor="ctr"/>
           <a:lstStyle/>
           <a:p>
-            <a:pPr indent="0" marL="0">
+            <a:pPr marL="0" indent="0">
               <a:buNone/>
             </a:pPr>
             <a:r>
@@ -2058,7 +1822,7 @@
           <a:bodyPr wrap="square" lIns="0" tIns="0" rIns="0" bIns="0" rtlCol="0" anchor="t"/>
           <a:lstStyle/>
           <a:p>
-            <a:pPr indent="0" marL="0">
+            <a:pPr marL="0" indent="0">
               <a:lnSpc>
                 <a:spcPct val="115000"/>
               </a:lnSpc>
@@ -2105,6 +1869,13 @@
             <a:prstDash val="solid"/>
           </a:ln>
         </p:spPr>
+        <p:txBody>
+          <a:bodyPr/>
+          <a:lstStyle/>
+          <a:p>
+            <a:endParaRPr lang="ja-JP" altLang="en-US"/>
+          </a:p>
+        </p:txBody>
       </p:sp>
       <p:sp>
         <p:nvSpPr>
@@ -2127,7 +1898,7 @@
           <a:bodyPr wrap="square" lIns="0" tIns="0" rIns="0" bIns="0" rtlCol="0" anchor="ctr"/>
           <a:lstStyle/>
           <a:p>
-            <a:pPr indent="0" marL="0">
+            <a:pPr marL="0" indent="0">
               <a:buNone/>
             </a:pPr>
             <a:r>
@@ -2166,7 +1937,7 @@
           <a:bodyPr wrap="square" lIns="0" tIns="0" rIns="0" bIns="0" rtlCol="0" anchor="ctr"/>
           <a:lstStyle/>
           <a:p>
-            <a:pPr indent="0" marL="0">
+            <a:pPr marL="0" indent="0">
               <a:buNone/>
             </a:pPr>
             <a:r>
@@ -2210,6 +1981,13 @@
             <a:prstDash val="solid"/>
           </a:ln>
         </p:spPr>
+        <p:txBody>
+          <a:bodyPr/>
+          <a:lstStyle/>
+          <a:p>
+            <a:endParaRPr lang="ja-JP" altLang="en-US"/>
+          </a:p>
+        </p:txBody>
       </p:sp>
       <p:sp>
         <p:nvSpPr>
@@ -2232,7 +2010,7 @@
           <a:bodyPr wrap="square" lIns="0" tIns="0" rIns="0" bIns="0" rtlCol="0" anchor="ctr"/>
           <a:lstStyle/>
           <a:p>
-            <a:pPr indent="0" marL="0">
+            <a:pPr marL="0" indent="0">
               <a:buNone/>
             </a:pPr>
             <a:r>
@@ -2271,7 +2049,7 @@
           <a:bodyPr wrap="square" lIns="0" tIns="0" rIns="0" bIns="0" rtlCol="0" anchor="ctr"/>
           <a:lstStyle/>
           <a:p>
-            <a:pPr indent="0" marL="0">
+            <a:pPr marL="0" indent="0">
               <a:buNone/>
             </a:pPr>
             <a:r>
@@ -2315,6 +2093,13 @@
             <a:prstDash val="solid"/>
           </a:ln>
         </p:spPr>
+        <p:txBody>
+          <a:bodyPr/>
+          <a:lstStyle/>
+          <a:p>
+            <a:endParaRPr lang="ja-JP" altLang="en-US"/>
+          </a:p>
+        </p:txBody>
       </p:sp>
       <p:sp>
         <p:nvSpPr>
@@ -2337,7 +2122,7 @@
           <a:bodyPr wrap="square" lIns="0" tIns="0" rIns="0" bIns="0" rtlCol="0" anchor="ctr"/>
           <a:lstStyle/>
           <a:p>
-            <a:pPr indent="0" marL="0">
+            <a:pPr marL="0" indent="0">
               <a:buNone/>
             </a:pPr>
             <a:r>
@@ -2376,7 +2161,7 @@
           <a:bodyPr wrap="square" lIns="0" tIns="0" rIns="0" bIns="0" rtlCol="0" anchor="ctr"/>
           <a:lstStyle/>
           <a:p>
-            <a:pPr indent="0" marL="0">
+            <a:pPr marL="0" indent="0">
               <a:buNone/>
             </a:pPr>
             <a:r>
@@ -2420,6 +2205,13 @@
             <a:prstDash val="solid"/>
           </a:ln>
         </p:spPr>
+        <p:txBody>
+          <a:bodyPr/>
+          <a:lstStyle/>
+          <a:p>
+            <a:endParaRPr lang="ja-JP" altLang="en-US"/>
+          </a:p>
+        </p:txBody>
       </p:sp>
       <p:sp>
         <p:nvSpPr>
@@ -2442,7 +2234,7 @@
           <a:bodyPr wrap="square" lIns="0" tIns="0" rIns="0" bIns="0" rtlCol="0" anchor="ctr"/>
           <a:lstStyle/>
           <a:p>
-            <a:pPr indent="0" marL="0">
+            <a:pPr marL="0" indent="0">
               <a:buNone/>
             </a:pPr>
             <a:r>
@@ -2481,7 +2273,7 @@
           <a:bodyPr wrap="square" lIns="0" tIns="0" rIns="0" bIns="0" rtlCol="0" anchor="ctr"/>
           <a:lstStyle/>
           <a:p>
-            <a:pPr indent="0" marL="0">
+            <a:pPr marL="0" indent="0">
               <a:buNone/>
             </a:pPr>
             <a:r>
@@ -2525,6 +2317,13 @@
             <a:prstDash val="solid"/>
           </a:ln>
         </p:spPr>
+        <p:txBody>
+          <a:bodyPr/>
+          <a:lstStyle/>
+          <a:p>
+            <a:endParaRPr lang="ja-JP" altLang="en-US"/>
+          </a:p>
+        </p:txBody>
       </p:sp>
       <p:sp>
         <p:nvSpPr>
@@ -2547,7 +2346,7 @@
           <a:bodyPr wrap="square" lIns="0" tIns="0" rIns="0" bIns="0" rtlCol="0" anchor="ctr"/>
           <a:lstStyle/>
           <a:p>
-            <a:pPr indent="0" marL="0">
+            <a:pPr marL="0" indent="0">
               <a:buNone/>
             </a:pPr>
             <a:r>
@@ -2586,7 +2385,7 @@
           <a:bodyPr wrap="square" lIns="0" tIns="0" rIns="0" bIns="0" rtlCol="0" anchor="ctr"/>
           <a:lstStyle/>
           <a:p>
-            <a:pPr indent="0" marL="0">
+            <a:pPr marL="0" indent="0">
               <a:buNone/>
             </a:pPr>
             <a:r>
@@ -2630,6 +2429,13 @@
             <a:prstDash val="solid"/>
           </a:ln>
         </p:spPr>
+        <p:txBody>
+          <a:bodyPr/>
+          <a:lstStyle/>
+          <a:p>
+            <a:endParaRPr lang="ja-JP" altLang="en-US"/>
+          </a:p>
+        </p:txBody>
       </p:sp>
       <p:sp>
         <p:nvSpPr>
@@ -2652,7 +2458,7 @@
           <a:bodyPr wrap="square" lIns="0" tIns="0" rIns="0" bIns="0" rtlCol="0" anchor="ctr"/>
           <a:lstStyle/>
           <a:p>
-            <a:pPr indent="0" marL="0">
+            <a:pPr marL="0" indent="0">
               <a:buNone/>
             </a:pPr>
             <a:r>
@@ -2691,7 +2497,7 @@
           <a:bodyPr wrap="square" lIns="0" tIns="0" rIns="0" bIns="0" rtlCol="0" anchor="ctr"/>
           <a:lstStyle/>
           <a:p>
-            <a:pPr indent="0" marL="0">
+            <a:pPr marL="0" indent="0">
               <a:buNone/>
             </a:pPr>
             <a:r>
@@ -2730,7 +2536,7 @@
           <a:bodyPr wrap="square" lIns="0" tIns="0" rIns="0" bIns="0" rtlCol="0" anchor="ctr"/>
           <a:lstStyle/>
           <a:p>
-            <a:pPr algn="r" indent="0" marL="0">
+            <a:pPr marL="0" indent="0" algn="r">
               <a:buNone/>
             </a:pPr>
             <a:r>
@@ -2764,6 +2570,7 @@
         <a:solidFill>
           <a:srgbClr val="FFFFFF"/>
         </a:solidFill>
+        <a:effectLst/>
       </p:bgPr>
     </p:bg>
     <p:spTree>
@@ -2799,17 +2606,24 @@
           </a:solidFill>
           <a:ln/>
         </p:spPr>
+        <p:txBody>
+          <a:bodyPr/>
+          <a:lstStyle/>
+          <a:p>
+            <a:endParaRPr lang="ja-JP" altLang="en-US"/>
+          </a:p>
+        </p:txBody>
       </p:sp>
       <p:pic>
         <p:nvPicPr>
-          <p:cNvPr id="3" name="Image 0" descr="/tmp/esp32p4_guide/icons/bug_FFFFFF.png">    </p:cNvPr>
+          <p:cNvPr id="3" name="Image 0" descr="/tmp/esp32p4_guide/icons/bug_FFFFFF.png"/>
           <p:cNvPicPr>
             <a:picLocks noChangeAspect="1"/>
           </p:cNvPicPr>
           <p:nvPr/>
         </p:nvPicPr>
         <p:blipFill>
-          <a:blip r:embed="rId1"/>
+          <a:blip r:embed="rId3"/>
           <a:stretch>
             <a:fillRect/>
           </a:stretch>
@@ -2845,7 +2659,7 @@
           <a:bodyPr wrap="square" lIns="0" tIns="0" rIns="0" bIns="0" rtlCol="0" anchor="ctr"/>
           <a:lstStyle/>
           <a:p>
-            <a:pPr algn="l" indent="0" marL="0">
+            <a:pPr marL="0" indent="0" algn="l">
               <a:buNone/>
             </a:pPr>
             <a:r>
@@ -2884,11 +2698,11 @@
           <a:bodyPr wrap="square" lIns="0" tIns="0" rIns="0" bIns="0" rtlCol="0" anchor="ctr"/>
           <a:lstStyle/>
           <a:p>
-            <a:pPr algn="l" indent="0" marL="0">
-              <a:buNone/>
-            </a:pPr>
-            <a:r>
-              <a:rPr lang="en-US" sz="1100" b="1" spc="100" kern="0" dirty="0">
+            <a:pPr marL="0" indent="0" algn="l">
+              <a:buNone/>
+            </a:pPr>
+            <a:r>
+              <a:rPr lang="en-US" sz="1100" b="1" kern="0" spc="100" dirty="0">
                 <a:solidFill>
                   <a:srgbClr val="0A5FB4"/>
                 </a:solidFill>
@@ -2928,6 +2742,13 @@
             <a:prstDash val="solid"/>
           </a:ln>
         </p:spPr>
+        <p:txBody>
+          <a:bodyPr/>
+          <a:lstStyle/>
+          <a:p>
+            <a:endParaRPr lang="ja-JP" altLang="en-US"/>
+          </a:p>
+        </p:txBody>
       </p:sp>
       <p:sp>
         <p:nvSpPr>
@@ -2948,17 +2769,24 @@
           </a:solidFill>
           <a:ln/>
         </p:spPr>
+        <p:txBody>
+          <a:bodyPr/>
+          <a:lstStyle/>
+          <a:p>
+            <a:endParaRPr lang="ja-JP" altLang="en-US"/>
+          </a:p>
+        </p:txBody>
       </p:sp>
       <p:pic>
         <p:nvPicPr>
-          <p:cNvPr id="8" name="Image 1" descr="/tmp/esp32p4_guide/icons/warning_9A5B00.png">    </p:cNvPr>
+          <p:cNvPr id="8" name="Image 1" descr="/tmp/esp32p4_guide/icons/warning_9A5B00.png"/>
           <p:cNvPicPr>
             <a:picLocks noChangeAspect="1"/>
           </p:cNvPicPr>
           <p:nvPr/>
         </p:nvPicPr>
         <p:blipFill>
-          <a:blip r:embed="rId2"/>
+          <a:blip r:embed="rId4"/>
           <a:stretch>
             <a:fillRect/>
           </a:stretch>
@@ -2994,7 +2822,7 @@
           <a:bodyPr wrap="square" lIns="0" tIns="0" rIns="0" bIns="0" rtlCol="0" anchor="t"/>
           <a:lstStyle/>
           <a:p>
-            <a:pPr indent="0" marL="0">
+            <a:pPr marL="0" indent="0">
               <a:lnSpc>
                 <a:spcPct val="115000"/>
               </a:lnSpc>
@@ -3036,7 +2864,7 @@
           <a:bodyPr wrap="square" lIns="0" tIns="0" rIns="0" bIns="0" rtlCol="0" anchor="t"/>
           <a:lstStyle/>
           <a:p>
-            <a:pPr indent="0" marL="0">
+            <a:pPr marL="0" indent="0">
               <a:lnSpc>
                 <a:spcPct val="125000"/>
               </a:lnSpc>
@@ -3083,6 +2911,13 @@
             <a:prstDash val="solid"/>
           </a:ln>
         </p:spPr>
+        <p:txBody>
+          <a:bodyPr/>
+          <a:lstStyle/>
+          <a:p>
+            <a:endParaRPr lang="ja-JP" altLang="en-US"/>
+          </a:p>
+        </p:txBody>
       </p:sp>
       <p:sp>
         <p:nvSpPr>
@@ -3103,17 +2938,24 @@
           </a:solidFill>
           <a:ln/>
         </p:spPr>
+        <p:txBody>
+          <a:bodyPr/>
+          <a:lstStyle/>
+          <a:p>
+            <a:endParaRPr lang="ja-JP" altLang="en-US"/>
+          </a:p>
+        </p:txBody>
       </p:sp>
       <p:pic>
         <p:nvPicPr>
-          <p:cNvPr id="13" name="Image 2" descr="/tmp/esp32p4_guide/icons/warning_9A5B00.png">    </p:cNvPr>
+          <p:cNvPr id="13" name="Image 2" descr="/tmp/esp32p4_guide/icons/warning_9A5B00.png"/>
           <p:cNvPicPr>
             <a:picLocks noChangeAspect="1"/>
           </p:cNvPicPr>
           <p:nvPr/>
         </p:nvPicPr>
         <p:blipFill>
-          <a:blip r:embed="rId3"/>
+          <a:blip r:embed="rId4"/>
           <a:stretch>
             <a:fillRect/>
           </a:stretch>
@@ -3149,7 +2991,7 @@
           <a:bodyPr wrap="square" lIns="0" tIns="0" rIns="0" bIns="0" rtlCol="0" anchor="t"/>
           <a:lstStyle/>
           <a:p>
-            <a:pPr indent="0" marL="0">
+            <a:pPr marL="0" indent="0">
               <a:lnSpc>
                 <a:spcPct val="115000"/>
               </a:lnSpc>
@@ -3191,7 +3033,7 @@
           <a:bodyPr wrap="square" lIns="0" tIns="0" rIns="0" bIns="0" rtlCol="0" anchor="t"/>
           <a:lstStyle/>
           <a:p>
-            <a:pPr indent="0" marL="0">
+            <a:pPr marL="0" indent="0">
               <a:lnSpc>
                 <a:spcPct val="125000"/>
               </a:lnSpc>
@@ -3238,6 +3080,13 @@
             <a:prstDash val="solid"/>
           </a:ln>
         </p:spPr>
+        <p:txBody>
+          <a:bodyPr/>
+          <a:lstStyle/>
+          <a:p>
+            <a:endParaRPr lang="ja-JP" altLang="en-US"/>
+          </a:p>
+        </p:txBody>
       </p:sp>
       <p:sp>
         <p:nvSpPr>
@@ -3258,10 +3107,17 @@
           </a:solidFill>
           <a:ln/>
         </p:spPr>
+        <p:txBody>
+          <a:bodyPr/>
+          <a:lstStyle/>
+          <a:p>
+            <a:endParaRPr lang="ja-JP" altLang="en-US"/>
+          </a:p>
+        </p:txBody>
       </p:sp>
       <p:pic>
         <p:nvPicPr>
-          <p:cNvPr id="18" name="Image 3" descr="/tmp/esp32p4_guide/icons/warning_9A5B00.png">    </p:cNvPr>
+          <p:cNvPr id="18" name="Image 3" descr="/tmp/esp32p4_guide/icons/warning_9A5B00.png"/>
           <p:cNvPicPr>
             <a:picLocks noChangeAspect="1"/>
           </p:cNvPicPr>
@@ -3304,7 +3160,7 @@
           <a:bodyPr wrap="square" lIns="0" tIns="0" rIns="0" bIns="0" rtlCol="0" anchor="t"/>
           <a:lstStyle/>
           <a:p>
-            <a:pPr indent="0" marL="0">
+            <a:pPr marL="0" indent="0">
               <a:lnSpc>
                 <a:spcPct val="115000"/>
               </a:lnSpc>
@@ -3346,7 +3202,7 @@
           <a:bodyPr wrap="square" lIns="0" tIns="0" rIns="0" bIns="0" rtlCol="0" anchor="t"/>
           <a:lstStyle/>
           <a:p>
-            <a:pPr indent="0" marL="0">
+            <a:pPr marL="0" indent="0">
               <a:lnSpc>
                 <a:spcPct val="125000"/>
               </a:lnSpc>
@@ -3393,6 +3249,13 @@
             <a:prstDash val="solid"/>
           </a:ln>
         </p:spPr>
+        <p:txBody>
+          <a:bodyPr/>
+          <a:lstStyle/>
+          <a:p>
+            <a:endParaRPr lang="ja-JP" altLang="en-US"/>
+          </a:p>
+        </p:txBody>
       </p:sp>
       <p:sp>
         <p:nvSpPr>
@@ -3413,17 +3276,24 @@
           </a:solidFill>
           <a:ln/>
         </p:spPr>
+        <p:txBody>
+          <a:bodyPr/>
+          <a:lstStyle/>
+          <a:p>
+            <a:endParaRPr lang="ja-JP" altLang="en-US"/>
+          </a:p>
+        </p:txBody>
       </p:sp>
       <p:pic>
         <p:nvPicPr>
-          <p:cNvPr id="23" name="Image 4" descr="/tmp/esp32p4_guide/icons/warning_9A5B00.png">    </p:cNvPr>
+          <p:cNvPr id="23" name="Image 4" descr="/tmp/esp32p4_guide/icons/warning_9A5B00.png"/>
           <p:cNvPicPr>
             <a:picLocks noChangeAspect="1"/>
           </p:cNvPicPr>
           <p:nvPr/>
         </p:nvPicPr>
         <p:blipFill>
-          <a:blip r:embed="rId5"/>
+          <a:blip r:embed="rId4"/>
           <a:stretch>
             <a:fillRect/>
           </a:stretch>
@@ -3459,7 +3329,7 @@
           <a:bodyPr wrap="square" lIns="0" tIns="0" rIns="0" bIns="0" rtlCol="0" anchor="t"/>
           <a:lstStyle/>
           <a:p>
-            <a:pPr indent="0" marL="0">
+            <a:pPr marL="0" indent="0">
               <a:lnSpc>
                 <a:spcPct val="115000"/>
               </a:lnSpc>
@@ -3501,7 +3371,7 @@
           <a:bodyPr wrap="square" lIns="0" tIns="0" rIns="0" bIns="0" rtlCol="0" anchor="t"/>
           <a:lstStyle/>
           <a:p>
-            <a:pPr indent="0" marL="0">
+            <a:pPr marL="0" indent="0">
               <a:lnSpc>
                 <a:spcPct val="125000"/>
               </a:lnSpc>
@@ -3516,7 +3386,7 @@
                 <a:ea typeface="Calibri" pitchFamily="34" charset="-122"/>
                 <a:cs typeface="Calibri" pitchFamily="34" charset="-120"/>
               </a:rPr>
-              <a:t>ESP-IDFのバージョン不一致。v5.4.2に揃えるか、コードをAPI変更に合わせて修正する</a:t>
+              <a:t>主にLVGL等ディスプレイ系で発生。コードをAPI変更に合わせて修正するか、v5.4.2をCustom Installationで導入する</a:t>
             </a:r>
             <a:endParaRPr lang="en-US" sz="1080" dirty="0"/>
           </a:p>
@@ -3524,37 +3394,206 @@
       </p:sp>
       <p:sp>
         <p:nvSpPr>
-          <p:cNvPr id="26" name="Text 19"/>
-          <p:cNvSpPr/>
-          <p:nvPr/>
-        </p:nvSpPr>
-        <p:spPr>
-          <a:xfrm>
-            <a:off x="457200" y="6547104"/>
-            <a:ext cx="8686800" cy="256032"/>
-          </a:xfrm>
-          <a:prstGeom prst="rect">
-            <a:avLst/>
-          </a:prstGeom>
-          <a:noFill/>
-          <a:ln/>
-        </p:spPr>
-        <p:txBody>
-          <a:bodyPr wrap="square" rtlCol="0" anchor="ctr"/>
-          <a:lstStyle/>
-          <a:p>
-            <a:pPr algn="l" indent="0" marL="0">
-              <a:buNone/>
-            </a:pPr>
-            <a:r>
-              <a:rPr lang="en-US" sz="850" dirty="0">
-                <a:solidFill>
-                  <a:srgbClr val="8A97A4"/>
+          <p:cNvPr id="28" name="Shape 23"/>
+          <p:cNvSpPr/>
+          <p:nvPr/>
+        </p:nvSpPr>
+        <p:spPr>
+          <a:xfrm>
+            <a:off x="548640" y="5513832"/>
+            <a:ext cx="10881360" cy="850000"/>
+          </a:xfrm>
+          <a:prstGeom prst="roundRect">
+            <a:avLst>
+              <a:gd name="adj" fmla="val 5000"/>
+            </a:avLst>
+          </a:prstGeom>
+          <a:solidFill>
+            <a:srgbClr val="FAFBFC"/>
+          </a:solidFill>
+          <a:ln w="12700">
+            <a:solidFill>
+              <a:srgbClr val="D7E2EC"/>
+            </a:solidFill>
+            <a:prstDash val="solid"/>
+          </a:ln>
+        </p:spPr>
+        <p:txBody>
+          <a:bodyPr/>
+          <a:lstStyle/>
+          <a:p>
+            <a:endParaRPr lang="ja-JP" altLang="en-US"/>
+          </a:p>
+        </p:txBody>
+      </p:sp>
+      <p:sp>
+        <p:nvSpPr>
+          <p:cNvPr id="29" name="Shape 24"/>
+          <p:cNvSpPr/>
+          <p:nvPr/>
+        </p:nvSpPr>
+        <p:spPr>
+          <a:xfrm>
+            <a:off x="749808" y="5613832"/>
+            <a:ext cx="457200" cy="457200"/>
+          </a:xfrm>
+          <a:prstGeom prst="ellipse">
+            <a:avLst/>
+          </a:prstGeom>
+          <a:solidFill>
+            <a:srgbClr val="FFF4E5"/>
+          </a:solidFill>
+          <a:ln/>
+        </p:spPr>
+        <p:txBody>
+          <a:bodyPr/>
+          <a:lstStyle/>
+          <a:p>
+            <a:endParaRPr lang="ja-JP" altLang="en-US"/>
+          </a:p>
+        </p:txBody>
+      </p:sp>
+      <p:pic>
+        <p:nvPicPr>
+          <p:cNvPr id="30" name="Image 5" descr="/tmp/esp32p4_guide/icons/warning_9A5B00.png"/>
+          <p:cNvPicPr>
+            <a:picLocks noChangeAspect="1"/>
+          </p:cNvPicPr>
+          <p:nvPr/>
+        </p:nvPicPr>
+        <p:blipFill>
+          <a:blip r:embed="rId4"/>
+          <a:stretch>
+            <a:fillRect/>
+          </a:stretch>
+        </p:blipFill>
+        <p:spPr>
+          <a:xfrm>
+            <a:off x="852678" y="5716702"/>
+            <a:ext cx="251460" cy="251460"/>
+          </a:xfrm>
+          <a:prstGeom prst="rect">
+            <a:avLst/>
+          </a:prstGeom>
+        </p:spPr>
+      </p:pic>
+      <p:sp>
+        <p:nvSpPr>
+          <p:cNvPr id="31" name="Text 29"/>
+          <p:cNvSpPr/>
+          <p:nvPr/>
+        </p:nvSpPr>
+        <p:spPr>
+          <a:xfrm>
+            <a:off x="1353312" y="5670000"/>
+            <a:ext cx="9500000" cy="292608"/>
+          </a:xfrm>
+          <a:prstGeom prst="rect">
+            <a:avLst/>
+          </a:prstGeom>
+          <a:noFill/>
+          <a:ln/>
+        </p:spPr>
+        <p:txBody>
+          <a:bodyPr wrap="square" lIns="0" tIns="0" rIns="0" bIns="0" rtlCol="0" anchor="t"/>
+          <a:lstStyle/>
+          <a:p>
+            <a:pPr marL="0" indent="0">
+              <a:lnSpc>
+                <a:spcPct val="115000"/>
+              </a:lnSpc>
+              <a:buNone/>
+            </a:pPr>
+            <a:r>
+              <a:rPr lang="en-US" sz="1300" b="1" dirty="0">
+                <a:solidFill>
+                  <a:srgbClr val="0D2036"/>
+                </a:solidFill>
+                <a:latin typeface="Bookman Old Style" pitchFamily="34" charset="0"/>
+                <a:ea typeface="Bookman Old Style" pitchFamily="34" charset="-122"/>
+                <a:cs typeface="Bookman Old Style" pitchFamily="34" charset="-120"/>
+              </a:rPr>
+              <a:t>書き込み時に「chip revision」エラーが出る</a:t>
+            </a:r>
+            <a:endParaRPr lang="en-US" sz="1300" dirty="0"/>
+          </a:p>
+        </p:txBody>
+      </p:sp>
+      <p:sp>
+        <p:nvSpPr>
+          <p:cNvPr id="32" name="Text 30"/>
+          <p:cNvSpPr/>
+          <p:nvPr/>
+        </p:nvSpPr>
+        <p:spPr>
+          <a:xfrm>
+            <a:off x="1353312" y="5990000"/>
+            <a:ext cx="9700000" cy="320000"/>
+          </a:xfrm>
+          <a:prstGeom prst="rect">
+            <a:avLst/>
+          </a:prstGeom>
+          <a:noFill/>
+          <a:ln/>
+        </p:spPr>
+        <p:txBody>
+          <a:bodyPr wrap="square" lIns="0" tIns="0" rIns="0" bIns="0" rtlCol="0" anchor="t"/>
+          <a:lstStyle/>
+          <a:p>
+            <a:pPr marL="0" indent="0">
+              <a:lnSpc>
+                <a:spcPct val="125000"/>
+              </a:lnSpc>
+              <a:buNone/>
+            </a:pPr>
+            <a:r>
+              <a:rPr lang="en-US" sz="1080" dirty="0">
+                <a:solidFill>
+                  <a:srgbClr val="2A2A2A"/>
                 </a:solidFill>
                 <a:latin typeface="Calibri" pitchFamily="34" charset="0"/>
                 <a:ea typeface="Calibri" pitchFamily="34" charset="-122"/>
                 <a:cs typeface="Calibri" pitchFamily="34" charset="-120"/>
               </a:rPr>
+              <a:t>SDK Configuration Editorで「Select ESP32-P4 revisions &lt;3.0」を有効にしFull Clean（手順書7-6）</a:t>
+            </a:r>
+            <a:endParaRPr lang="en-US" sz="1080" dirty="0"/>
+          </a:p>
+        </p:txBody>
+      </p:sp>
+      <p:sp>
+        <p:nvSpPr>
+          <p:cNvPr id="26" name="Text 19"/>
+          <p:cNvSpPr/>
+          <p:nvPr/>
+        </p:nvSpPr>
+        <p:spPr>
+          <a:xfrm>
+            <a:off x="457200" y="6547104"/>
+            <a:ext cx="8686800" cy="256032"/>
+          </a:xfrm>
+          <a:prstGeom prst="rect">
+            <a:avLst/>
+          </a:prstGeom>
+          <a:noFill/>
+          <a:ln/>
+        </p:spPr>
+        <p:txBody>
+          <a:bodyPr wrap="square" rtlCol="0" anchor="ctr"/>
+          <a:lstStyle/>
+          <a:p>
+            <a:pPr marL="0" indent="0" algn="l">
+              <a:buNone/>
+            </a:pPr>
+            <a:r>
+              <a:rPr lang="en-US" sz="850" dirty="0">
+                <a:solidFill>
+                  <a:srgbClr val="8A97A4"/>
+                </a:solidFill>
+                <a:latin typeface="Calibri" pitchFamily="34" charset="0"/>
+                <a:ea typeface="Calibri" pitchFamily="34" charset="-122"/>
+                <a:cs typeface="Calibri" pitchFamily="34" charset="-120"/>
+              </a:rPr>
               <a:t>ESP-IDF × VS Code セットアップガイド  |  CrowPanel Advanced 7inch (ESP32-P4)</a:t>
             </a:r>
             <a:endParaRPr lang="en-US" sz="850" dirty="0"/>
@@ -3582,7 +3621,7 @@
           <a:bodyPr wrap="square" rtlCol="0" anchor="ctr"/>
           <a:lstStyle/>
           <a:p>
-            <a:pPr algn="r" indent="0" marL="0">
+            <a:pPr marL="0" indent="0" algn="r">
               <a:buNone/>
             </a:pPr>
             <a:r>
@@ -3616,6 +3655,7 @@
         <a:solidFill>
           <a:srgbClr val="0D2036"/>
         </a:solidFill>
+        <a:effectLst/>
       </p:bgPr>
     </p:bg>
     <p:spTree>
@@ -3653,7 +3693,7 @@
           <a:bodyPr wrap="square" lIns="0" tIns="0" rIns="0" bIns="0" rtlCol="0" anchor="ctr"/>
           <a:lstStyle/>
           <a:p>
-            <a:pPr indent="0" marL="0">
+            <a:pPr marL="0" indent="0">
               <a:buNone/>
             </a:pPr>
             <a:r>
@@ -3697,6 +3737,13 @@
             <a:prstDash val="solid"/>
           </a:ln>
         </p:spPr>
+        <p:txBody>
+          <a:bodyPr/>
+          <a:lstStyle/>
+          <a:p>
+            <a:endParaRPr lang="ja-JP" altLang="en-US"/>
+          </a:p>
+        </p:txBody>
       </p:sp>
       <p:sp>
         <p:nvSpPr>
@@ -3717,17 +3764,24 @@
           </a:solidFill>
           <a:ln/>
         </p:spPr>
+        <p:txBody>
+          <a:bodyPr/>
+          <a:lstStyle/>
+          <a:p>
+            <a:endParaRPr lang="ja-JP" altLang="en-US"/>
+          </a:p>
+        </p:txBody>
       </p:sp>
       <p:pic>
         <p:nvPicPr>
-          <p:cNvPr id="5" name="Image 0" descr="/tmp/esp32p4_guide/icons/clipboard_FFFFFF.png">    </p:cNvPr>
+          <p:cNvPr id="5" name="Image 0" descr="/tmp/esp32p4_guide/icons/clipboard_FFFFFF.png"/>
           <p:cNvPicPr>
             <a:picLocks noChangeAspect="1"/>
           </p:cNvPicPr>
           <p:nvPr/>
         </p:nvPicPr>
         <p:blipFill>
-          <a:blip r:embed="rId1"/>
+          <a:blip r:embed="rId3"/>
           <a:stretch>
             <a:fillRect/>
           </a:stretch>
@@ -3763,7 +3817,7 @@
           <a:bodyPr wrap="square" lIns="0" tIns="0" rIns="0" bIns="0" rtlCol="0" anchor="t"/>
           <a:lstStyle/>
           <a:p>
-            <a:pPr algn="ctr" indent="0" marL="0">
+            <a:pPr marL="0" indent="0" algn="ctr">
               <a:lnSpc>
                 <a:spcPct val="110000"/>
               </a:lnSpc>
@@ -3810,6 +3864,13 @@
             <a:prstDash val="solid"/>
           </a:ln>
         </p:spPr>
+        <p:txBody>
+          <a:bodyPr/>
+          <a:lstStyle/>
+          <a:p>
+            <a:endParaRPr lang="ja-JP" altLang="en-US"/>
+          </a:p>
+        </p:txBody>
       </p:sp>
       <p:sp>
         <p:nvSpPr>
@@ -3830,17 +3891,24 @@
           </a:solidFill>
           <a:ln/>
         </p:spPr>
+        <p:txBody>
+          <a:bodyPr/>
+          <a:lstStyle/>
+          <a:p>
+            <a:endParaRPr lang="ja-JP" altLang="en-US"/>
+          </a:p>
+        </p:txBody>
       </p:sp>
       <p:pic>
         <p:nvPicPr>
-          <p:cNvPr id="9" name="Image 1" descr="/tmp/esp32p4_guide/icons/vscode_FFFFFF.png">    </p:cNvPr>
+          <p:cNvPr id="9" name="Image 1" descr="/tmp/esp32p4_guide/icons/vscode_FFFFFF.png"/>
           <p:cNvPicPr>
             <a:picLocks noChangeAspect="1"/>
           </p:cNvPicPr>
           <p:nvPr/>
         </p:nvPicPr>
         <p:blipFill>
-          <a:blip r:embed="rId2"/>
+          <a:blip r:embed="rId4"/>
           <a:stretch>
             <a:fillRect/>
           </a:stretch>
@@ -3876,7 +3944,7 @@
           <a:bodyPr wrap="square" lIns="0" tIns="0" rIns="0" bIns="0" rtlCol="0" anchor="t"/>
           <a:lstStyle/>
           <a:p>
-            <a:pPr algn="ctr" indent="0" marL="0">
+            <a:pPr marL="0" indent="0" algn="ctr">
               <a:lnSpc>
                 <a:spcPct val="110000"/>
               </a:lnSpc>
@@ -3923,6 +3991,13 @@
             <a:prstDash val="solid"/>
           </a:ln>
         </p:spPr>
+        <p:txBody>
+          <a:bodyPr/>
+          <a:lstStyle/>
+          <a:p>
+            <a:endParaRPr lang="ja-JP" altLang="en-US"/>
+          </a:p>
+        </p:txBody>
       </p:sp>
       <p:sp>
         <p:nvSpPr>
@@ -3943,17 +4018,24 @@
           </a:solidFill>
           <a:ln/>
         </p:spPr>
+        <p:txBody>
+          <a:bodyPr/>
+          <a:lstStyle/>
+          <a:p>
+            <a:endParaRPr lang="ja-JP" altLang="en-US"/>
+          </a:p>
+        </p:txBody>
       </p:sp>
       <p:pic>
         <p:nvPicPr>
-          <p:cNvPr id="13" name="Image 2" descr="/tmp/esp32p4_guide/icons/usb_FFFFFF.png">    </p:cNvPr>
+          <p:cNvPr id="13" name="Image 2" descr="/tmp/esp32p4_guide/icons/usb_FFFFFF.png"/>
           <p:cNvPicPr>
             <a:picLocks noChangeAspect="1"/>
           </p:cNvPicPr>
           <p:nvPr/>
         </p:nvPicPr>
         <p:blipFill>
-          <a:blip r:embed="rId3"/>
+          <a:blip r:embed="rId5"/>
           <a:stretch>
             <a:fillRect/>
           </a:stretch>
@@ -3989,7 +4071,7 @@
           <a:bodyPr wrap="square" lIns="0" tIns="0" rIns="0" bIns="0" rtlCol="0" anchor="t"/>
           <a:lstStyle/>
           <a:p>
-            <a:pPr algn="ctr" indent="0" marL="0">
+            <a:pPr marL="0" indent="0" algn="ctr">
               <a:lnSpc>
                 <a:spcPct val="110000"/>
               </a:lnSpc>
@@ -4036,6 +4118,13 @@
             <a:prstDash val="solid"/>
           </a:ln>
         </p:spPr>
+        <p:txBody>
+          <a:bodyPr/>
+          <a:lstStyle/>
+          <a:p>
+            <a:endParaRPr lang="ja-JP" altLang="en-US"/>
+          </a:p>
+        </p:txBody>
       </p:sp>
       <p:sp>
         <p:nvSpPr>
@@ -4056,17 +4145,24 @@
           </a:solidFill>
           <a:ln/>
         </p:spPr>
+        <p:txBody>
+          <a:bodyPr/>
+          <a:lstStyle/>
+          <a:p>
+            <a:endParaRPr lang="ja-JP" altLang="en-US"/>
+          </a:p>
+        </p:txBody>
       </p:sp>
       <p:pic>
         <p:nvPicPr>
-          <p:cNvPr id="17" name="Image 3" descr="/tmp/esp32p4_guide/icons/puzzle_FFFFFF.png">    </p:cNvPr>
+          <p:cNvPr id="17" name="Image 3" descr="/tmp/esp32p4_guide/icons/puzzle_FFFFFF.png"/>
           <p:cNvPicPr>
             <a:picLocks noChangeAspect="1"/>
           </p:cNvPicPr>
           <p:nvPr/>
         </p:nvPicPr>
         <p:blipFill>
-          <a:blip r:embed="rId4"/>
+          <a:blip r:embed="rId6"/>
           <a:stretch>
             <a:fillRect/>
           </a:stretch>
@@ -4102,7 +4198,7 @@
           <a:bodyPr wrap="square" lIns="0" tIns="0" rIns="0" bIns="0" rtlCol="0" anchor="t"/>
           <a:lstStyle/>
           <a:p>
-            <a:pPr algn="ctr" indent="0" marL="0">
+            <a:pPr marL="0" indent="0" algn="ctr">
               <a:lnSpc>
                 <a:spcPct val="110000"/>
               </a:lnSpc>
@@ -4149,6 +4245,13 @@
             <a:prstDash val="solid"/>
           </a:ln>
         </p:spPr>
+        <p:txBody>
+          <a:bodyPr/>
+          <a:lstStyle/>
+          <a:p>
+            <a:endParaRPr lang="ja-JP" altLang="en-US"/>
+          </a:p>
+        </p:txBody>
       </p:sp>
       <p:sp>
         <p:nvSpPr>
@@ -4169,17 +4272,24 @@
           </a:solidFill>
           <a:ln/>
         </p:spPr>
+        <p:txBody>
+          <a:bodyPr/>
+          <a:lstStyle/>
+          <a:p>
+            <a:endParaRPr lang="ja-JP" altLang="en-US"/>
+          </a:p>
+        </p:txBody>
       </p:sp>
       <p:pic>
         <p:nvPicPr>
-          <p:cNvPr id="21" name="Image 4" descr="/tmp/esp32p4_guide/icons/cloud_FFFFFF.png">    </p:cNvPr>
+          <p:cNvPr id="21" name="Image 4" descr="/tmp/esp32p4_guide/icons/cloud_FFFFFF.png"/>
           <p:cNvPicPr>
             <a:picLocks noChangeAspect="1"/>
           </p:cNvPicPr>
           <p:nvPr/>
         </p:nvPicPr>
         <p:blipFill>
-          <a:blip r:embed="rId5"/>
+          <a:blip r:embed="rId7"/>
           <a:stretch>
             <a:fillRect/>
           </a:stretch>
@@ -4215,7 +4325,7 @@
           <a:bodyPr wrap="square" lIns="0" tIns="0" rIns="0" bIns="0" rtlCol="0" anchor="t"/>
           <a:lstStyle/>
           <a:p>
-            <a:pPr algn="ctr" indent="0" marL="0">
+            <a:pPr marL="0" indent="0" algn="ctr">
               <a:lnSpc>
                 <a:spcPct val="110000"/>
               </a:lnSpc>
@@ -4262,6 +4372,13 @@
             <a:prstDash val="solid"/>
           </a:ln>
         </p:spPr>
+        <p:txBody>
+          <a:bodyPr/>
+          <a:lstStyle/>
+          <a:p>
+            <a:endParaRPr lang="ja-JP" altLang="en-US"/>
+          </a:p>
+        </p:txBody>
       </p:sp>
       <p:sp>
         <p:nvSpPr>
@@ -4282,218 +4399,17 @@
           </a:solidFill>
           <a:ln/>
         </p:spPr>
+        <p:txBody>
+          <a:bodyPr/>
+          <a:lstStyle/>
+          <a:p>
+            <a:endParaRPr lang="ja-JP" altLang="en-US"/>
+          </a:p>
+        </p:txBody>
       </p:sp>
       <p:pic>
         <p:nvPicPr>
-          <p:cNvPr id="25" name="Image 5" descr="/tmp/esp32p4_guide/icons/bolt_FFFFFF.png">    </p:cNvPr>
-          <p:cNvPicPr>
-            <a:picLocks noChangeAspect="1"/>
-          </p:cNvPicPr>
-          <p:nvPr/>
-        </p:nvPicPr>
-        <p:blipFill>
-          <a:blip r:embed="rId6"/>
-          <a:stretch>
-            <a:fillRect/>
-          </a:stretch>
-        </p:blipFill>
-        <p:spPr>
-          <a:xfrm>
-            <a:off x="10433304" y="1568196"/>
-            <a:ext cx="301752" cy="301752"/>
-          </a:xfrm>
-          <a:prstGeom prst="rect">
-            <a:avLst/>
-          </a:prstGeom>
-        </p:spPr>
-      </p:pic>
-      <p:sp>
-        <p:nvSpPr>
-          <p:cNvPr id="26" name="Text 18"/>
-          <p:cNvSpPr/>
-          <p:nvPr/>
-        </p:nvSpPr>
-        <p:spPr>
-          <a:xfrm>
-            <a:off x="9811512" y="2084832"/>
-            <a:ext cx="1545336" cy="502920"/>
-          </a:xfrm>
-          <a:prstGeom prst="rect">
-            <a:avLst/>
-          </a:prstGeom>
-          <a:noFill/>
-          <a:ln/>
-        </p:spPr>
-        <p:txBody>
-          <a:bodyPr wrap="square" lIns="0" tIns="0" rIns="0" bIns="0" rtlCol="0" anchor="t"/>
-          <a:lstStyle/>
-          <a:p>
-            <a:pPr algn="ctr" indent="0" marL="0">
-              <a:lnSpc>
-                <a:spcPct val="110000"/>
-              </a:lnSpc>
-              <a:buNone/>
-            </a:pPr>
-            <a:r>
-              <a:rPr lang="en-US" sz="1050" b="1" dirty="0">
-                <a:solidFill>
-                  <a:srgbClr val="FFFFFF"/>
-                </a:solidFill>
-                <a:latin typeface="Calibri" pitchFamily="34" charset="0"/>
-                <a:ea typeface="Calibri" pitchFamily="34" charset="-122"/>
-                <a:cs typeface="Calibri" pitchFamily="34" charset="-120"/>
-              </a:rPr>
-              <a:t>動作確認</a:t>
-            </a:r>
-            <a:endParaRPr lang="en-US" sz="1050" dirty="0"/>
-          </a:p>
-        </p:txBody>
-      </p:sp>
-      <p:sp>
-        <p:nvSpPr>
-          <p:cNvPr id="27" name="Text 19"/>
-          <p:cNvSpPr/>
-          <p:nvPr/>
-        </p:nvSpPr>
-        <p:spPr>
-          <a:xfrm>
-            <a:off x="548640" y="3063240"/>
-            <a:ext cx="5486400" cy="365760"/>
-          </a:xfrm>
-          <a:prstGeom prst="rect">
-            <a:avLst/>
-          </a:prstGeom>
-          <a:noFill/>
-          <a:ln/>
-        </p:spPr>
-        <p:txBody>
-          <a:bodyPr wrap="square" lIns="0" tIns="0" rIns="0" bIns="0" rtlCol="0" anchor="ctr"/>
-          <a:lstStyle/>
-          <a:p>
-            <a:pPr indent="0" marL="0">
-              <a:buNone/>
-            </a:pPr>
-            <a:r>
-              <a:rPr lang="en-US" sz="1600" b="1" dirty="0">
-                <a:solidFill>
-                  <a:srgbClr val="FFFFFF"/>
-                </a:solidFill>
-                <a:latin typeface="Bookman Old Style" pitchFamily="34" charset="0"/>
-                <a:ea typeface="Bookman Old Style" pitchFamily="34" charset="-122"/>
-                <a:cs typeface="Bookman Old Style" pitchFamily="34" charset="-120"/>
-              </a:rPr>
-              <a:t>参考リンク</a:t>
-            </a:r>
-            <a:endParaRPr lang="en-US" sz="1600" dirty="0"/>
-          </a:p>
-        </p:txBody>
-      </p:sp>
-      <p:sp>
-        <p:nvSpPr>
-          <p:cNvPr id="28" name="Shape 20"/>
-          <p:cNvSpPr/>
-          <p:nvPr/>
-        </p:nvSpPr>
-        <p:spPr>
-          <a:xfrm>
-            <a:off x="548640" y="3520440"/>
-            <a:ext cx="329184" cy="329184"/>
-          </a:xfrm>
-          <a:prstGeom prst="ellipse">
-            <a:avLst/>
-          </a:prstGeom>
-          <a:solidFill>
-            <a:srgbClr val="15304A"/>
-          </a:solidFill>
-          <a:ln/>
-        </p:spPr>
-      </p:sp>
-      <p:pic>
-        <p:nvPicPr>
-          <p:cNvPr id="29" name="Image 6" descr="/tmp/esp32p4_guide/icons/link_02C39A.png">    </p:cNvPr>
-          <p:cNvPicPr>
-            <a:picLocks noChangeAspect="1"/>
-          </p:cNvPicPr>
-          <p:nvPr/>
-        </p:nvPicPr>
-        <p:blipFill>
-          <a:blip r:embed="rId7"/>
-          <a:stretch>
-            <a:fillRect/>
-          </a:stretch>
-        </p:blipFill>
-        <p:spPr>
-          <a:xfrm>
-            <a:off x="622706" y="3594506"/>
-            <a:ext cx="181051" cy="181051"/>
-          </a:xfrm>
-          <a:prstGeom prst="rect">
-            <a:avLst/>
-          </a:prstGeom>
-        </p:spPr>
-      </p:pic>
-      <p:sp>
-        <p:nvSpPr>
-          <p:cNvPr id="30" name="Text 21"/>
-          <p:cNvSpPr/>
-          <p:nvPr/>
-        </p:nvSpPr>
-        <p:spPr>
-          <a:xfrm>
-            <a:off x="1005840" y="3493008"/>
-            <a:ext cx="10058400" cy="384048"/>
-          </a:xfrm>
-          <a:prstGeom prst="rect">
-            <a:avLst/>
-          </a:prstGeom>
-          <a:noFill/>
-          <a:ln/>
-        </p:spPr>
-        <p:txBody>
-          <a:bodyPr wrap="square" lIns="0" tIns="0" rIns="0" bIns="0" rtlCol="0" anchor="ctr"/>
-          <a:lstStyle/>
-          <a:p>
-            <a:pPr indent="0" marL="0">
-              <a:buNone/>
-            </a:pPr>
-            <a:r>
-              <a:rPr lang="en-US" sz="1200" dirty="0">
-                <a:solidFill>
-                  <a:srgbClr val="CFE3F7"/>
-                </a:solidFill>
-                <a:latin typeface="Calibri" pitchFamily="34" charset="0"/>
-                <a:ea typeface="Calibri" pitchFamily="34" charset="-122"/>
-                <a:cs typeface="Calibri" pitchFamily="34" charset="-120"/>
-              </a:rPr>
-              <a:t>Elecrow公式コース資料（Advance HMI P4 7inch Course V1.1）</a:t>
-            </a:r>
-            <a:endParaRPr lang="en-US" sz="1200" dirty="0"/>
-          </a:p>
-        </p:txBody>
-      </p:sp>
-      <p:sp>
-        <p:nvSpPr>
-          <p:cNvPr id="31" name="Shape 22"/>
-          <p:cNvSpPr/>
-          <p:nvPr/>
-        </p:nvSpPr>
-        <p:spPr>
-          <a:xfrm>
-            <a:off x="548640" y="3995928"/>
-            <a:ext cx="329184" cy="329184"/>
-          </a:xfrm>
-          <a:prstGeom prst="ellipse">
-            <a:avLst/>
-          </a:prstGeom>
-          <a:solidFill>
-            <a:srgbClr val="15304A"/>
-          </a:solidFill>
-          <a:ln/>
-        </p:spPr>
-      </p:sp>
-      <p:pic>
-        <p:nvPicPr>
-          <p:cNvPr id="32" name="Image 7" descr="/tmp/esp32p4_guide/icons/link_02C39A.png">    </p:cNvPr>
+          <p:cNvPr id="25" name="Image 5" descr="/tmp/esp32p4_guide/icons/bolt_FFFFFF.png"/>
           <p:cNvPicPr>
             <a:picLocks noChangeAspect="1"/>
           </p:cNvPicPr>
@@ -4507,8 +4423,8 @@
         </p:blipFill>
         <p:spPr>
           <a:xfrm>
-            <a:off x="622706" y="4069994"/>
-            <a:ext cx="181051" cy="181051"/>
+            <a:off x="10433304" y="1568196"/>
+            <a:ext cx="301752" cy="301752"/>
           </a:xfrm>
           <a:prstGeom prst="rect">
             <a:avLst/>
@@ -4517,52 +4433,94 @@
       </p:pic>
       <p:sp>
         <p:nvSpPr>
-          <p:cNvPr id="33" name="Text 23"/>
-          <p:cNvSpPr/>
-          <p:nvPr/>
-        </p:nvSpPr>
-        <p:spPr>
-          <a:xfrm>
-            <a:off x="1005840" y="3968496"/>
-            <a:ext cx="10058400" cy="384048"/>
-          </a:xfrm>
-          <a:prstGeom prst="rect">
-            <a:avLst/>
-          </a:prstGeom>
-          <a:noFill/>
-          <a:ln/>
-        </p:spPr>
-        <p:txBody>
-          <a:bodyPr wrap="square" lIns="0" tIns="0" rIns="0" bIns="0" rtlCol="0" anchor="ctr"/>
-          <a:lstStyle/>
-          <a:p>
-            <a:pPr indent="0" marL="0">
-              <a:buNone/>
-            </a:pPr>
-            <a:r>
-              <a:rPr lang="en-US" sz="1200" dirty="0">
-                <a:solidFill>
-                  <a:srgbClr val="CFE3F7"/>
+          <p:cNvPr id="26" name="Text 18"/>
+          <p:cNvSpPr/>
+          <p:nvPr/>
+        </p:nvSpPr>
+        <p:spPr>
+          <a:xfrm>
+            <a:off x="9811512" y="2084832"/>
+            <a:ext cx="1545336" cy="502920"/>
+          </a:xfrm>
+          <a:prstGeom prst="rect">
+            <a:avLst/>
+          </a:prstGeom>
+          <a:noFill/>
+          <a:ln/>
+        </p:spPr>
+        <p:txBody>
+          <a:bodyPr wrap="square" lIns="0" tIns="0" rIns="0" bIns="0" rtlCol="0" anchor="t"/>
+          <a:lstStyle/>
+          <a:p>
+            <a:pPr marL="0" indent="0" algn="ctr">
+              <a:lnSpc>
+                <a:spcPct val="110000"/>
+              </a:lnSpc>
+              <a:buNone/>
+            </a:pPr>
+            <a:r>
+              <a:rPr lang="en-US" sz="1050" b="1" dirty="0">
+                <a:solidFill>
+                  <a:srgbClr val="FFFFFF"/>
                 </a:solidFill>
                 <a:latin typeface="Calibri" pitchFamily="34" charset="0"/>
                 <a:ea typeface="Calibri" pitchFamily="34" charset="-122"/>
                 <a:cs typeface="Calibri" pitchFamily="34" charset="-120"/>
               </a:rPr>
-              <a:t>Elecrow公式GitHubリポジトリ（CrowPanel-Advanced-7inch-ESP32-P4）</a:t>
-            </a:r>
-            <a:endParaRPr lang="en-US" sz="1200" dirty="0"/>
-          </a:p>
-        </p:txBody>
-      </p:sp>
-      <p:sp>
-        <p:nvSpPr>
-          <p:cNvPr id="34" name="Shape 24"/>
-          <p:cNvSpPr/>
-          <p:nvPr/>
-        </p:nvSpPr>
-        <p:spPr>
-          <a:xfrm>
-            <a:off x="548640" y="4471416"/>
+              <a:t>動作確認</a:t>
+            </a:r>
+            <a:endParaRPr lang="en-US" sz="1050" dirty="0"/>
+          </a:p>
+        </p:txBody>
+      </p:sp>
+      <p:sp>
+        <p:nvSpPr>
+          <p:cNvPr id="27" name="Text 19"/>
+          <p:cNvSpPr/>
+          <p:nvPr/>
+        </p:nvSpPr>
+        <p:spPr>
+          <a:xfrm>
+            <a:off x="548640" y="3063240"/>
+            <a:ext cx="5486400" cy="365760"/>
+          </a:xfrm>
+          <a:prstGeom prst="rect">
+            <a:avLst/>
+          </a:prstGeom>
+          <a:noFill/>
+          <a:ln/>
+        </p:spPr>
+        <p:txBody>
+          <a:bodyPr wrap="square" lIns="0" tIns="0" rIns="0" bIns="0" rtlCol="0" anchor="ctr"/>
+          <a:lstStyle/>
+          <a:p>
+            <a:pPr marL="0" indent="0">
+              <a:buNone/>
+            </a:pPr>
+            <a:r>
+              <a:rPr lang="en-US" sz="1600" b="1" dirty="0">
+                <a:solidFill>
+                  <a:srgbClr val="FFFFFF"/>
+                </a:solidFill>
+                <a:latin typeface="Bookman Old Style" pitchFamily="34" charset="0"/>
+                <a:ea typeface="Bookman Old Style" pitchFamily="34" charset="-122"/>
+                <a:cs typeface="Bookman Old Style" pitchFamily="34" charset="-120"/>
+              </a:rPr>
+              <a:t>参考リンク</a:t>
+            </a:r>
+            <a:endParaRPr lang="en-US" sz="1600" dirty="0"/>
+          </a:p>
+        </p:txBody>
+      </p:sp>
+      <p:sp>
+        <p:nvSpPr>
+          <p:cNvPr id="28" name="Shape 20"/>
+          <p:cNvSpPr/>
+          <p:nvPr/>
+        </p:nvSpPr>
+        <p:spPr>
+          <a:xfrm>
+            <a:off x="548640" y="3520440"/>
             <a:ext cx="329184" cy="329184"/>
           </a:xfrm>
           <a:prstGeom prst="ellipse">
@@ -4573,10 +4531,17 @@
           </a:solidFill>
           <a:ln/>
         </p:spPr>
+        <p:txBody>
+          <a:bodyPr/>
+          <a:lstStyle/>
+          <a:p>
+            <a:endParaRPr lang="ja-JP" altLang="en-US"/>
+          </a:p>
+        </p:txBody>
       </p:sp>
       <p:pic>
         <p:nvPicPr>
-          <p:cNvPr id="35" name="Image 8" descr="/tmp/esp32p4_guide/icons/link_02C39A.png">    </p:cNvPr>
+          <p:cNvPr id="29" name="Image 6" descr="/tmp/esp32p4_guide/icons/link_02C39A.png"/>
           <p:cNvPicPr>
             <a:picLocks noChangeAspect="1"/>
           </p:cNvPicPr>
@@ -4590,7 +4555,7 @@
         </p:blipFill>
         <p:spPr>
           <a:xfrm>
-            <a:off x="622706" y="4545482"/>
+            <a:off x="622706" y="3594506"/>
             <a:ext cx="181051" cy="181051"/>
           </a:xfrm>
           <a:prstGeom prst="rect">
@@ -4600,13 +4565,13 @@
       </p:pic>
       <p:sp>
         <p:nvSpPr>
-          <p:cNvPr id="36" name="Text 25"/>
-          <p:cNvSpPr/>
-          <p:nvPr/>
-        </p:nvSpPr>
-        <p:spPr>
-          <a:xfrm>
-            <a:off x="1005840" y="4443984"/>
+          <p:cNvPr id="30" name="Text 21"/>
+          <p:cNvSpPr/>
+          <p:nvPr/>
+        </p:nvSpPr>
+        <p:spPr>
+          <a:xfrm>
+            <a:off x="1005840" y="3493008"/>
             <a:ext cx="10058400" cy="384048"/>
           </a:xfrm>
           <a:prstGeom prst="rect">
@@ -4619,7 +4584,7 @@
           <a:bodyPr wrap="square" lIns="0" tIns="0" rIns="0" bIns="0" rtlCol="0" anchor="ctr"/>
           <a:lstStyle/>
           <a:p>
-            <a:pPr indent="0" marL="0">
+            <a:pPr marL="0" indent="0">
               <a:buNone/>
             </a:pPr>
             <a:r>
@@ -4631,7 +4596,7 @@
                 <a:ea typeface="Calibri" pitchFamily="34" charset="-122"/>
                 <a:cs typeface="Calibri" pitchFamily="34" charset="-120"/>
               </a:rPr>
-              <a:t>ESP-IDF VS Code拡張機能 公式ドキュメント（docs.espressif.com）</a:t>
+              <a:t>Elecrow公式コース資料（Advance HMI P4 7inch Course V1.1）</a:t>
             </a:r>
             <a:endParaRPr lang="en-US" sz="1200" dirty="0"/>
           </a:p>
@@ -4639,13 +4604,13 @@
       </p:sp>
       <p:sp>
         <p:nvSpPr>
-          <p:cNvPr id="37" name="Shape 26"/>
-          <p:cNvSpPr/>
-          <p:nvPr/>
-        </p:nvSpPr>
-        <p:spPr>
-          <a:xfrm>
-            <a:off x="548640" y="4946904"/>
+          <p:cNvPr id="31" name="Shape 22"/>
+          <p:cNvSpPr/>
+          <p:nvPr/>
+        </p:nvSpPr>
+        <p:spPr>
+          <a:xfrm>
+            <a:off x="548640" y="3995928"/>
             <a:ext cx="329184" cy="329184"/>
           </a:xfrm>
           <a:prstGeom prst="ellipse">
@@ -4656,23 +4621,210 @@
           </a:solidFill>
           <a:ln/>
         </p:spPr>
+        <p:txBody>
+          <a:bodyPr/>
+          <a:lstStyle/>
+          <a:p>
+            <a:endParaRPr lang="ja-JP" altLang="en-US"/>
+          </a:p>
+        </p:txBody>
       </p:sp>
       <p:pic>
         <p:nvPicPr>
-          <p:cNvPr id="38" name="Image 9" descr="/tmp/esp32p4_guide/icons/link_02C39A.png">    </p:cNvPr>
+          <p:cNvPr id="32" name="Image 7" descr="/tmp/esp32p4_guide/icons/link_02C39A.png"/>
           <p:cNvPicPr>
             <a:picLocks noChangeAspect="1"/>
           </p:cNvPicPr>
           <p:nvPr/>
         </p:nvPicPr>
         <p:blipFill>
-          <a:blip r:embed="rId10"/>
+          <a:blip r:embed="rId9"/>
           <a:stretch>
             <a:fillRect/>
           </a:stretch>
         </p:blipFill>
         <p:spPr>
           <a:xfrm>
+            <a:off x="622706" y="4069994"/>
+            <a:ext cx="181051" cy="181051"/>
+          </a:xfrm>
+          <a:prstGeom prst="rect">
+            <a:avLst/>
+          </a:prstGeom>
+        </p:spPr>
+      </p:pic>
+      <p:sp>
+        <p:nvSpPr>
+          <p:cNvPr id="33" name="Text 23"/>
+          <p:cNvSpPr/>
+          <p:nvPr/>
+        </p:nvSpPr>
+        <p:spPr>
+          <a:xfrm>
+            <a:off x="1005840" y="3968496"/>
+            <a:ext cx="10058400" cy="384048"/>
+          </a:xfrm>
+          <a:prstGeom prst="rect">
+            <a:avLst/>
+          </a:prstGeom>
+          <a:noFill/>
+          <a:ln/>
+        </p:spPr>
+        <p:txBody>
+          <a:bodyPr wrap="square" lIns="0" tIns="0" rIns="0" bIns="0" rtlCol="0" anchor="ctr"/>
+          <a:lstStyle/>
+          <a:p>
+            <a:pPr marL="0" indent="0">
+              <a:buNone/>
+            </a:pPr>
+            <a:r>
+              <a:rPr lang="en-US" sz="1200" dirty="0">
+                <a:solidFill>
+                  <a:srgbClr val="CFE3F7"/>
+                </a:solidFill>
+                <a:latin typeface="Calibri" pitchFamily="34" charset="0"/>
+                <a:ea typeface="Calibri" pitchFamily="34" charset="-122"/>
+                <a:cs typeface="Calibri" pitchFamily="34" charset="-120"/>
+              </a:rPr>
+              <a:t>Elecrow公式GitHubリポジトリ（CrowPanel-Advanced-7inch-ESP32-P4）</a:t>
+            </a:r>
+            <a:endParaRPr lang="en-US" sz="1200" dirty="0"/>
+          </a:p>
+        </p:txBody>
+      </p:sp>
+      <p:sp>
+        <p:nvSpPr>
+          <p:cNvPr id="34" name="Shape 24"/>
+          <p:cNvSpPr/>
+          <p:nvPr/>
+        </p:nvSpPr>
+        <p:spPr>
+          <a:xfrm>
+            <a:off x="548640" y="4471416"/>
+            <a:ext cx="329184" cy="329184"/>
+          </a:xfrm>
+          <a:prstGeom prst="ellipse">
+            <a:avLst/>
+          </a:prstGeom>
+          <a:solidFill>
+            <a:srgbClr val="15304A"/>
+          </a:solidFill>
+          <a:ln/>
+        </p:spPr>
+        <p:txBody>
+          <a:bodyPr/>
+          <a:lstStyle/>
+          <a:p>
+            <a:endParaRPr lang="ja-JP" altLang="en-US"/>
+          </a:p>
+        </p:txBody>
+      </p:sp>
+      <p:pic>
+        <p:nvPicPr>
+          <p:cNvPr id="35" name="Image 8" descr="/tmp/esp32p4_guide/icons/link_02C39A.png"/>
+          <p:cNvPicPr>
+            <a:picLocks noChangeAspect="1"/>
+          </p:cNvPicPr>
+          <p:nvPr/>
+        </p:nvPicPr>
+        <p:blipFill>
+          <a:blip r:embed="rId9"/>
+          <a:stretch>
+            <a:fillRect/>
+          </a:stretch>
+        </p:blipFill>
+        <p:spPr>
+          <a:xfrm>
+            <a:off x="622706" y="4545482"/>
+            <a:ext cx="181051" cy="181051"/>
+          </a:xfrm>
+          <a:prstGeom prst="rect">
+            <a:avLst/>
+          </a:prstGeom>
+        </p:spPr>
+      </p:pic>
+      <p:sp>
+        <p:nvSpPr>
+          <p:cNvPr id="36" name="Text 25"/>
+          <p:cNvSpPr/>
+          <p:nvPr/>
+        </p:nvSpPr>
+        <p:spPr>
+          <a:xfrm>
+            <a:off x="1005840" y="4443984"/>
+            <a:ext cx="10058400" cy="384048"/>
+          </a:xfrm>
+          <a:prstGeom prst="rect">
+            <a:avLst/>
+          </a:prstGeom>
+          <a:noFill/>
+          <a:ln/>
+        </p:spPr>
+        <p:txBody>
+          <a:bodyPr wrap="square" lIns="0" tIns="0" rIns="0" bIns="0" rtlCol="0" anchor="ctr"/>
+          <a:lstStyle/>
+          <a:p>
+            <a:pPr marL="0" indent="0">
+              <a:buNone/>
+            </a:pPr>
+            <a:r>
+              <a:rPr lang="en-US" sz="1200" dirty="0">
+                <a:solidFill>
+                  <a:srgbClr val="CFE3F7"/>
+                </a:solidFill>
+                <a:latin typeface="Calibri" pitchFamily="34" charset="0"/>
+                <a:ea typeface="Calibri" pitchFamily="34" charset="-122"/>
+                <a:cs typeface="Calibri" pitchFamily="34" charset="-120"/>
+              </a:rPr>
+              <a:t>ESP-IDF VS Code拡張機能 公式ドキュメント（docs.espressif.com）</a:t>
+            </a:r>
+            <a:endParaRPr lang="en-US" sz="1200" dirty="0"/>
+          </a:p>
+        </p:txBody>
+      </p:sp>
+      <p:sp>
+        <p:nvSpPr>
+          <p:cNvPr id="37" name="Shape 26"/>
+          <p:cNvSpPr/>
+          <p:nvPr/>
+        </p:nvSpPr>
+        <p:spPr>
+          <a:xfrm>
+            <a:off x="548640" y="4946904"/>
+            <a:ext cx="329184" cy="329184"/>
+          </a:xfrm>
+          <a:prstGeom prst="ellipse">
+            <a:avLst/>
+          </a:prstGeom>
+          <a:solidFill>
+            <a:srgbClr val="15304A"/>
+          </a:solidFill>
+          <a:ln/>
+        </p:spPr>
+        <p:txBody>
+          <a:bodyPr/>
+          <a:lstStyle/>
+          <a:p>
+            <a:endParaRPr lang="ja-JP" altLang="en-US"/>
+          </a:p>
+        </p:txBody>
+      </p:sp>
+      <p:pic>
+        <p:nvPicPr>
+          <p:cNvPr id="38" name="Image 9" descr="/tmp/esp32p4_guide/icons/link_02C39A.png"/>
+          <p:cNvPicPr>
+            <a:picLocks noChangeAspect="1"/>
+          </p:cNvPicPr>
+          <p:nvPr/>
+        </p:nvPicPr>
+        <p:blipFill>
+          <a:blip r:embed="rId9"/>
+          <a:stretch>
+            <a:fillRect/>
+          </a:stretch>
+        </p:blipFill>
+        <p:spPr>
+          <a:xfrm>
             <a:off x="622706" y="5020970"/>
             <a:ext cx="181051" cy="181051"/>
           </a:xfrm>
@@ -4702,7 +4854,7 @@
           <a:bodyPr wrap="square" lIns="0" tIns="0" rIns="0" bIns="0" rtlCol="0" anchor="ctr"/>
           <a:lstStyle/>
           <a:p>
-            <a:pPr indent="0" marL="0">
+            <a:pPr marL="0" indent="0">
               <a:buNone/>
             </a:pPr>
             <a:r>
@@ -4746,6 +4898,13 @@
             <a:prstDash val="solid"/>
           </a:ln>
         </p:spPr>
+        <p:txBody>
+          <a:bodyPr/>
+          <a:lstStyle/>
+          <a:p>
+            <a:endParaRPr lang="ja-JP" altLang="en-US"/>
+          </a:p>
+        </p:txBody>
       </p:sp>
       <p:sp>
         <p:nvSpPr>
@@ -4768,7 +4927,7 @@
           <a:bodyPr wrap="square" lIns="0" tIns="0" rIns="0" bIns="0" rtlCol="0" anchor="ctr"/>
           <a:lstStyle/>
           <a:p>
-            <a:pPr indent="0" marL="0">
+            <a:pPr marL="0" indent="0">
               <a:buNone/>
             </a:pPr>
             <a:r>
@@ -4802,6 +4961,7 @@
         <a:solidFill>
           <a:srgbClr val="FFFFFF"/>
         </a:solidFill>
+        <a:effectLst/>
       </p:bgPr>
     </p:bg>
     <p:spTree>
@@ -4839,7 +4999,7 @@
           <a:bodyPr wrap="square" lIns="0" tIns="0" rIns="0" bIns="0" rtlCol="0" anchor="ctr"/>
           <a:lstStyle/>
           <a:p>
-            <a:pPr indent="0" marL="0">
+            <a:pPr marL="0" indent="0">
               <a:buNone/>
             </a:pPr>
             <a:r>
@@ -4878,7 +5038,7 @@
           <a:bodyPr wrap="square" lIns="0" tIns="0" rIns="0" bIns="0" rtlCol="0" anchor="ctr"/>
           <a:lstStyle/>
           <a:p>
-            <a:pPr indent="0" marL="0">
+            <a:pPr marL="0" indent="0">
               <a:buNone/>
             </a:pPr>
             <a:r>
@@ -4922,6 +5082,13 @@
             <a:prstDash val="solid"/>
           </a:ln>
         </p:spPr>
+        <p:txBody>
+          <a:bodyPr/>
+          <a:lstStyle/>
+          <a:p>
+            <a:endParaRPr lang="ja-JP" altLang="en-US"/>
+          </a:p>
+        </p:txBody>
       </p:sp>
       <p:sp>
         <p:nvSpPr>
@@ -4942,17 +5109,24 @@
           </a:solidFill>
           <a:ln/>
         </p:spPr>
+        <p:txBody>
+          <a:bodyPr/>
+          <a:lstStyle/>
+          <a:p>
+            <a:endParaRPr lang="ja-JP" altLang="en-US"/>
+          </a:p>
+        </p:txBody>
       </p:sp>
       <p:pic>
         <p:nvPicPr>
-          <p:cNvPr id="6" name="Image 0" descr="/tmp/esp32p4_guide/icons/monitor_0A5FB4.png">    </p:cNvPr>
+          <p:cNvPr id="6" name="Image 0" descr="/tmp/esp32p4_guide/icons/monitor_0A5FB4.png"/>
           <p:cNvPicPr>
             <a:picLocks noChangeAspect="1"/>
           </p:cNvPicPr>
           <p:nvPr/>
         </p:nvPicPr>
         <p:blipFill>
-          <a:blip r:embed="rId1"/>
+          <a:blip r:embed="rId3"/>
           <a:stretch>
             <a:fillRect/>
           </a:stretch>
@@ -4988,7 +5162,7 @@
           <a:bodyPr wrap="square" lIns="0" tIns="0" rIns="0" bIns="0" rtlCol="0" anchor="ctr"/>
           <a:lstStyle/>
           <a:p>
-            <a:pPr algn="ctr" indent="0" marL="0">
+            <a:pPr marL="0" indent="0" algn="ctr">
               <a:buNone/>
             </a:pPr>
             <a:r>
@@ -5027,6 +5201,13 @@
           </a:solidFill>
           <a:ln/>
         </p:spPr>
+        <p:txBody>
+          <a:bodyPr/>
+          <a:lstStyle/>
+          <a:p>
+            <a:endParaRPr lang="ja-JP" altLang="en-US"/>
+          </a:p>
+        </p:txBody>
       </p:sp>
       <p:sp>
         <p:nvSpPr>
@@ -5049,7 +5230,7 @@
           <a:bodyPr wrap="square" lIns="0" tIns="0" rIns="0" bIns="0" rtlCol="0" anchor="ctr"/>
           <a:lstStyle/>
           <a:p>
-            <a:pPr algn="ctr" indent="0" marL="0">
+            <a:pPr marL="0" indent="0" algn="ctr">
               <a:buNone/>
             </a:pPr>
             <a:r>
@@ -5187,6 +5368,13 @@
             <a:prstDash val="solid"/>
           </a:ln>
         </p:spPr>
+        <p:txBody>
+          <a:bodyPr/>
+          <a:lstStyle/>
+          <a:p>
+            <a:endParaRPr lang="ja-JP" altLang="en-US"/>
+          </a:p>
+        </p:txBody>
       </p:sp>
       <p:sp>
         <p:nvSpPr>
@@ -5207,17 +5395,24 @@
           </a:solidFill>
           <a:ln/>
         </p:spPr>
+        <p:txBody>
+          <a:bodyPr/>
+          <a:lstStyle/>
+          <a:p>
+            <a:endParaRPr lang="ja-JP" altLang="en-US"/>
+          </a:p>
+        </p:txBody>
       </p:sp>
       <p:pic>
         <p:nvPicPr>
-          <p:cNvPr id="13" name="Image 1" descr="/tmp/esp32p4_guide/icons/bug_0A5FB4.png">    </p:cNvPr>
+          <p:cNvPr id="13" name="Image 1" descr="/tmp/esp32p4_guide/icons/bug_0A5FB4.png"/>
           <p:cNvPicPr>
             <a:picLocks noChangeAspect="1"/>
           </p:cNvPicPr>
           <p:nvPr/>
         </p:nvPicPr>
         <p:blipFill>
-          <a:blip r:embed="rId2"/>
+          <a:blip r:embed="rId4"/>
           <a:stretch>
             <a:fillRect/>
           </a:stretch>
@@ -5253,7 +5448,7 @@
           <a:bodyPr wrap="square" lIns="0" tIns="0" rIns="0" bIns="0" rtlCol="0" anchor="ctr"/>
           <a:lstStyle/>
           <a:p>
-            <a:pPr algn="ctr" indent="0" marL="0">
+            <a:pPr marL="0" indent="0" algn="ctr">
               <a:buNone/>
             </a:pPr>
             <a:r>
@@ -5292,6 +5487,13 @@
           </a:solidFill>
           <a:ln/>
         </p:spPr>
+        <p:txBody>
+          <a:bodyPr/>
+          <a:lstStyle/>
+          <a:p>
+            <a:endParaRPr lang="ja-JP" altLang="en-US"/>
+          </a:p>
+        </p:txBody>
       </p:sp>
       <p:sp>
         <p:nvSpPr>
@@ -5314,7 +5516,7 @@
           <a:bodyPr wrap="square" lIns="0" tIns="0" rIns="0" bIns="0" rtlCol="0" anchor="ctr"/>
           <a:lstStyle/>
           <a:p>
-            <a:pPr algn="ctr" indent="0" marL="0">
+            <a:pPr marL="0" indent="0" algn="ctr">
               <a:buNone/>
             </a:pPr>
             <a:r>
@@ -5452,13 +5654,20 @@
             <a:prstDash val="solid"/>
           </a:ln>
           <a:effectLst>
-            <a:outerShdw sx="100000" sy="100000" kx="0" ky="0" algn="bl" rotWithShape="0" blurRad="127000" dist="38100" dir="5400000">
+            <a:outerShdw blurRad="127000" dist="38100" dir="5400000" algn="bl" rotWithShape="0">
               <a:srgbClr val="1C7293">
                 <a:alpha val="18000"/>
               </a:srgbClr>
             </a:outerShdw>
           </a:effectLst>
         </p:spPr>
+        <p:txBody>
+          <a:bodyPr/>
+          <a:lstStyle/>
+          <a:p>
+            <a:endParaRPr lang="ja-JP" altLang="en-US"/>
+          </a:p>
+        </p:txBody>
       </p:sp>
       <p:sp>
         <p:nvSpPr>
@@ -5479,17 +5688,24 @@
           </a:solidFill>
           <a:ln/>
         </p:spPr>
+        <p:txBody>
+          <a:bodyPr/>
+          <a:lstStyle/>
+          <a:p>
+            <a:endParaRPr lang="ja-JP" altLang="en-US"/>
+          </a:p>
+        </p:txBody>
       </p:sp>
       <p:pic>
         <p:nvPicPr>
-          <p:cNvPr id="20" name="Image 2" descr="/tmp/esp32p4_guide/icons/check_FFFFFF.png">    </p:cNvPr>
+          <p:cNvPr id="20" name="Image 2" descr="/tmp/esp32p4_guide/icons/check_FFFFFF.png"/>
           <p:cNvPicPr>
             <a:picLocks noChangeAspect="1"/>
           </p:cNvPicPr>
           <p:nvPr/>
         </p:nvPicPr>
         <p:blipFill>
-          <a:blip r:embed="rId3"/>
+          <a:blip r:embed="rId5"/>
           <a:stretch>
             <a:fillRect/>
           </a:stretch>
@@ -5525,7 +5741,7 @@
           <a:bodyPr wrap="square" lIns="0" tIns="0" rIns="0" bIns="0" rtlCol="0" anchor="ctr"/>
           <a:lstStyle/>
           <a:p>
-            <a:pPr algn="ctr" indent="0" marL="0">
+            <a:pPr marL="0" indent="0" algn="ctr">
               <a:buNone/>
             </a:pPr>
             <a:r>
@@ -5564,6 +5780,13 @@
           </a:solidFill>
           <a:ln/>
         </p:spPr>
+        <p:txBody>
+          <a:bodyPr/>
+          <a:lstStyle/>
+          <a:p>
+            <a:endParaRPr lang="ja-JP" altLang="en-US"/>
+          </a:p>
+        </p:txBody>
       </p:sp>
       <p:sp>
         <p:nvSpPr>
@@ -5586,7 +5809,7 @@
           <a:bodyPr wrap="square" lIns="0" tIns="0" rIns="0" bIns="0" rtlCol="0" anchor="ctr"/>
           <a:lstStyle/>
           <a:p>
-            <a:pPr algn="ctr" indent="0" marL="0">
+            <a:pPr marL="0" indent="0" algn="ctr">
               <a:buNone/>
             </a:pPr>
             <a:r>
@@ -5719,7 +5942,7 @@
           <a:bodyPr wrap="square" rtlCol="0" anchor="ctr"/>
           <a:lstStyle/>
           <a:p>
-            <a:pPr algn="l" indent="0" marL="0">
+            <a:pPr marL="0" indent="0" algn="l">
               <a:buNone/>
             </a:pPr>
             <a:r>
@@ -5758,7 +5981,7 @@
           <a:bodyPr wrap="square" rtlCol="0" anchor="ctr"/>
           <a:lstStyle/>
           <a:p>
-            <a:pPr algn="r" indent="0" marL="0">
+            <a:pPr marL="0" indent="0" algn="r">
               <a:buNone/>
             </a:pPr>
             <a:r>
@@ -5792,6 +6015,7 @@
         <a:solidFill>
           <a:srgbClr val="FFFFFF"/>
         </a:solidFill>
+        <a:effectLst/>
       </p:bgPr>
     </p:bg>
     <p:spTree>
@@ -5829,7 +6053,7 @@
           <a:bodyPr wrap="square" lIns="0" tIns="0" rIns="0" bIns="0" rtlCol="0" anchor="ctr"/>
           <a:lstStyle/>
           <a:p>
-            <a:pPr indent="0" marL="0">
+            <a:pPr marL="0" indent="0">
               <a:buNone/>
             </a:pPr>
             <a:r>
@@ -5868,7 +6092,7 @@
           <a:bodyPr wrap="square" lIns="0" tIns="0" rIns="0" bIns="0" rtlCol="0" anchor="ctr"/>
           <a:lstStyle/>
           <a:p>
-            <a:pPr indent="0" marL="0">
+            <a:pPr marL="0" indent="0">
               <a:buNone/>
             </a:pPr>
             <a:r>
@@ -5912,6 +6136,13 @@
             <a:prstDash val="solid"/>
           </a:ln>
         </p:spPr>
+        <p:txBody>
+          <a:bodyPr/>
+          <a:lstStyle/>
+          <a:p>
+            <a:endParaRPr lang="ja-JP" altLang="en-US"/>
+          </a:p>
+        </p:txBody>
       </p:sp>
       <p:sp>
         <p:nvSpPr>
@@ -5932,6 +6163,13 @@
           </a:solidFill>
           <a:ln/>
         </p:spPr>
+        <p:txBody>
+          <a:bodyPr/>
+          <a:lstStyle/>
+          <a:p>
+            <a:endParaRPr lang="ja-JP" altLang="en-US"/>
+          </a:p>
+        </p:txBody>
       </p:sp>
       <p:sp>
         <p:nvSpPr>
@@ -5954,7 +6192,7 @@
           <a:bodyPr wrap="square" lIns="0" tIns="0" rIns="0" bIns="0" rtlCol="0" anchor="ctr"/>
           <a:lstStyle/>
           <a:p>
-            <a:pPr algn="ctr" indent="0" marL="0">
+            <a:pPr marL="0" indent="0" algn="ctr">
               <a:buNone/>
             </a:pPr>
             <a:r>
@@ -5991,17 +6229,24 @@
           </a:solidFill>
           <a:ln/>
         </p:spPr>
+        <p:txBody>
+          <a:bodyPr/>
+          <a:lstStyle/>
+          <a:p>
+            <a:endParaRPr lang="ja-JP" altLang="en-US"/>
+          </a:p>
+        </p:txBody>
       </p:sp>
       <p:pic>
         <p:nvPicPr>
-          <p:cNvPr id="8" name="Image 0" descr="/tmp/esp32p4_guide/icons/clipboard_0A5FB4.png">    </p:cNvPr>
+          <p:cNvPr id="8" name="Image 0" descr="/tmp/esp32p4_guide/icons/clipboard_0A5FB4.png"/>
           <p:cNvPicPr>
             <a:picLocks noChangeAspect="1"/>
           </p:cNvPicPr>
           <p:nvPr/>
         </p:nvPicPr>
         <p:blipFill>
-          <a:blip r:embed="rId1"/>
+          <a:blip r:embed="rId3"/>
           <a:stretch>
             <a:fillRect/>
           </a:stretch>
@@ -6037,7 +6282,7 @@
           <a:bodyPr wrap="square" lIns="0" tIns="0" rIns="0" bIns="0" rtlCol="0" anchor="t"/>
           <a:lstStyle/>
           <a:p>
-            <a:pPr indent="0" marL="0">
+            <a:pPr marL="0" indent="0">
               <a:lnSpc>
                 <a:spcPct val="105000"/>
               </a:lnSpc>
@@ -6079,7 +6324,7 @@
           <a:bodyPr wrap="square" lIns="0" tIns="0" rIns="0" bIns="0" rtlCol="0" anchor="t"/>
           <a:lstStyle/>
           <a:p>
-            <a:pPr indent="0" marL="0">
+            <a:pPr marL="0" indent="0">
               <a:lnSpc>
                 <a:spcPct val="115000"/>
               </a:lnSpc>
@@ -6121,6 +6366,13 @@
           </a:solidFill>
           <a:ln/>
         </p:spPr>
+        <p:txBody>
+          <a:bodyPr/>
+          <a:lstStyle/>
+          <a:p>
+            <a:endParaRPr lang="ja-JP" altLang="en-US"/>
+          </a:p>
+        </p:txBody>
       </p:sp>
       <p:sp>
         <p:nvSpPr>
@@ -6143,7 +6395,7 @@
           <a:bodyPr wrap="square" lIns="0" tIns="0" rIns="0" bIns="0" rtlCol="0" anchor="ctr"/>
           <a:lstStyle/>
           <a:p>
-            <a:pPr algn="ctr" indent="0" marL="0">
+            <a:pPr marL="0" indent="0" algn="ctr">
               <a:buNone/>
             </a:pPr>
             <a:r>
@@ -6187,6 +6439,13 @@
             <a:prstDash val="solid"/>
           </a:ln>
         </p:spPr>
+        <p:txBody>
+          <a:bodyPr/>
+          <a:lstStyle/>
+          <a:p>
+            <a:endParaRPr lang="ja-JP" altLang="en-US"/>
+          </a:p>
+        </p:txBody>
       </p:sp>
       <p:sp>
         <p:nvSpPr>
@@ -6207,6 +6466,13 @@
           </a:solidFill>
           <a:ln/>
         </p:spPr>
+        <p:txBody>
+          <a:bodyPr/>
+          <a:lstStyle/>
+          <a:p>
+            <a:endParaRPr lang="ja-JP" altLang="en-US"/>
+          </a:p>
+        </p:txBody>
       </p:sp>
       <p:sp>
         <p:nvSpPr>
@@ -6229,7 +6495,7 @@
           <a:bodyPr wrap="square" lIns="0" tIns="0" rIns="0" bIns="0" rtlCol="0" anchor="ctr"/>
           <a:lstStyle/>
           <a:p>
-            <a:pPr algn="ctr" indent="0" marL="0">
+            <a:pPr marL="0" indent="0" algn="ctr">
               <a:buNone/>
             </a:pPr>
             <a:r>
@@ -6266,17 +6532,24 @@
           </a:solidFill>
           <a:ln/>
         </p:spPr>
+        <p:txBody>
+          <a:bodyPr/>
+          <a:lstStyle/>
+          <a:p>
+            <a:endParaRPr lang="ja-JP" altLang="en-US"/>
+          </a:p>
+        </p:txBody>
       </p:sp>
       <p:pic>
         <p:nvPicPr>
-          <p:cNvPr id="17" name="Image 1" descr="/tmp/esp32p4_guide/icons/vscode_0A5FB4.png">    </p:cNvPr>
+          <p:cNvPr id="17" name="Image 1" descr="/tmp/esp32p4_guide/icons/vscode_0A5FB4.png"/>
           <p:cNvPicPr>
             <a:picLocks noChangeAspect="1"/>
           </p:cNvPicPr>
           <p:nvPr/>
         </p:nvPicPr>
         <p:blipFill>
-          <a:blip r:embed="rId2"/>
+          <a:blip r:embed="rId4"/>
           <a:stretch>
             <a:fillRect/>
           </a:stretch>
@@ -6312,7 +6585,7 @@
           <a:bodyPr wrap="square" lIns="0" tIns="0" rIns="0" bIns="0" rtlCol="0" anchor="t"/>
           <a:lstStyle/>
           <a:p>
-            <a:pPr indent="0" marL="0">
+            <a:pPr marL="0" indent="0">
               <a:lnSpc>
                 <a:spcPct val="105000"/>
               </a:lnSpc>
@@ -6354,7 +6627,7 @@
           <a:bodyPr wrap="square" lIns="0" tIns="0" rIns="0" bIns="0" rtlCol="0" anchor="t"/>
           <a:lstStyle/>
           <a:p>
-            <a:pPr indent="0" marL="0">
+            <a:pPr marL="0" indent="0">
               <a:lnSpc>
                 <a:spcPct val="115000"/>
               </a:lnSpc>
@@ -6396,6 +6669,13 @@
           </a:solidFill>
           <a:ln/>
         </p:spPr>
+        <p:txBody>
+          <a:bodyPr/>
+          <a:lstStyle/>
+          <a:p>
+            <a:endParaRPr lang="ja-JP" altLang="en-US"/>
+          </a:p>
+        </p:txBody>
       </p:sp>
       <p:sp>
         <p:nvSpPr>
@@ -6418,7 +6698,7 @@
           <a:bodyPr wrap="square" lIns="0" tIns="0" rIns="0" bIns="0" rtlCol="0" anchor="ctr"/>
           <a:lstStyle/>
           <a:p>
-            <a:pPr algn="ctr" indent="0" marL="0">
+            <a:pPr marL="0" indent="0" algn="ctr">
               <a:buNone/>
             </a:pPr>
             <a:r>
@@ -6462,6 +6742,13 @@
             <a:prstDash val="solid"/>
           </a:ln>
         </p:spPr>
+        <p:txBody>
+          <a:bodyPr/>
+          <a:lstStyle/>
+          <a:p>
+            <a:endParaRPr lang="ja-JP" altLang="en-US"/>
+          </a:p>
+        </p:txBody>
       </p:sp>
       <p:sp>
         <p:nvSpPr>
@@ -6482,6 +6769,13 @@
           </a:solidFill>
           <a:ln/>
         </p:spPr>
+        <p:txBody>
+          <a:bodyPr/>
+          <a:lstStyle/>
+          <a:p>
+            <a:endParaRPr lang="ja-JP" altLang="en-US"/>
+          </a:p>
+        </p:txBody>
       </p:sp>
       <p:sp>
         <p:nvSpPr>
@@ -6504,7 +6798,7 @@
           <a:bodyPr wrap="square" lIns="0" tIns="0" rIns="0" bIns="0" rtlCol="0" anchor="ctr"/>
           <a:lstStyle/>
           <a:p>
-            <a:pPr algn="ctr" indent="0" marL="0">
+            <a:pPr marL="0" indent="0" algn="ctr">
               <a:buNone/>
             </a:pPr>
             <a:r>
@@ -6541,17 +6835,24 @@
           </a:solidFill>
           <a:ln/>
         </p:spPr>
+        <p:txBody>
+          <a:bodyPr/>
+          <a:lstStyle/>
+          <a:p>
+            <a:endParaRPr lang="ja-JP" altLang="en-US"/>
+          </a:p>
+        </p:txBody>
       </p:sp>
       <p:pic>
         <p:nvPicPr>
-          <p:cNvPr id="26" name="Image 2" descr="/tmp/esp32p4_guide/icons/usb_0A5FB4.png">    </p:cNvPr>
+          <p:cNvPr id="26" name="Image 2" descr="/tmp/esp32p4_guide/icons/usb_0A5FB4.png"/>
           <p:cNvPicPr>
             <a:picLocks noChangeAspect="1"/>
           </p:cNvPicPr>
           <p:nvPr/>
         </p:nvPicPr>
         <p:blipFill>
-          <a:blip r:embed="rId3"/>
+          <a:blip r:embed="rId5"/>
           <a:stretch>
             <a:fillRect/>
           </a:stretch>
@@ -6587,7 +6888,7 @@
           <a:bodyPr wrap="square" lIns="0" tIns="0" rIns="0" bIns="0" rtlCol="0" anchor="t"/>
           <a:lstStyle/>
           <a:p>
-            <a:pPr indent="0" marL="0">
+            <a:pPr marL="0" indent="0">
               <a:lnSpc>
                 <a:spcPct val="105000"/>
               </a:lnSpc>
@@ -6629,7 +6930,7 @@
           <a:bodyPr wrap="square" lIns="0" tIns="0" rIns="0" bIns="0" rtlCol="0" anchor="t"/>
           <a:lstStyle/>
           <a:p>
-            <a:pPr indent="0" marL="0">
+            <a:pPr marL="0" indent="0">
               <a:lnSpc>
                 <a:spcPct val="115000"/>
               </a:lnSpc>
@@ -6671,6 +6972,13 @@
           </a:solidFill>
           <a:ln/>
         </p:spPr>
+        <p:txBody>
+          <a:bodyPr/>
+          <a:lstStyle/>
+          <a:p>
+            <a:endParaRPr lang="ja-JP" altLang="en-US"/>
+          </a:p>
+        </p:txBody>
       </p:sp>
       <p:sp>
         <p:nvSpPr>
@@ -6693,7 +7001,7 @@
           <a:bodyPr wrap="square" lIns="0" tIns="0" rIns="0" bIns="0" rtlCol="0" anchor="ctr"/>
           <a:lstStyle/>
           <a:p>
-            <a:pPr algn="ctr" indent="0" marL="0">
+            <a:pPr marL="0" indent="0" algn="ctr">
               <a:buNone/>
             </a:pPr>
             <a:r>
@@ -6737,6 +7045,13 @@
             <a:prstDash val="solid"/>
           </a:ln>
         </p:spPr>
+        <p:txBody>
+          <a:bodyPr/>
+          <a:lstStyle/>
+          <a:p>
+            <a:endParaRPr lang="ja-JP" altLang="en-US"/>
+          </a:p>
+        </p:txBody>
       </p:sp>
       <p:sp>
         <p:nvSpPr>
@@ -6757,6 +7072,13 @@
           </a:solidFill>
           <a:ln/>
         </p:spPr>
+        <p:txBody>
+          <a:bodyPr/>
+          <a:lstStyle/>
+          <a:p>
+            <a:endParaRPr lang="ja-JP" altLang="en-US"/>
+          </a:p>
+        </p:txBody>
       </p:sp>
       <p:sp>
         <p:nvSpPr>
@@ -6779,7 +7101,7 @@
           <a:bodyPr wrap="square" lIns="0" tIns="0" rIns="0" bIns="0" rtlCol="0" anchor="ctr"/>
           <a:lstStyle/>
           <a:p>
-            <a:pPr algn="ctr" indent="0" marL="0">
+            <a:pPr marL="0" indent="0" algn="ctr">
               <a:buNone/>
             </a:pPr>
             <a:r>
@@ -6816,17 +7138,24 @@
           </a:solidFill>
           <a:ln/>
         </p:spPr>
+        <p:txBody>
+          <a:bodyPr/>
+          <a:lstStyle/>
+          <a:p>
+            <a:endParaRPr lang="ja-JP" altLang="en-US"/>
+          </a:p>
+        </p:txBody>
       </p:sp>
       <p:pic>
         <p:nvPicPr>
-          <p:cNvPr id="35" name="Image 3" descr="/tmp/esp32p4_guide/icons/puzzle_0A5FB4.png">    </p:cNvPr>
+          <p:cNvPr id="35" name="Image 3" descr="/tmp/esp32p4_guide/icons/puzzle_0A5FB4.png"/>
           <p:cNvPicPr>
             <a:picLocks noChangeAspect="1"/>
           </p:cNvPicPr>
           <p:nvPr/>
         </p:nvPicPr>
         <p:blipFill>
-          <a:blip r:embed="rId4"/>
+          <a:blip r:embed="rId6"/>
           <a:stretch>
             <a:fillRect/>
           </a:stretch>
@@ -6862,7 +7191,7 @@
           <a:bodyPr wrap="square" lIns="0" tIns="0" rIns="0" bIns="0" rtlCol="0" anchor="t"/>
           <a:lstStyle/>
           <a:p>
-            <a:pPr indent="0" marL="0">
+            <a:pPr marL="0" indent="0">
               <a:lnSpc>
                 <a:spcPct val="105000"/>
               </a:lnSpc>
@@ -6904,7 +7233,7 @@
           <a:bodyPr wrap="square" lIns="0" tIns="0" rIns="0" bIns="0" rtlCol="0" anchor="t"/>
           <a:lstStyle/>
           <a:p>
-            <a:pPr indent="0" marL="0">
+            <a:pPr marL="0" indent="0">
               <a:lnSpc>
                 <a:spcPct val="115000"/>
               </a:lnSpc>
@@ -6946,6 +7275,13 @@
           </a:solidFill>
           <a:ln/>
         </p:spPr>
+        <p:txBody>
+          <a:bodyPr/>
+          <a:lstStyle/>
+          <a:p>
+            <a:endParaRPr lang="ja-JP" altLang="en-US"/>
+          </a:p>
+        </p:txBody>
       </p:sp>
       <p:sp>
         <p:nvSpPr>
@@ -6968,7 +7304,7 @@
           <a:bodyPr wrap="square" lIns="0" tIns="0" rIns="0" bIns="0" rtlCol="0" anchor="ctr"/>
           <a:lstStyle/>
           <a:p>
-            <a:pPr algn="ctr" indent="0" marL="0">
+            <a:pPr marL="0" indent="0" algn="ctr">
               <a:buNone/>
             </a:pPr>
             <a:r>
@@ -7012,6 +7348,13 @@
             <a:prstDash val="solid"/>
           </a:ln>
         </p:spPr>
+        <p:txBody>
+          <a:bodyPr/>
+          <a:lstStyle/>
+          <a:p>
+            <a:endParaRPr lang="ja-JP" altLang="en-US"/>
+          </a:p>
+        </p:txBody>
       </p:sp>
       <p:sp>
         <p:nvSpPr>
@@ -7032,6 +7375,13 @@
           </a:solidFill>
           <a:ln/>
         </p:spPr>
+        <p:txBody>
+          <a:bodyPr/>
+          <a:lstStyle/>
+          <a:p>
+            <a:endParaRPr lang="ja-JP" altLang="en-US"/>
+          </a:p>
+        </p:txBody>
       </p:sp>
       <p:sp>
         <p:nvSpPr>
@@ -7054,7 +7404,7 @@
           <a:bodyPr wrap="square" lIns="0" tIns="0" rIns="0" bIns="0" rtlCol="0" anchor="ctr"/>
           <a:lstStyle/>
           <a:p>
-            <a:pPr algn="ctr" indent="0" marL="0">
+            <a:pPr marL="0" indent="0" algn="ctr">
               <a:buNone/>
             </a:pPr>
             <a:r>
@@ -7091,17 +7441,24 @@
           </a:solidFill>
           <a:ln/>
         </p:spPr>
+        <p:txBody>
+          <a:bodyPr/>
+          <a:lstStyle/>
+          <a:p>
+            <a:endParaRPr lang="ja-JP" altLang="en-US"/>
+          </a:p>
+        </p:txBody>
       </p:sp>
       <p:pic>
         <p:nvPicPr>
-          <p:cNvPr id="44" name="Image 4" descr="/tmp/esp32p4_guide/icons/cloud_0A5FB4.png">    </p:cNvPr>
+          <p:cNvPr id="44" name="Image 4" descr="/tmp/esp32p4_guide/icons/cloud_0A5FB4.png"/>
           <p:cNvPicPr>
             <a:picLocks noChangeAspect="1"/>
           </p:cNvPicPr>
           <p:nvPr/>
         </p:nvPicPr>
         <p:blipFill>
-          <a:blip r:embed="rId5"/>
+          <a:blip r:embed="rId7"/>
           <a:stretch>
             <a:fillRect/>
           </a:stretch>
@@ -7137,7 +7494,7 @@
           <a:bodyPr wrap="square" lIns="0" tIns="0" rIns="0" bIns="0" rtlCol="0" anchor="t"/>
           <a:lstStyle/>
           <a:p>
-            <a:pPr indent="0" marL="0">
+            <a:pPr marL="0" indent="0">
               <a:lnSpc>
                 <a:spcPct val="105000"/>
               </a:lnSpc>
@@ -7179,7 +7536,7 @@
           <a:bodyPr wrap="square" lIns="0" tIns="0" rIns="0" bIns="0" rtlCol="0" anchor="t"/>
           <a:lstStyle/>
           <a:p>
-            <a:pPr indent="0" marL="0">
+            <a:pPr marL="0" indent="0">
               <a:lnSpc>
                 <a:spcPct val="115000"/>
               </a:lnSpc>
@@ -7194,7 +7551,7 @@
                 <a:ea typeface="Calibri" pitchFamily="34" charset="-122"/>
                 <a:cs typeface="Calibri" pitchFamily="34" charset="-120"/>
               </a:rPr>
-              <a:t>Installation Managerで導入(v5.4.2)</a:t>
+              <a:t>Easy Installationで導入(最新安定版)</a:t>
             </a:r>
             <a:endParaRPr lang="en-US" sz="1050" dirty="0"/>
           </a:p>
@@ -7221,6 +7578,13 @@
           </a:solidFill>
           <a:ln/>
         </p:spPr>
+        <p:txBody>
+          <a:bodyPr/>
+          <a:lstStyle/>
+          <a:p>
+            <a:endParaRPr lang="ja-JP" altLang="en-US"/>
+          </a:p>
+        </p:txBody>
       </p:sp>
       <p:sp>
         <p:nvSpPr>
@@ -7243,7 +7607,7 @@
           <a:bodyPr wrap="square" lIns="0" tIns="0" rIns="0" bIns="0" rtlCol="0" anchor="ctr"/>
           <a:lstStyle/>
           <a:p>
-            <a:pPr algn="ctr" indent="0" marL="0">
+            <a:pPr marL="0" indent="0" algn="ctr">
               <a:buNone/>
             </a:pPr>
             <a:r>
@@ -7255,7 +7619,7 @@
                 <a:ea typeface="Calibri" pitchFamily="34" charset="-122"/>
                 <a:cs typeface="Calibri" pitchFamily="34" charset="-120"/>
               </a:rPr>
-              <a:t>目安 15〜40分</a:t>
+              <a:t>目安 10〜45分</a:t>
             </a:r>
             <a:endParaRPr lang="en-US" sz="880" dirty="0"/>
           </a:p>
@@ -7287,6 +7651,13 @@
             <a:prstDash val="solid"/>
           </a:ln>
         </p:spPr>
+        <p:txBody>
+          <a:bodyPr/>
+          <a:lstStyle/>
+          <a:p>
+            <a:endParaRPr lang="ja-JP" altLang="en-US"/>
+          </a:p>
+        </p:txBody>
       </p:sp>
       <p:sp>
         <p:nvSpPr>
@@ -7307,6 +7678,13 @@
           </a:solidFill>
           <a:ln/>
         </p:spPr>
+        <p:txBody>
+          <a:bodyPr/>
+          <a:lstStyle/>
+          <a:p>
+            <a:endParaRPr lang="ja-JP" altLang="en-US"/>
+          </a:p>
+        </p:txBody>
       </p:sp>
       <p:sp>
         <p:nvSpPr>
@@ -7329,7 +7707,7 @@
           <a:bodyPr wrap="square" lIns="0" tIns="0" rIns="0" bIns="0" rtlCol="0" anchor="ctr"/>
           <a:lstStyle/>
           <a:p>
-            <a:pPr algn="ctr" indent="0" marL="0">
+            <a:pPr marL="0" indent="0" algn="ctr">
               <a:buNone/>
             </a:pPr>
             <a:r>
@@ -7366,17 +7744,24 @@
           </a:solidFill>
           <a:ln/>
         </p:spPr>
+        <p:txBody>
+          <a:bodyPr/>
+          <a:lstStyle/>
+          <a:p>
+            <a:endParaRPr lang="ja-JP" altLang="en-US"/>
+          </a:p>
+        </p:txBody>
       </p:sp>
       <p:pic>
         <p:nvPicPr>
-          <p:cNvPr id="53" name="Image 5" descr="/tmp/esp32p4_guide/icons/bolt_0A5FB4.png">    </p:cNvPr>
+          <p:cNvPr id="53" name="Image 5" descr="/tmp/esp32p4_guide/icons/bolt_0A5FB4.png"/>
           <p:cNvPicPr>
             <a:picLocks noChangeAspect="1"/>
           </p:cNvPicPr>
           <p:nvPr/>
         </p:nvPicPr>
         <p:blipFill>
-          <a:blip r:embed="rId6"/>
+          <a:blip r:embed="rId8"/>
           <a:stretch>
             <a:fillRect/>
           </a:stretch>
@@ -7412,7 +7797,7 @@
           <a:bodyPr wrap="square" lIns="0" tIns="0" rIns="0" bIns="0" rtlCol="0" anchor="t"/>
           <a:lstStyle/>
           <a:p>
-            <a:pPr indent="0" marL="0">
+            <a:pPr marL="0" indent="0">
               <a:lnSpc>
                 <a:spcPct val="105000"/>
               </a:lnSpc>
@@ -7454,7 +7839,7 @@
           <a:bodyPr wrap="square" lIns="0" tIns="0" rIns="0" bIns="0" rtlCol="0" anchor="t"/>
           <a:lstStyle/>
           <a:p>
-            <a:pPr indent="0" marL="0">
+            <a:pPr marL="0" indent="0">
               <a:lnSpc>
                 <a:spcPct val="115000"/>
               </a:lnSpc>
@@ -7496,6 +7881,13 @@
           </a:solidFill>
           <a:ln/>
         </p:spPr>
+        <p:txBody>
+          <a:bodyPr/>
+          <a:lstStyle/>
+          <a:p>
+            <a:endParaRPr lang="ja-JP" altLang="en-US"/>
+          </a:p>
+        </p:txBody>
       </p:sp>
       <p:sp>
         <p:nvSpPr>
@@ -7518,7 +7910,7 @@
           <a:bodyPr wrap="square" lIns="0" tIns="0" rIns="0" bIns="0" rtlCol="0" anchor="ctr"/>
           <a:lstStyle/>
           <a:p>
-            <a:pPr algn="ctr" indent="0" marL="0">
+            <a:pPr marL="0" indent="0" algn="ctr">
               <a:buNone/>
             </a:pPr>
             <a:r>
@@ -7557,7 +7949,7 @@
           <a:bodyPr wrap="square" rtlCol="0" anchor="ctr"/>
           <a:lstStyle/>
           <a:p>
-            <a:pPr algn="l" indent="0" marL="0">
+            <a:pPr marL="0" indent="0" algn="l">
               <a:buNone/>
             </a:pPr>
             <a:r>
@@ -7596,7 +7988,7 @@
           <a:bodyPr wrap="square" rtlCol="0" anchor="ctr"/>
           <a:lstStyle/>
           <a:p>
-            <a:pPr algn="r" indent="0" marL="0">
+            <a:pPr marL="0" indent="0" algn="r">
               <a:buNone/>
             </a:pPr>
             <a:r>
@@ -7630,6 +8022,7 @@
         <a:solidFill>
           <a:srgbClr val="FFFFFF"/>
         </a:solidFill>
+        <a:effectLst/>
       </p:bgPr>
     </p:bg>
     <p:spTree>
@@ -7667,6 +8060,13 @@
           </a:solidFill>
           <a:ln/>
         </p:spPr>
+        <p:txBody>
+          <a:bodyPr/>
+          <a:lstStyle/>
+          <a:p>
+            <a:endParaRPr lang="ja-JP" altLang="en-US"/>
+          </a:p>
+        </p:txBody>
       </p:sp>
       <p:sp>
         <p:nvSpPr>
@@ -7689,7 +8089,7 @@
           <a:bodyPr wrap="square" lIns="0" tIns="0" rIns="0" bIns="0" rtlCol="0" anchor="ctr"/>
           <a:lstStyle/>
           <a:p>
-            <a:pPr algn="ctr" indent="0" marL="0">
+            <a:pPr marL="0" indent="0" algn="ctr">
               <a:buNone/>
             </a:pPr>
             <a:r>
@@ -7728,7 +8128,7 @@
           <a:bodyPr wrap="square" lIns="0" tIns="0" rIns="0" bIns="0" rtlCol="0" anchor="ctr"/>
           <a:lstStyle/>
           <a:p>
-            <a:pPr algn="l" indent="0" marL="0">
+            <a:pPr marL="0" indent="0" algn="l">
               <a:buNone/>
             </a:pPr>
             <a:r>
@@ -7767,11 +8167,11 @@
           <a:bodyPr wrap="square" lIns="0" tIns="0" rIns="0" bIns="0" rtlCol="0" anchor="ctr"/>
           <a:lstStyle/>
           <a:p>
-            <a:pPr algn="l" indent="0" marL="0">
-              <a:buNone/>
-            </a:pPr>
-            <a:r>
-              <a:rPr lang="en-US" sz="1100" b="1" spc="100" kern="0" dirty="0">
+            <a:pPr marL="0" indent="0" algn="l">
+              <a:buNone/>
+            </a:pPr>
+            <a:r>
+              <a:rPr lang="en-US" sz="1100" b="1" kern="0" spc="100" dirty="0">
                 <a:solidFill>
                   <a:srgbClr val="0A5FB4"/>
                 </a:solidFill>
@@ -7804,17 +8204,24 @@
           </a:solidFill>
           <a:ln/>
         </p:spPr>
+        <p:txBody>
+          <a:bodyPr/>
+          <a:lstStyle/>
+          <a:p>
+            <a:endParaRPr lang="ja-JP" altLang="en-US"/>
+          </a:p>
+        </p:txBody>
       </p:sp>
       <p:pic>
         <p:nvPicPr>
-          <p:cNvPr id="7" name="Image 0" descr="/tmp/esp32p4_guide/icons/clipboard_0A5FB4.png">    </p:cNvPr>
+          <p:cNvPr id="7" name="Image 0" descr="/tmp/esp32p4_guide/icons/clipboard_0A5FB4.png"/>
           <p:cNvPicPr>
             <a:picLocks noChangeAspect="1"/>
           </p:cNvPicPr>
           <p:nvPr/>
         </p:nvPicPr>
         <p:blipFill>
-          <a:blip r:embed="rId1"/>
+          <a:blip r:embed="rId3"/>
           <a:stretch>
             <a:fillRect/>
           </a:stretch>
@@ -7855,6 +8262,13 @@
             <a:prstDash val="solid"/>
           </a:ln>
         </p:spPr>
+        <p:txBody>
+          <a:bodyPr/>
+          <a:lstStyle/>
+          <a:p>
+            <a:endParaRPr lang="ja-JP" altLang="en-US"/>
+          </a:p>
+        </p:txBody>
       </p:sp>
       <p:sp>
         <p:nvSpPr>
@@ -7877,7 +8291,7 @@
           <a:bodyPr wrap="square" lIns="0" tIns="0" rIns="0" bIns="0" rtlCol="0" anchor="ctr"/>
           <a:lstStyle/>
           <a:p>
-            <a:pPr indent="0" marL="0">
+            <a:pPr marL="0" indent="0">
               <a:buNone/>
             </a:pPr>
             <a:r>
@@ -7921,6 +8335,13 @@
             <a:prstDash val="solid"/>
           </a:ln>
         </p:spPr>
+        <p:txBody>
+          <a:bodyPr/>
+          <a:lstStyle/>
+          <a:p>
+            <a:endParaRPr lang="ja-JP" altLang="en-US"/>
+          </a:p>
+        </p:txBody>
       </p:sp>
       <p:sp>
         <p:nvSpPr>
@@ -7943,7 +8364,7 @@
           <a:bodyPr wrap="square" lIns="0" tIns="0" rIns="0" bIns="0" rtlCol="0" anchor="t"/>
           <a:lstStyle/>
           <a:p>
-            <a:pPr indent="0" marL="0">
+            <a:pPr marL="0" indent="0">
               <a:lnSpc>
                 <a:spcPct val="120000"/>
               </a:lnSpc>
@@ -7990,6 +8411,13 @@
             <a:prstDash val="solid"/>
           </a:ln>
         </p:spPr>
+        <p:txBody>
+          <a:bodyPr/>
+          <a:lstStyle/>
+          <a:p>
+            <a:endParaRPr lang="ja-JP" altLang="en-US"/>
+          </a:p>
+        </p:txBody>
       </p:sp>
       <p:sp>
         <p:nvSpPr>
@@ -8012,7 +8440,7 @@
           <a:bodyPr wrap="square" lIns="0" tIns="0" rIns="0" bIns="0" rtlCol="0" anchor="t"/>
           <a:lstStyle/>
           <a:p>
-            <a:pPr indent="0" marL="0">
+            <a:pPr marL="0" indent="0">
               <a:lnSpc>
                 <a:spcPct val="120000"/>
               </a:lnSpc>
@@ -8059,6 +8487,13 @@
             <a:prstDash val="solid"/>
           </a:ln>
         </p:spPr>
+        <p:txBody>
+          <a:bodyPr/>
+          <a:lstStyle/>
+          <a:p>
+            <a:endParaRPr lang="ja-JP" altLang="en-US"/>
+          </a:p>
+        </p:txBody>
       </p:sp>
       <p:sp>
         <p:nvSpPr>
@@ -8081,7 +8516,7 @@
           <a:bodyPr wrap="square" lIns="0" tIns="0" rIns="0" bIns="0" rtlCol="0" anchor="t"/>
           <a:lstStyle/>
           <a:p>
-            <a:pPr indent="0" marL="0">
+            <a:pPr marL="0" indent="0">
               <a:lnSpc>
                 <a:spcPct val="120000"/>
               </a:lnSpc>
@@ -8128,6 +8563,13 @@
             <a:prstDash val="solid"/>
           </a:ln>
         </p:spPr>
+        <p:txBody>
+          <a:bodyPr/>
+          <a:lstStyle/>
+          <a:p>
+            <a:endParaRPr lang="ja-JP" altLang="en-US"/>
+          </a:p>
+        </p:txBody>
       </p:sp>
       <p:sp>
         <p:nvSpPr>
@@ -8150,7 +8592,7 @@
           <a:bodyPr wrap="square" lIns="0" tIns="0" rIns="0" bIns="0" rtlCol="0" anchor="ctr"/>
           <a:lstStyle/>
           <a:p>
-            <a:pPr indent="0" marL="0">
+            <a:pPr marL="0" indent="0">
               <a:buNone/>
             </a:pPr>
             <a:r>
@@ -8189,7 +8631,7 @@
           <a:bodyPr wrap="square" lIns="0" tIns="0" rIns="0" bIns="0" rtlCol="0" anchor="t"/>
           <a:lstStyle/>
           <a:p>
-            <a:pPr indent="0" marL="0">
+            <a:pPr marL="0" indent="0">
               <a:buNone/>
             </a:pPr>
             <a:r>
@@ -8228,7 +8670,7 @@
           <a:bodyPr wrap="square" lIns="0" tIns="0" rIns="0" bIns="0" rtlCol="0" anchor="t"/>
           <a:lstStyle/>
           <a:p>
-            <a:pPr indent="0" marL="0">
+            <a:pPr marL="0" indent="0">
               <a:lnSpc>
                 <a:spcPct val="115000"/>
               </a:lnSpc>
@@ -8271,6 +8713,13 @@
             <a:prstDash val="solid"/>
           </a:ln>
         </p:spPr>
+        <p:txBody>
+          <a:bodyPr/>
+          <a:lstStyle/>
+          <a:p>
+            <a:endParaRPr lang="ja-JP" altLang="en-US"/>
+          </a:p>
+        </p:txBody>
       </p:sp>
       <p:sp>
         <p:nvSpPr>
@@ -8293,7 +8742,7 @@
           <a:bodyPr wrap="square" lIns="0" tIns="0" rIns="0" bIns="0" rtlCol="0" anchor="t"/>
           <a:lstStyle/>
           <a:p>
-            <a:pPr indent="0" marL="0">
+            <a:pPr marL="0" indent="0">
               <a:buNone/>
             </a:pPr>
             <a:r>
@@ -8332,7 +8781,7 @@
           <a:bodyPr wrap="square" lIns="0" tIns="0" rIns="0" bIns="0" rtlCol="0" anchor="t"/>
           <a:lstStyle/>
           <a:p>
-            <a:pPr indent="0" marL="0">
+            <a:pPr marL="0" indent="0">
               <a:lnSpc>
                 <a:spcPct val="115000"/>
               </a:lnSpc>
@@ -8375,6 +8824,13 @@
             <a:prstDash val="solid"/>
           </a:ln>
         </p:spPr>
+        <p:txBody>
+          <a:bodyPr/>
+          <a:lstStyle/>
+          <a:p>
+            <a:endParaRPr lang="ja-JP" altLang="en-US"/>
+          </a:p>
+        </p:txBody>
       </p:sp>
       <p:sp>
         <p:nvSpPr>
@@ -8397,7 +8853,7 @@
           <a:bodyPr wrap="square" lIns="0" tIns="0" rIns="0" bIns="0" rtlCol="0" anchor="t"/>
           <a:lstStyle/>
           <a:p>
-            <a:pPr indent="0" marL="0">
+            <a:pPr marL="0" indent="0">
               <a:buNone/>
             </a:pPr>
             <a:r>
@@ -8436,7 +8892,7 @@
           <a:bodyPr wrap="square" lIns="0" tIns="0" rIns="0" bIns="0" rtlCol="0" anchor="t"/>
           <a:lstStyle/>
           <a:p>
-            <a:pPr indent="0" marL="0">
+            <a:pPr marL="0" indent="0">
               <a:lnSpc>
                 <a:spcPct val="115000"/>
               </a:lnSpc>
@@ -8479,6 +8935,13 @@
             <a:prstDash val="solid"/>
           </a:ln>
         </p:spPr>
+        <p:txBody>
+          <a:bodyPr/>
+          <a:lstStyle/>
+          <a:p>
+            <a:endParaRPr lang="ja-JP" altLang="en-US"/>
+          </a:p>
+        </p:txBody>
       </p:sp>
       <p:sp>
         <p:nvSpPr>
@@ -8501,7 +8964,7 @@
           <a:bodyPr wrap="square" lIns="0" tIns="0" rIns="0" bIns="0" rtlCol="0" anchor="t"/>
           <a:lstStyle/>
           <a:p>
-            <a:pPr indent="0" marL="0">
+            <a:pPr marL="0" indent="0">
               <a:buNone/>
             </a:pPr>
             <a:r>
@@ -8540,7 +9003,7 @@
           <a:bodyPr wrap="square" lIns="0" tIns="0" rIns="0" bIns="0" rtlCol="0" anchor="t"/>
           <a:lstStyle/>
           <a:p>
-            <a:pPr indent="0" marL="0">
+            <a:pPr marL="0" indent="0">
               <a:lnSpc>
                 <a:spcPct val="115000"/>
               </a:lnSpc>
@@ -8583,6 +9046,13 @@
             <a:prstDash val="solid"/>
           </a:ln>
         </p:spPr>
+        <p:txBody>
+          <a:bodyPr/>
+          <a:lstStyle/>
+          <a:p>
+            <a:endParaRPr lang="ja-JP" altLang="en-US"/>
+          </a:p>
+        </p:txBody>
       </p:sp>
       <p:sp>
         <p:nvSpPr>
@@ -8610,17 +9080,24 @@
             <a:prstDash val="solid"/>
           </a:ln>
         </p:spPr>
+        <p:txBody>
+          <a:bodyPr/>
+          <a:lstStyle/>
+          <a:p>
+            <a:endParaRPr lang="ja-JP" altLang="en-US"/>
+          </a:p>
+        </p:txBody>
       </p:sp>
       <p:pic>
         <p:nvPicPr>
-          <p:cNvPr id="31" name="Image 1" descr="/tmp/esp32p4_guide/icons/warning_0D2036.png">    </p:cNvPr>
+          <p:cNvPr id="31" name="Image 1" descr="/tmp/esp32p4_guide/icons/warning_0D2036.png"/>
           <p:cNvPicPr>
             <a:picLocks noChangeAspect="1"/>
           </p:cNvPicPr>
           <p:nvPr/>
         </p:nvPicPr>
         <p:blipFill>
-          <a:blip r:embed="rId2"/>
+          <a:blip r:embed="rId4"/>
           <a:stretch>
             <a:fillRect/>
           </a:stretch>
@@ -8656,7 +9133,7 @@
           <a:bodyPr wrap="square" lIns="0" tIns="0" rIns="0" bIns="0" rtlCol="0" anchor="ctr"/>
           <a:lstStyle/>
           <a:p>
-            <a:pPr indent="0" marL="0">
+            <a:pPr marL="0" indent="0">
               <a:buNone/>
             </a:pPr>
             <a:r>
@@ -8695,7 +9172,7 @@
           <a:bodyPr wrap="square" lIns="0" tIns="0" rIns="0" bIns="0" rtlCol="0" anchor="t"/>
           <a:lstStyle/>
           <a:p>
-            <a:pPr indent="0" marL="0">
+            <a:pPr marL="0" indent="0">
               <a:lnSpc>
                 <a:spcPct val="115000"/>
               </a:lnSpc>
@@ -8737,7 +9214,7 @@
           <a:bodyPr wrap="square" rtlCol="0" anchor="ctr"/>
           <a:lstStyle/>
           <a:p>
-            <a:pPr algn="l" indent="0" marL="0">
+            <a:pPr marL="0" indent="0" algn="l">
               <a:buNone/>
             </a:pPr>
             <a:r>
@@ -8776,7 +9253,7 @@
           <a:bodyPr wrap="square" rtlCol="0" anchor="ctr"/>
           <a:lstStyle/>
           <a:p>
-            <a:pPr algn="r" indent="0" marL="0">
+            <a:pPr marL="0" indent="0" algn="r">
               <a:buNone/>
             </a:pPr>
             <a:r>
@@ -8810,6 +9287,7 @@
         <a:solidFill>
           <a:srgbClr val="FFFFFF"/>
         </a:solidFill>
+        <a:effectLst/>
       </p:bgPr>
     </p:bg>
     <p:spTree>
@@ -8847,6 +9325,13 @@
           </a:solidFill>
           <a:ln/>
         </p:spPr>
+        <p:txBody>
+          <a:bodyPr/>
+          <a:lstStyle/>
+          <a:p>
+            <a:endParaRPr lang="ja-JP" altLang="en-US"/>
+          </a:p>
+        </p:txBody>
       </p:sp>
       <p:sp>
         <p:nvSpPr>
@@ -8869,7 +9354,7 @@
           <a:bodyPr wrap="square" lIns="0" tIns="0" rIns="0" bIns="0" rtlCol="0" anchor="ctr"/>
           <a:lstStyle/>
           <a:p>
-            <a:pPr algn="ctr" indent="0" marL="0">
+            <a:pPr marL="0" indent="0" algn="ctr">
               <a:buNone/>
             </a:pPr>
             <a:r>
@@ -8908,7 +9393,7 @@
           <a:bodyPr wrap="square" lIns="0" tIns="0" rIns="0" bIns="0" rtlCol="0" anchor="ctr"/>
           <a:lstStyle/>
           <a:p>
-            <a:pPr algn="l" indent="0" marL="0">
+            <a:pPr marL="0" indent="0" algn="l">
               <a:buNone/>
             </a:pPr>
             <a:r>
@@ -8947,11 +9432,11 @@
           <a:bodyPr wrap="square" lIns="0" tIns="0" rIns="0" bIns="0" rtlCol="0" anchor="ctr"/>
           <a:lstStyle/>
           <a:p>
-            <a:pPr algn="l" indent="0" marL="0">
-              <a:buNone/>
-            </a:pPr>
-            <a:r>
-              <a:rPr lang="en-US" sz="1100" b="1" spc="100" kern="0" dirty="0">
+            <a:pPr marL="0" indent="0" algn="l">
+              <a:buNone/>
+            </a:pPr>
+            <a:r>
+              <a:rPr lang="en-US" sz="1100" b="1" kern="0" spc="100" dirty="0">
                 <a:solidFill>
                   <a:srgbClr val="0A5FB4"/>
                 </a:solidFill>
@@ -8984,17 +9469,24 @@
           </a:solidFill>
           <a:ln/>
         </p:spPr>
+        <p:txBody>
+          <a:bodyPr/>
+          <a:lstStyle/>
+          <a:p>
+            <a:endParaRPr lang="ja-JP" altLang="en-US"/>
+          </a:p>
+        </p:txBody>
       </p:sp>
       <p:pic>
         <p:nvPicPr>
-          <p:cNvPr id="7" name="Image 0" descr="/tmp/esp32p4_guide/icons/vscode_0A5FB4.png">    </p:cNvPr>
+          <p:cNvPr id="7" name="Image 0" descr="/tmp/esp32p4_guide/icons/vscode_0A5FB4.png"/>
           <p:cNvPicPr>
             <a:picLocks noChangeAspect="1"/>
           </p:cNvPicPr>
           <p:nvPr/>
         </p:nvPicPr>
         <p:blipFill>
-          <a:blip r:embed="rId1"/>
+          <a:blip r:embed="rId3"/>
           <a:stretch>
             <a:fillRect/>
           </a:stretch>
@@ -9028,6 +9520,13 @@
           </a:solidFill>
           <a:ln/>
         </p:spPr>
+        <p:txBody>
+          <a:bodyPr/>
+          <a:lstStyle/>
+          <a:p>
+            <a:endParaRPr lang="ja-JP" altLang="en-US"/>
+          </a:p>
+        </p:txBody>
       </p:sp>
       <p:sp>
         <p:nvSpPr>
@@ -9050,7 +9549,7 @@
           <a:bodyPr wrap="square" lIns="0" tIns="0" rIns="0" bIns="0" rtlCol="0" anchor="ctr"/>
           <a:lstStyle/>
           <a:p>
-            <a:pPr algn="ctr" indent="0" marL="0">
+            <a:pPr marL="0" indent="0" algn="ctr">
               <a:buNone/>
             </a:pPr>
             <a:r>
@@ -9089,7 +9588,7 @@
           <a:bodyPr wrap="square" lIns="0" tIns="0" rIns="0" bIns="0" rtlCol="0" anchor="t"/>
           <a:lstStyle/>
           <a:p>
-            <a:pPr indent="0" marL="0">
+            <a:pPr marL="0" indent="0">
               <a:lnSpc>
                 <a:spcPct val="118000"/>
               </a:lnSpc>
@@ -9129,6 +9628,13 @@
           </a:solidFill>
           <a:ln/>
         </p:spPr>
+        <p:txBody>
+          <a:bodyPr/>
+          <a:lstStyle/>
+          <a:p>
+            <a:endParaRPr lang="ja-JP" altLang="en-US"/>
+          </a:p>
+        </p:txBody>
       </p:sp>
       <p:sp>
         <p:nvSpPr>
@@ -9151,7 +9657,7 @@
           <a:bodyPr wrap="square" lIns="0" tIns="0" rIns="0" bIns="0" rtlCol="0" anchor="ctr"/>
           <a:lstStyle/>
           <a:p>
-            <a:pPr algn="ctr" indent="0" marL="0">
+            <a:pPr marL="0" indent="0" algn="ctr">
               <a:buNone/>
             </a:pPr>
             <a:r>
@@ -9190,7 +9696,7 @@
           <a:bodyPr wrap="square" lIns="0" tIns="0" rIns="0" bIns="0" rtlCol="0" anchor="t"/>
           <a:lstStyle/>
           <a:p>
-            <a:pPr indent="0" marL="0">
+            <a:pPr marL="0" indent="0">
               <a:lnSpc>
                 <a:spcPct val="118000"/>
               </a:lnSpc>
@@ -9230,6 +9736,13 @@
           </a:solidFill>
           <a:ln/>
         </p:spPr>
+        <p:txBody>
+          <a:bodyPr/>
+          <a:lstStyle/>
+          <a:p>
+            <a:endParaRPr lang="ja-JP" altLang="en-US"/>
+          </a:p>
+        </p:txBody>
       </p:sp>
       <p:sp>
         <p:nvSpPr>
@@ -9252,7 +9765,7 @@
           <a:bodyPr wrap="square" lIns="0" tIns="0" rIns="0" bIns="0" rtlCol="0" anchor="ctr"/>
           <a:lstStyle/>
           <a:p>
-            <a:pPr algn="ctr" indent="0" marL="0">
+            <a:pPr marL="0" indent="0" algn="ctr">
               <a:buNone/>
             </a:pPr>
             <a:r>
@@ -9291,7 +9804,7 @@
           <a:bodyPr wrap="square" lIns="0" tIns="0" rIns="0" bIns="0" rtlCol="0" anchor="t"/>
           <a:lstStyle/>
           <a:p>
-            <a:pPr indent="0" marL="0">
+            <a:pPr marL="0" indent="0">
               <a:lnSpc>
                 <a:spcPct val="118000"/>
               </a:lnSpc>
@@ -9333,6 +9846,13 @@
           </a:solidFill>
           <a:ln/>
         </p:spPr>
+        <p:txBody>
+          <a:bodyPr/>
+          <a:lstStyle/>
+          <a:p>
+            <a:endParaRPr lang="ja-JP" altLang="en-US"/>
+          </a:p>
+        </p:txBody>
       </p:sp>
       <p:sp>
         <p:nvSpPr>
@@ -9360,6 +9880,13 @@
             <a:prstDash val="solid"/>
           </a:ln>
         </p:spPr>
+        <p:txBody>
+          <a:bodyPr/>
+          <a:lstStyle/>
+          <a:p>
+            <a:endParaRPr lang="ja-JP" altLang="en-US"/>
+          </a:p>
+        </p:txBody>
       </p:sp>
       <p:sp>
         <p:nvSpPr>
@@ -9382,7 +9909,7 @@
           <a:bodyPr wrap="square" lIns="0" tIns="0" rIns="0" bIns="0" rtlCol="0" anchor="ctr"/>
           <a:lstStyle/>
           <a:p>
-            <a:pPr indent="0" marL="0">
+            <a:pPr marL="0" indent="0">
               <a:buNone/>
             </a:pPr>
             <a:r>
@@ -9421,6 +9948,13 @@
           </a:solidFill>
           <a:ln/>
         </p:spPr>
+        <p:txBody>
+          <a:bodyPr/>
+          <a:lstStyle/>
+          <a:p>
+            <a:endParaRPr lang="ja-JP" altLang="en-US"/>
+          </a:p>
+        </p:txBody>
       </p:sp>
       <p:sp>
         <p:nvSpPr>
@@ -9441,176 +9975,17 @@
           </a:solidFill>
           <a:ln/>
         </p:spPr>
+        <p:txBody>
+          <a:bodyPr/>
+          <a:lstStyle/>
+          <a:p>
+            <a:endParaRPr lang="ja-JP" altLang="en-US"/>
+          </a:p>
+        </p:txBody>
       </p:sp>
       <p:pic>
         <p:nvPicPr>
-          <p:cNvPr id="22" name="Image 1" descr="/tmp/esp32p4_guide/icons/vscode_FFFFFF.png">    </p:cNvPr>
-          <p:cNvPicPr>
-            <a:picLocks noChangeAspect="1"/>
-          </p:cNvPicPr>
-          <p:nvPr/>
-        </p:nvPicPr>
-        <p:blipFill>
-          <a:blip r:embed="rId2"/>
-          <a:stretch>
-            <a:fillRect/>
-          </a:stretch>
-        </p:blipFill>
-        <p:spPr>
-          <a:xfrm>
-            <a:off x="8783726" y="3032150"/>
-            <a:ext cx="373075" cy="373075"/>
-          </a:xfrm>
-          <a:prstGeom prst="rect">
-            <a:avLst/>
-          </a:prstGeom>
-        </p:spPr>
-      </p:pic>
-      <p:sp>
-        <p:nvSpPr>
-          <p:cNvPr id="23" name="Text 19"/>
-          <p:cNvSpPr/>
-          <p:nvPr/>
-        </p:nvSpPr>
-        <p:spPr>
-          <a:xfrm>
-            <a:off x="6858000" y="3200400"/>
-            <a:ext cx="4114800" cy="384048"/>
-          </a:xfrm>
-          <a:prstGeom prst="rect">
-            <a:avLst/>
-          </a:prstGeom>
-          <a:noFill/>
-          <a:ln/>
-        </p:spPr>
-        <p:txBody>
-          <a:bodyPr wrap="square" lIns="0" tIns="0" rIns="0" bIns="0" rtlCol="0" anchor="ctr"/>
-          <a:lstStyle/>
-          <a:p>
-            <a:pPr algn="ctr" indent="0" marL="0">
-              <a:buNone/>
-            </a:pPr>
-            <a:r>
-              <a:rPr lang="en-US" sz="950" b="1" dirty="0">
-                <a:solidFill>
-                  <a:srgbClr val="CFE3F7"/>
-                </a:solidFill>
-                <a:latin typeface="Calibri" pitchFamily="34" charset="0"/>
-                <a:ea typeface="Calibri" pitchFamily="34" charset="-122"/>
-                <a:cs typeface="Calibri" pitchFamily="34" charset="-120"/>
-              </a:rPr>
-              <a:t>Download for Free</a:t>
-            </a:r>
-            <a:endParaRPr lang="en-US" sz="950" dirty="0"/>
-          </a:p>
-        </p:txBody>
-      </p:sp>
-      <p:sp>
-        <p:nvSpPr>
-          <p:cNvPr id="24" name="Text 20"/>
-          <p:cNvSpPr/>
-          <p:nvPr/>
-        </p:nvSpPr>
-        <p:spPr>
-          <a:xfrm>
-            <a:off x="6858000" y="3886200"/>
-            <a:ext cx="4114800" cy="320040"/>
-          </a:xfrm>
-          <a:prstGeom prst="rect">
-            <a:avLst/>
-          </a:prstGeom>
-          <a:noFill/>
-          <a:ln/>
-        </p:spPr>
-        <p:txBody>
-          <a:bodyPr wrap="square" lIns="0" tIns="0" rIns="0" bIns="0" rtlCol="0" anchor="ctr"/>
-          <a:lstStyle/>
-          <a:p>
-            <a:pPr algn="ctr" indent="0" marL="0">
-              <a:buNone/>
-            </a:pPr>
-            <a:r>
-              <a:rPr lang="en-US" sz="1000" dirty="0">
-                <a:solidFill>
-                  <a:srgbClr val="9FC4EC"/>
-                </a:solidFill>
-                <a:latin typeface="Calibri" pitchFamily="34" charset="0"/>
-                <a:ea typeface="Calibri" pitchFamily="34" charset="-122"/>
-                <a:cs typeface="Calibri" pitchFamily="34" charset="-120"/>
-              </a:rPr>
-              <a:t>Windows / macOS / Linux に対応</a:t>
-            </a:r>
-            <a:endParaRPr lang="en-US" sz="1000" dirty="0"/>
-          </a:p>
-        </p:txBody>
-      </p:sp>
-      <p:sp>
-        <p:nvSpPr>
-          <p:cNvPr id="25" name="Shape 21"/>
-          <p:cNvSpPr/>
-          <p:nvPr/>
-        </p:nvSpPr>
-        <p:spPr>
-          <a:xfrm>
-            <a:off x="7744968" y="4279392"/>
-            <a:ext cx="566928" cy="566928"/>
-          </a:xfrm>
-          <a:prstGeom prst="ellipse">
-            <a:avLst/>
-          </a:prstGeom>
-          <a:solidFill>
-            <a:srgbClr val="15304A"/>
-          </a:solidFill>
-          <a:ln/>
-        </p:spPr>
-      </p:sp>
-      <p:pic>
-        <p:nvPicPr>
-          <p:cNvPr id="26" name="Image 2" descr="/tmp/esp32p4_guide/icons/windows_CFE3F7.png">    </p:cNvPr>
-          <p:cNvPicPr>
-            <a:picLocks noChangeAspect="1"/>
-          </p:cNvPicPr>
-          <p:nvPr/>
-        </p:nvPicPr>
-        <p:blipFill>
-          <a:blip r:embed="rId3"/>
-          <a:stretch>
-            <a:fillRect/>
-          </a:stretch>
-        </p:blipFill>
-        <p:spPr>
-          <a:xfrm>
-            <a:off x="7872527" y="4406951"/>
-            <a:ext cx="311810" cy="311810"/>
-          </a:xfrm>
-          <a:prstGeom prst="rect">
-            <a:avLst/>
-          </a:prstGeom>
-        </p:spPr>
-      </p:pic>
-      <p:sp>
-        <p:nvSpPr>
-          <p:cNvPr id="27" name="Shape 22"/>
-          <p:cNvSpPr/>
-          <p:nvPr/>
-        </p:nvSpPr>
-        <p:spPr>
-          <a:xfrm>
-            <a:off x="8631936" y="4279392"/>
-            <a:ext cx="566928" cy="566928"/>
-          </a:xfrm>
-          <a:prstGeom prst="ellipse">
-            <a:avLst/>
-          </a:prstGeom>
-          <a:solidFill>
-            <a:srgbClr val="15304A"/>
-          </a:solidFill>
-          <a:ln/>
-        </p:spPr>
-      </p:sp>
-      <p:pic>
-        <p:nvPicPr>
-          <p:cNvPr id="28" name="Image 3" descr="/tmp/esp32p4_guide/icons/apple_CFE3F7.png">    </p:cNvPr>
+          <p:cNvPr id="22" name="Image 1" descr="/tmp/esp32p4_guide/icons/vscode_FFFFFF.png"/>
           <p:cNvPicPr>
             <a:picLocks noChangeAspect="1"/>
           </p:cNvPicPr>
@@ -9624,8 +9999,8 @@
         </p:blipFill>
         <p:spPr>
           <a:xfrm>
-            <a:off x="8759495" y="4406951"/>
-            <a:ext cx="311810" cy="311810"/>
+            <a:off x="8783726" y="3032150"/>
+            <a:ext cx="373075" cy="373075"/>
           </a:xfrm>
           <a:prstGeom prst="rect">
             <a:avLst/>
@@ -9634,13 +10009,91 @@
       </p:pic>
       <p:sp>
         <p:nvSpPr>
-          <p:cNvPr id="29" name="Shape 23"/>
-          <p:cNvSpPr/>
-          <p:nvPr/>
-        </p:nvSpPr>
-        <p:spPr>
-          <a:xfrm>
-            <a:off x="9518904" y="4279392"/>
+          <p:cNvPr id="23" name="Text 19"/>
+          <p:cNvSpPr/>
+          <p:nvPr/>
+        </p:nvSpPr>
+        <p:spPr>
+          <a:xfrm>
+            <a:off x="6858000" y="3200400"/>
+            <a:ext cx="4114800" cy="384048"/>
+          </a:xfrm>
+          <a:prstGeom prst="rect">
+            <a:avLst/>
+          </a:prstGeom>
+          <a:noFill/>
+          <a:ln/>
+        </p:spPr>
+        <p:txBody>
+          <a:bodyPr wrap="square" lIns="0" tIns="0" rIns="0" bIns="0" rtlCol="0" anchor="ctr"/>
+          <a:lstStyle/>
+          <a:p>
+            <a:pPr marL="0" indent="0" algn="ctr">
+              <a:buNone/>
+            </a:pPr>
+            <a:r>
+              <a:rPr lang="en-US" sz="950" b="1" dirty="0">
+                <a:solidFill>
+                  <a:srgbClr val="CFE3F7"/>
+                </a:solidFill>
+                <a:latin typeface="Calibri" pitchFamily="34" charset="0"/>
+                <a:ea typeface="Calibri" pitchFamily="34" charset="-122"/>
+                <a:cs typeface="Calibri" pitchFamily="34" charset="-120"/>
+              </a:rPr>
+              <a:t>Download for Free</a:t>
+            </a:r>
+            <a:endParaRPr lang="en-US" sz="950" dirty="0"/>
+          </a:p>
+        </p:txBody>
+      </p:sp>
+      <p:sp>
+        <p:nvSpPr>
+          <p:cNvPr id="24" name="Text 20"/>
+          <p:cNvSpPr/>
+          <p:nvPr/>
+        </p:nvSpPr>
+        <p:spPr>
+          <a:xfrm>
+            <a:off x="6858000" y="3886200"/>
+            <a:ext cx="4114800" cy="320040"/>
+          </a:xfrm>
+          <a:prstGeom prst="rect">
+            <a:avLst/>
+          </a:prstGeom>
+          <a:noFill/>
+          <a:ln/>
+        </p:spPr>
+        <p:txBody>
+          <a:bodyPr wrap="square" lIns="0" tIns="0" rIns="0" bIns="0" rtlCol="0" anchor="ctr"/>
+          <a:lstStyle/>
+          <a:p>
+            <a:pPr marL="0" indent="0" algn="ctr">
+              <a:buNone/>
+            </a:pPr>
+            <a:r>
+              <a:rPr lang="en-US" sz="1000" dirty="0">
+                <a:solidFill>
+                  <a:srgbClr val="9FC4EC"/>
+                </a:solidFill>
+                <a:latin typeface="Calibri" pitchFamily="34" charset="0"/>
+                <a:ea typeface="Calibri" pitchFamily="34" charset="-122"/>
+                <a:cs typeface="Calibri" pitchFamily="34" charset="-120"/>
+              </a:rPr>
+              <a:t>Windows / macOS / Linux に対応</a:t>
+            </a:r>
+            <a:endParaRPr lang="en-US" sz="1000" dirty="0"/>
+          </a:p>
+        </p:txBody>
+      </p:sp>
+      <p:sp>
+        <p:nvSpPr>
+          <p:cNvPr id="25" name="Shape 21"/>
+          <p:cNvSpPr/>
+          <p:nvPr/>
+        </p:nvSpPr>
+        <p:spPr>
+          <a:xfrm>
+            <a:off x="7744968" y="4279392"/>
             <a:ext cx="566928" cy="566928"/>
           </a:xfrm>
           <a:prstGeom prst="ellipse">
@@ -9651,10 +10104,17 @@
           </a:solidFill>
           <a:ln/>
         </p:spPr>
+        <p:txBody>
+          <a:bodyPr/>
+          <a:lstStyle/>
+          <a:p>
+            <a:endParaRPr lang="ja-JP" altLang="en-US"/>
+          </a:p>
+        </p:txBody>
       </p:sp>
       <p:pic>
         <p:nvPicPr>
-          <p:cNvPr id="30" name="Image 4" descr="/tmp/esp32p4_guide/icons/linux_CFE3F7.png">    </p:cNvPr>
+          <p:cNvPr id="26" name="Image 2" descr="/tmp/esp32p4_guide/icons/windows_CFE3F7.png"/>
           <p:cNvPicPr>
             <a:picLocks noChangeAspect="1"/>
           </p:cNvPicPr>
@@ -9662,6 +10122,108 @@
         </p:nvPicPr>
         <p:blipFill>
           <a:blip r:embed="rId5"/>
+          <a:stretch>
+            <a:fillRect/>
+          </a:stretch>
+        </p:blipFill>
+        <p:spPr>
+          <a:xfrm>
+            <a:off x="7872527" y="4406951"/>
+            <a:ext cx="311810" cy="311810"/>
+          </a:xfrm>
+          <a:prstGeom prst="rect">
+            <a:avLst/>
+          </a:prstGeom>
+        </p:spPr>
+      </p:pic>
+      <p:sp>
+        <p:nvSpPr>
+          <p:cNvPr id="27" name="Shape 22"/>
+          <p:cNvSpPr/>
+          <p:nvPr/>
+        </p:nvSpPr>
+        <p:spPr>
+          <a:xfrm>
+            <a:off x="8631936" y="4279392"/>
+            <a:ext cx="566928" cy="566928"/>
+          </a:xfrm>
+          <a:prstGeom prst="ellipse">
+            <a:avLst/>
+          </a:prstGeom>
+          <a:solidFill>
+            <a:srgbClr val="15304A"/>
+          </a:solidFill>
+          <a:ln/>
+        </p:spPr>
+        <p:txBody>
+          <a:bodyPr/>
+          <a:lstStyle/>
+          <a:p>
+            <a:endParaRPr lang="ja-JP" altLang="en-US"/>
+          </a:p>
+        </p:txBody>
+      </p:sp>
+      <p:pic>
+        <p:nvPicPr>
+          <p:cNvPr id="28" name="Image 3" descr="/tmp/esp32p4_guide/icons/apple_CFE3F7.png"/>
+          <p:cNvPicPr>
+            <a:picLocks noChangeAspect="1"/>
+          </p:cNvPicPr>
+          <p:nvPr/>
+        </p:nvPicPr>
+        <p:blipFill>
+          <a:blip r:embed="rId6"/>
+          <a:stretch>
+            <a:fillRect/>
+          </a:stretch>
+        </p:blipFill>
+        <p:spPr>
+          <a:xfrm>
+            <a:off x="8759495" y="4406951"/>
+            <a:ext cx="311810" cy="311810"/>
+          </a:xfrm>
+          <a:prstGeom prst="rect">
+            <a:avLst/>
+          </a:prstGeom>
+        </p:spPr>
+      </p:pic>
+      <p:sp>
+        <p:nvSpPr>
+          <p:cNvPr id="29" name="Shape 23"/>
+          <p:cNvSpPr/>
+          <p:nvPr/>
+        </p:nvSpPr>
+        <p:spPr>
+          <a:xfrm>
+            <a:off x="9518904" y="4279392"/>
+            <a:ext cx="566928" cy="566928"/>
+          </a:xfrm>
+          <a:prstGeom prst="ellipse">
+            <a:avLst/>
+          </a:prstGeom>
+          <a:solidFill>
+            <a:srgbClr val="15304A"/>
+          </a:solidFill>
+          <a:ln/>
+        </p:spPr>
+        <p:txBody>
+          <a:bodyPr/>
+          <a:lstStyle/>
+          <a:p>
+            <a:endParaRPr lang="ja-JP" altLang="en-US"/>
+          </a:p>
+        </p:txBody>
+      </p:sp>
+      <p:pic>
+        <p:nvPicPr>
+          <p:cNvPr id="30" name="Image 4" descr="/tmp/esp32p4_guide/icons/linux_CFE3F7.png"/>
+          <p:cNvPicPr>
+            <a:picLocks noChangeAspect="1"/>
+          </p:cNvPicPr>
+          <p:nvPr/>
+        </p:nvPicPr>
+        <p:blipFill>
+          <a:blip r:embed="rId7"/>
           <a:stretch>
             <a:fillRect/>
           </a:stretch>
@@ -9702,17 +10264,24 @@
             <a:prstDash val="solid"/>
           </a:ln>
         </p:spPr>
+        <p:txBody>
+          <a:bodyPr/>
+          <a:lstStyle/>
+          <a:p>
+            <a:endParaRPr lang="ja-JP" altLang="en-US"/>
+          </a:p>
+        </p:txBody>
       </p:sp>
       <p:pic>
         <p:nvPicPr>
-          <p:cNvPr id="32" name="Image 5" descr="/tmp/esp32p4_guide/icons/lightbulb_0D2036.png">    </p:cNvPr>
+          <p:cNvPr id="32" name="Image 5" descr="/tmp/esp32p4_guide/icons/lightbulb_0D2036.png"/>
           <p:cNvPicPr>
             <a:picLocks noChangeAspect="1"/>
           </p:cNvPicPr>
           <p:nvPr/>
         </p:nvPicPr>
         <p:blipFill>
-          <a:blip r:embed="rId6"/>
+          <a:blip r:embed="rId8"/>
           <a:stretch>
             <a:fillRect/>
           </a:stretch>
@@ -9748,7 +10317,7 @@
           <a:bodyPr wrap="square" lIns="0" tIns="0" rIns="0" bIns="0" rtlCol="0" anchor="ctr"/>
           <a:lstStyle/>
           <a:p>
-            <a:pPr indent="0" marL="0">
+            <a:pPr marL="0" indent="0">
               <a:buNone/>
             </a:pPr>
             <a:r>
@@ -9787,7 +10356,7 @@
           <a:bodyPr wrap="square" lIns="0" tIns="0" rIns="0" bIns="0" rtlCol="0" anchor="t"/>
           <a:lstStyle/>
           <a:p>
-            <a:pPr indent="0" marL="0">
+            <a:pPr marL="0" indent="0">
               <a:lnSpc>
                 <a:spcPct val="115000"/>
               </a:lnSpc>
@@ -9829,7 +10398,7 @@
           <a:bodyPr wrap="square" rtlCol="0" anchor="ctr"/>
           <a:lstStyle/>
           <a:p>
-            <a:pPr algn="l" indent="0" marL="0">
+            <a:pPr marL="0" indent="0" algn="l">
               <a:buNone/>
             </a:pPr>
             <a:r>
@@ -9868,7 +10437,7 @@
           <a:bodyPr wrap="square" rtlCol="0" anchor="ctr"/>
           <a:lstStyle/>
           <a:p>
-            <a:pPr algn="r" indent="0" marL="0">
+            <a:pPr marL="0" indent="0" algn="r">
               <a:buNone/>
             </a:pPr>
             <a:r>
@@ -9902,6 +10471,7 @@
         <a:solidFill>
           <a:srgbClr val="FFFFFF"/>
         </a:solidFill>
+        <a:effectLst/>
       </p:bgPr>
     </p:bg>
     <p:spTree>
@@ -9939,6 +10509,13 @@
           </a:solidFill>
           <a:ln/>
         </p:spPr>
+        <p:txBody>
+          <a:bodyPr/>
+          <a:lstStyle/>
+          <a:p>
+            <a:endParaRPr lang="ja-JP" altLang="en-US"/>
+          </a:p>
+        </p:txBody>
       </p:sp>
       <p:sp>
         <p:nvSpPr>
@@ -9961,7 +10538,7 @@
           <a:bodyPr wrap="square" lIns="0" tIns="0" rIns="0" bIns="0" rtlCol="0" anchor="ctr"/>
           <a:lstStyle/>
           <a:p>
-            <a:pPr algn="ctr" indent="0" marL="0">
+            <a:pPr marL="0" indent="0" algn="ctr">
               <a:buNone/>
             </a:pPr>
             <a:r>
@@ -10000,7 +10577,7 @@
           <a:bodyPr wrap="square" lIns="0" tIns="0" rIns="0" bIns="0" rtlCol="0" anchor="ctr"/>
           <a:lstStyle/>
           <a:p>
-            <a:pPr algn="l" indent="0" marL="0">
+            <a:pPr marL="0" indent="0" algn="l">
               <a:buNone/>
             </a:pPr>
             <a:r>
@@ -10039,11 +10616,11 @@
           <a:bodyPr wrap="square" lIns="0" tIns="0" rIns="0" bIns="0" rtlCol="0" anchor="ctr"/>
           <a:lstStyle/>
           <a:p>
-            <a:pPr algn="l" indent="0" marL="0">
-              <a:buNone/>
-            </a:pPr>
-            <a:r>
-              <a:rPr lang="en-US" sz="1100" b="1" spc="100" kern="0" dirty="0">
+            <a:pPr marL="0" indent="0" algn="l">
+              <a:buNone/>
+            </a:pPr>
+            <a:r>
+              <a:rPr lang="en-US" sz="1100" b="1" kern="0" spc="100" dirty="0">
                 <a:solidFill>
                   <a:srgbClr val="0A5FB4"/>
                 </a:solidFill>
@@ -10076,17 +10653,24 @@
           </a:solidFill>
           <a:ln/>
         </p:spPr>
+        <p:txBody>
+          <a:bodyPr/>
+          <a:lstStyle/>
+          <a:p>
+            <a:endParaRPr lang="ja-JP" altLang="en-US"/>
+          </a:p>
+        </p:txBody>
       </p:sp>
       <p:pic>
         <p:nvPicPr>
-          <p:cNvPr id="7" name="Image 0" descr="/tmp/esp32p4_guide/icons/usb_0A5FB4.png">    </p:cNvPr>
+          <p:cNvPr id="7" name="Image 0" descr="/tmp/esp32p4_guide/icons/usb_0A5FB4.png"/>
           <p:cNvPicPr>
             <a:picLocks noChangeAspect="1"/>
           </p:cNvPicPr>
           <p:nvPr/>
         </p:nvPicPr>
         <p:blipFill>
-          <a:blip r:embed="rId1"/>
+          <a:blip r:embed="rId3"/>
           <a:stretch>
             <a:fillRect/>
           </a:stretch>
@@ -10122,7 +10706,7 @@
           <a:bodyPr wrap="square" lIns="0" tIns="0" rIns="0" bIns="0" rtlCol="0" anchor="ctr"/>
           <a:lstStyle/>
           <a:p>
-            <a:pPr indent="0" marL="0">
+            <a:pPr marL="0" indent="0">
               <a:buNone/>
             </a:pPr>
             <a:r>
@@ -10166,6 +10750,13 @@
             <a:prstDash val="solid"/>
           </a:ln>
         </p:spPr>
+        <p:txBody>
+          <a:bodyPr/>
+          <a:lstStyle/>
+          <a:p>
+            <a:endParaRPr lang="ja-JP" altLang="en-US"/>
+          </a:p>
+        </p:txBody>
       </p:sp>
       <p:sp>
         <p:nvSpPr>
@@ -10186,17 +10777,24 @@
           </a:solidFill>
           <a:ln/>
         </p:spPr>
+        <p:txBody>
+          <a:bodyPr/>
+          <a:lstStyle/>
+          <a:p>
+            <a:endParaRPr lang="ja-JP" altLang="en-US"/>
+          </a:p>
+        </p:txBody>
       </p:sp>
       <p:pic>
         <p:nvPicPr>
-          <p:cNvPr id="11" name="Image 1" descr="/tmp/esp32p4_guide/icons/windows_0A5FB4.png">    </p:cNvPr>
+          <p:cNvPr id="11" name="Image 1" descr="/tmp/esp32p4_guide/icons/windows_0A5FB4.png"/>
           <p:cNvPicPr>
             <a:picLocks noChangeAspect="1"/>
           </p:cNvPicPr>
           <p:nvPr/>
         </p:nvPicPr>
         <p:blipFill>
-          <a:blip r:embed="rId2"/>
+          <a:blip r:embed="rId4"/>
           <a:stretch>
             <a:fillRect/>
           </a:stretch>
@@ -10232,7 +10830,7 @@
           <a:bodyPr wrap="square" lIns="0" tIns="0" rIns="0" bIns="0" rtlCol="0" anchor="ctr"/>
           <a:lstStyle/>
           <a:p>
-            <a:pPr indent="0" marL="0">
+            <a:pPr marL="0" indent="0">
               <a:buNone/>
             </a:pPr>
             <a:r>
@@ -10370,6 +10968,13 @@
             <a:prstDash val="solid"/>
           </a:ln>
         </p:spPr>
+        <p:txBody>
+          <a:bodyPr/>
+          <a:lstStyle/>
+          <a:p>
+            <a:endParaRPr lang="ja-JP" altLang="en-US"/>
+          </a:p>
+        </p:txBody>
       </p:sp>
       <p:sp>
         <p:nvSpPr>
@@ -10390,17 +10995,24 @@
           </a:solidFill>
           <a:ln/>
         </p:spPr>
+        <p:txBody>
+          <a:bodyPr/>
+          <a:lstStyle/>
+          <a:p>
+            <a:endParaRPr lang="ja-JP" altLang="en-US"/>
+          </a:p>
+        </p:txBody>
       </p:sp>
       <p:pic>
         <p:nvPicPr>
-          <p:cNvPr id="16" name="Image 2" descr="/tmp/esp32p4_guide/icons/apple_0A5FB4.png">    </p:cNvPr>
+          <p:cNvPr id="16" name="Image 2" descr="/tmp/esp32p4_guide/icons/apple_0A5FB4.png"/>
           <p:cNvPicPr>
             <a:picLocks noChangeAspect="1"/>
           </p:cNvPicPr>
           <p:nvPr/>
         </p:nvPicPr>
         <p:blipFill>
-          <a:blip r:embed="rId3"/>
+          <a:blip r:embed="rId5"/>
           <a:stretch>
             <a:fillRect/>
           </a:stretch>
@@ -10436,7 +11048,7 @@
           <a:bodyPr wrap="square" lIns="0" tIns="0" rIns="0" bIns="0" rtlCol="0" anchor="ctr"/>
           <a:lstStyle/>
           <a:p>
-            <a:pPr indent="0" marL="0">
+            <a:pPr marL="0" indent="0">
               <a:buNone/>
             </a:pPr>
             <a:r>
@@ -10574,6 +11186,13 @@
             <a:prstDash val="solid"/>
           </a:ln>
         </p:spPr>
+        <p:txBody>
+          <a:bodyPr/>
+          <a:lstStyle/>
+          <a:p>
+            <a:endParaRPr lang="ja-JP" altLang="en-US"/>
+          </a:p>
+        </p:txBody>
       </p:sp>
       <p:sp>
         <p:nvSpPr>
@@ -10594,17 +11213,24 @@
           </a:solidFill>
           <a:ln/>
         </p:spPr>
+        <p:txBody>
+          <a:bodyPr/>
+          <a:lstStyle/>
+          <a:p>
+            <a:endParaRPr lang="ja-JP" altLang="en-US"/>
+          </a:p>
+        </p:txBody>
       </p:sp>
       <p:pic>
         <p:nvPicPr>
-          <p:cNvPr id="21" name="Image 3" descr="/tmp/esp32p4_guide/icons/linux_0A5FB4.png">    </p:cNvPr>
+          <p:cNvPr id="21" name="Image 3" descr="/tmp/esp32p4_guide/icons/linux_0A5FB4.png"/>
           <p:cNvPicPr>
             <a:picLocks noChangeAspect="1"/>
           </p:cNvPicPr>
           <p:nvPr/>
         </p:nvPicPr>
         <p:blipFill>
-          <a:blip r:embed="rId4"/>
+          <a:blip r:embed="rId6"/>
           <a:stretch>
             <a:fillRect/>
           </a:stretch>
@@ -10640,7 +11266,7 @@
           <a:bodyPr wrap="square" lIns="0" tIns="0" rIns="0" bIns="0" rtlCol="0" anchor="ctr"/>
           <a:lstStyle/>
           <a:p>
-            <a:pPr indent="0" marL="0">
+            <a:pPr marL="0" indent="0">
               <a:buNone/>
             </a:pPr>
             <a:r>
@@ -10778,17 +11404,24 @@
             <a:prstDash val="solid"/>
           </a:ln>
         </p:spPr>
+        <p:txBody>
+          <a:bodyPr/>
+          <a:lstStyle/>
+          <a:p>
+            <a:endParaRPr lang="ja-JP" altLang="en-US"/>
+          </a:p>
+        </p:txBody>
       </p:sp>
       <p:pic>
         <p:nvPicPr>
-          <p:cNvPr id="25" name="Image 4" descr="/tmp/esp32p4_guide/icons/warning_0D2036.png">    </p:cNvPr>
+          <p:cNvPr id="25" name="Image 4" descr="/tmp/esp32p4_guide/icons/warning_0D2036.png"/>
           <p:cNvPicPr>
             <a:picLocks noChangeAspect="1"/>
           </p:cNvPicPr>
           <p:nvPr/>
         </p:nvPicPr>
         <p:blipFill>
-          <a:blip r:embed="rId5"/>
+          <a:blip r:embed="rId7"/>
           <a:stretch>
             <a:fillRect/>
           </a:stretch>
@@ -10824,7 +11457,7 @@
           <a:bodyPr wrap="square" lIns="0" tIns="0" rIns="0" bIns="0" rtlCol="0" anchor="ctr"/>
           <a:lstStyle/>
           <a:p>
-            <a:pPr indent="0" marL="0">
+            <a:pPr marL="0" indent="0">
               <a:buNone/>
             </a:pPr>
             <a:r>
@@ -10863,7 +11496,7 @@
           <a:bodyPr wrap="square" lIns="0" tIns="0" rIns="0" bIns="0" rtlCol="0" anchor="t"/>
           <a:lstStyle/>
           <a:p>
-            <a:pPr indent="0" marL="0">
+            <a:pPr marL="0" indent="0">
               <a:lnSpc>
                 <a:spcPct val="115000"/>
               </a:lnSpc>
@@ -10905,7 +11538,7 @@
           <a:bodyPr wrap="square" rtlCol="0" anchor="ctr"/>
           <a:lstStyle/>
           <a:p>
-            <a:pPr algn="l" indent="0" marL="0">
+            <a:pPr marL="0" indent="0" algn="l">
               <a:buNone/>
             </a:pPr>
             <a:r>
@@ -10944,7 +11577,7 @@
           <a:bodyPr wrap="square" rtlCol="0" anchor="ctr"/>
           <a:lstStyle/>
           <a:p>
-            <a:pPr algn="r" indent="0" marL="0">
+            <a:pPr marL="0" indent="0" algn="r">
               <a:buNone/>
             </a:pPr>
             <a:r>
@@ -10978,6 +11611,7 @@
         <a:solidFill>
           <a:srgbClr val="FFFFFF"/>
         </a:solidFill>
+        <a:effectLst/>
       </p:bgPr>
     </p:bg>
     <p:spTree>
@@ -11015,6 +11649,13 @@
           </a:solidFill>
           <a:ln/>
         </p:spPr>
+        <p:txBody>
+          <a:bodyPr/>
+          <a:lstStyle/>
+          <a:p>
+            <a:endParaRPr lang="ja-JP" altLang="en-US"/>
+          </a:p>
+        </p:txBody>
       </p:sp>
       <p:sp>
         <p:nvSpPr>
@@ -11037,7 +11678,7 @@
           <a:bodyPr wrap="square" lIns="0" tIns="0" rIns="0" bIns="0" rtlCol="0" anchor="ctr"/>
           <a:lstStyle/>
           <a:p>
-            <a:pPr algn="ctr" indent="0" marL="0">
+            <a:pPr marL="0" indent="0" algn="ctr">
               <a:buNone/>
             </a:pPr>
             <a:r>
@@ -11076,7 +11717,7 @@
           <a:bodyPr wrap="square" lIns="0" tIns="0" rIns="0" bIns="0" rtlCol="0" anchor="ctr"/>
           <a:lstStyle/>
           <a:p>
-            <a:pPr algn="l" indent="0" marL="0">
+            <a:pPr marL="0" indent="0" algn="l">
               <a:buNone/>
             </a:pPr>
             <a:r>
@@ -11115,11 +11756,11 @@
           <a:bodyPr wrap="square" lIns="0" tIns="0" rIns="0" bIns="0" rtlCol="0" anchor="ctr"/>
           <a:lstStyle/>
           <a:p>
-            <a:pPr algn="l" indent="0" marL="0">
-              <a:buNone/>
-            </a:pPr>
-            <a:r>
-              <a:rPr lang="en-US" sz="1100" b="1" spc="100" kern="0" dirty="0">
+            <a:pPr marL="0" indent="0" algn="l">
+              <a:buNone/>
+            </a:pPr>
+            <a:r>
+              <a:rPr lang="en-US" sz="1100" b="1" kern="0" spc="100" dirty="0">
                 <a:solidFill>
                   <a:srgbClr val="0A5FB4"/>
                 </a:solidFill>
@@ -11152,17 +11793,24 @@
           </a:solidFill>
           <a:ln/>
         </p:spPr>
+        <p:txBody>
+          <a:bodyPr/>
+          <a:lstStyle/>
+          <a:p>
+            <a:endParaRPr lang="ja-JP" altLang="en-US"/>
+          </a:p>
+        </p:txBody>
       </p:sp>
       <p:pic>
         <p:nvPicPr>
-          <p:cNvPr id="7" name="Image 0" descr="/tmp/esp32p4_guide/icons/puzzle_0A5FB4.png">    </p:cNvPr>
+          <p:cNvPr id="7" name="Image 0" descr="/tmp/esp32p4_guide/icons/puzzle_0A5FB4.png"/>
           <p:cNvPicPr>
             <a:picLocks noChangeAspect="1"/>
           </p:cNvPicPr>
           <p:nvPr/>
         </p:nvPicPr>
         <p:blipFill>
-          <a:blip r:embed="rId1"/>
+          <a:blip r:embed="rId3"/>
           <a:stretch>
             <a:fillRect/>
           </a:stretch>
@@ -11196,6 +11844,13 @@
           </a:solidFill>
           <a:ln/>
         </p:spPr>
+        <p:txBody>
+          <a:bodyPr/>
+          <a:lstStyle/>
+          <a:p>
+            <a:endParaRPr lang="ja-JP" altLang="en-US"/>
+          </a:p>
+        </p:txBody>
       </p:sp>
       <p:sp>
         <p:nvSpPr>
@@ -11218,7 +11873,7 @@
           <a:bodyPr wrap="square" lIns="0" tIns="0" rIns="0" bIns="0" rtlCol="0" anchor="ctr"/>
           <a:lstStyle/>
           <a:p>
-            <a:pPr algn="ctr" indent="0" marL="0">
+            <a:pPr marL="0" indent="0" algn="ctr">
               <a:buNone/>
             </a:pPr>
             <a:r>
@@ -11257,7 +11912,7 @@
           <a:bodyPr wrap="square" lIns="0" tIns="0" rIns="0" bIns="0" rtlCol="0" anchor="t"/>
           <a:lstStyle/>
           <a:p>
-            <a:pPr indent="0" marL="0">
+            <a:pPr marL="0" indent="0">
               <a:lnSpc>
                 <a:spcPct val="118000"/>
               </a:lnSpc>
@@ -11297,6 +11952,13 @@
           </a:solidFill>
           <a:ln/>
         </p:spPr>
+        <p:txBody>
+          <a:bodyPr/>
+          <a:lstStyle/>
+          <a:p>
+            <a:endParaRPr lang="ja-JP" altLang="en-US"/>
+          </a:p>
+        </p:txBody>
       </p:sp>
       <p:sp>
         <p:nvSpPr>
@@ -11319,7 +11981,7 @@
           <a:bodyPr wrap="square" lIns="0" tIns="0" rIns="0" bIns="0" rtlCol="0" anchor="ctr"/>
           <a:lstStyle/>
           <a:p>
-            <a:pPr algn="ctr" indent="0" marL="0">
+            <a:pPr marL="0" indent="0" algn="ctr">
               <a:buNone/>
             </a:pPr>
             <a:r>
@@ -11358,7 +12020,7 @@
           <a:bodyPr wrap="square" lIns="0" tIns="0" rIns="0" bIns="0" rtlCol="0" anchor="t"/>
           <a:lstStyle/>
           <a:p>
-            <a:pPr indent="0" marL="0">
+            <a:pPr marL="0" indent="0">
               <a:lnSpc>
                 <a:spcPct val="118000"/>
               </a:lnSpc>
@@ -11398,6 +12060,13 @@
           </a:solidFill>
           <a:ln/>
         </p:spPr>
+        <p:txBody>
+          <a:bodyPr/>
+          <a:lstStyle/>
+          <a:p>
+            <a:endParaRPr lang="ja-JP" altLang="en-US"/>
+          </a:p>
+        </p:txBody>
       </p:sp>
       <p:sp>
         <p:nvSpPr>
@@ -11420,7 +12089,7 @@
           <a:bodyPr wrap="square" lIns="0" tIns="0" rIns="0" bIns="0" rtlCol="0" anchor="ctr"/>
           <a:lstStyle/>
           <a:p>
-            <a:pPr algn="ctr" indent="0" marL="0">
+            <a:pPr marL="0" indent="0" algn="ctr">
               <a:buNone/>
             </a:pPr>
             <a:r>
@@ -11459,7 +12128,7 @@
           <a:bodyPr wrap="square" lIns="0" tIns="0" rIns="0" bIns="0" rtlCol="0" anchor="t"/>
           <a:lstStyle/>
           <a:p>
-            <a:pPr indent="0" marL="0">
+            <a:pPr marL="0" indent="0">
               <a:lnSpc>
                 <a:spcPct val="118000"/>
               </a:lnSpc>
@@ -11499,6 +12168,13 @@
           </a:solidFill>
           <a:ln/>
         </p:spPr>
+        <p:txBody>
+          <a:bodyPr/>
+          <a:lstStyle/>
+          <a:p>
+            <a:endParaRPr lang="ja-JP" altLang="en-US"/>
+          </a:p>
+        </p:txBody>
       </p:sp>
       <p:sp>
         <p:nvSpPr>
@@ -11521,7 +12197,7 @@
           <a:bodyPr wrap="square" lIns="0" tIns="0" rIns="0" bIns="0" rtlCol="0" anchor="ctr"/>
           <a:lstStyle/>
           <a:p>
-            <a:pPr algn="ctr" indent="0" marL="0">
+            <a:pPr marL="0" indent="0" algn="ctr">
               <a:buNone/>
             </a:pPr>
             <a:r>
@@ -11560,7 +12236,7 @@
           <a:bodyPr wrap="square" lIns="0" tIns="0" rIns="0" bIns="0" rtlCol="0" anchor="t"/>
           <a:lstStyle/>
           <a:p>
-            <a:pPr indent="0" marL="0">
+            <a:pPr marL="0" indent="0">
               <a:lnSpc>
                 <a:spcPct val="118000"/>
               </a:lnSpc>
@@ -11600,6 +12276,13 @@
           </a:solidFill>
           <a:ln/>
         </p:spPr>
+        <p:txBody>
+          <a:bodyPr/>
+          <a:lstStyle/>
+          <a:p>
+            <a:endParaRPr lang="ja-JP" altLang="en-US"/>
+          </a:p>
+        </p:txBody>
       </p:sp>
       <p:sp>
         <p:nvSpPr>
@@ -11622,7 +12305,7 @@
           <a:bodyPr wrap="square" lIns="0" tIns="0" rIns="0" bIns="0" rtlCol="0" anchor="ctr"/>
           <a:lstStyle/>
           <a:p>
-            <a:pPr algn="ctr" indent="0" marL="0">
+            <a:pPr marL="0" indent="0" algn="ctr">
               <a:buNone/>
             </a:pPr>
             <a:r>
@@ -11661,7 +12344,7 @@
           <a:bodyPr wrap="square" lIns="0" tIns="0" rIns="0" bIns="0" rtlCol="0" anchor="t"/>
           <a:lstStyle/>
           <a:p>
-            <a:pPr indent="0" marL="0">
+            <a:pPr marL="0" indent="0">
               <a:lnSpc>
                 <a:spcPct val="118000"/>
               </a:lnSpc>
@@ -11708,13 +12391,20 @@
             <a:prstDash val="solid"/>
           </a:ln>
           <a:effectLst>
-            <a:outerShdw sx="100000" sy="100000" kx="0" ky="0" algn="bl" rotWithShape="0" blurRad="101600" dist="25400" dir="5400000">
+            <a:outerShdw blurRad="101600" dist="25400" dir="5400000" algn="bl" rotWithShape="0">
               <a:srgbClr val="1C2B3A">
                 <a:alpha val="14000"/>
               </a:srgbClr>
             </a:outerShdw>
           </a:effectLst>
         </p:spPr>
+        <p:txBody>
+          <a:bodyPr/>
+          <a:lstStyle/>
+          <a:p>
+            <a:endParaRPr lang="ja-JP" altLang="en-US"/>
+          </a:p>
+        </p:txBody>
       </p:sp>
       <p:sp>
         <p:nvSpPr>
@@ -11735,17 +12425,24 @@
           </a:solidFill>
           <a:ln/>
         </p:spPr>
+        <p:txBody>
+          <a:bodyPr/>
+          <a:lstStyle/>
+          <a:p>
+            <a:endParaRPr lang="ja-JP" altLang="en-US"/>
+          </a:p>
+        </p:txBody>
       </p:sp>
       <p:pic>
         <p:nvPicPr>
-          <p:cNvPr id="25" name="Image 1" descr="/tmp/esp32p4_guide/icons/puzzle_FFFFFF.png">    </p:cNvPr>
+          <p:cNvPr id="25" name="Image 1" descr="/tmp/esp32p4_guide/icons/puzzle_FFFFFF.png"/>
           <p:cNvPicPr>
             <a:picLocks noChangeAspect="1"/>
           </p:cNvPicPr>
           <p:nvPr/>
         </p:nvPicPr>
         <p:blipFill>
-          <a:blip r:embed="rId2"/>
+          <a:blip r:embed="rId4"/>
           <a:stretch>
             <a:fillRect/>
           </a:stretch>
@@ -11781,7 +12478,7 @@
           <a:bodyPr wrap="square" lIns="0" tIns="0" rIns="0" bIns="0" rtlCol="0" anchor="ctr"/>
           <a:lstStyle/>
           <a:p>
-            <a:pPr indent="0" marL="0">
+            <a:pPr marL="0" indent="0">
               <a:buNone/>
             </a:pPr>
             <a:r>
@@ -11820,7 +12517,7 @@
           <a:bodyPr wrap="square" lIns="0" tIns="0" rIns="0" bIns="0" rtlCol="0" anchor="ctr"/>
           <a:lstStyle/>
           <a:p>
-            <a:pPr indent="0" marL="0">
+            <a:pPr marL="0" indent="0">
               <a:buNone/>
             </a:pPr>
             <a:r>
@@ -11859,7 +12556,7 @@
           <a:bodyPr wrap="square" lIns="0" tIns="0" rIns="0" bIns="0" rtlCol="0" anchor="ctr"/>
           <a:lstStyle/>
           <a:p>
-            <a:pPr indent="0" marL="0">
+            <a:pPr marL="0" indent="0">
               <a:buNone/>
             </a:pPr>
             <a:r>
@@ -11899,6 +12596,13 @@
             <a:prstDash val="solid"/>
           </a:ln>
         </p:spPr>
+        <p:txBody>
+          <a:bodyPr/>
+          <a:lstStyle/>
+          <a:p>
+            <a:endParaRPr lang="ja-JP" altLang="en-US"/>
+          </a:p>
+        </p:txBody>
       </p:sp>
       <p:sp>
         <p:nvSpPr>
@@ -11921,7 +12625,7 @@
           <a:bodyPr wrap="square" lIns="0" tIns="0" rIns="0" bIns="0" rtlCol="0" anchor="ctr"/>
           <a:lstStyle/>
           <a:p>
-            <a:pPr indent="0" marL="0">
+            <a:pPr marL="0" indent="0">
               <a:lnSpc>
                 <a:spcPct val="120000"/>
               </a:lnSpc>
@@ -11963,6 +12667,13 @@
           </a:solidFill>
           <a:ln/>
         </p:spPr>
+        <p:txBody>
+          <a:bodyPr/>
+          <a:lstStyle/>
+          <a:p>
+            <a:endParaRPr lang="ja-JP" altLang="en-US"/>
+          </a:p>
+        </p:txBody>
       </p:sp>
       <p:sp>
         <p:nvSpPr>
@@ -11985,7 +12696,7 @@
           <a:bodyPr wrap="square" lIns="0" tIns="0" rIns="0" bIns="0" rtlCol="0" anchor="ctr"/>
           <a:lstStyle/>
           <a:p>
-            <a:pPr algn="ctr" indent="0" marL="0">
+            <a:pPr marL="0" indent="0" algn="ctr">
               <a:buNone/>
             </a:pPr>
             <a:r>
@@ -12029,17 +12740,24 @@
             <a:prstDash val="solid"/>
           </a:ln>
         </p:spPr>
+        <p:txBody>
+          <a:bodyPr/>
+          <a:lstStyle/>
+          <a:p>
+            <a:endParaRPr lang="ja-JP" altLang="en-US"/>
+          </a:p>
+        </p:txBody>
       </p:sp>
       <p:pic>
         <p:nvPicPr>
-          <p:cNvPr id="34" name="Image 2" descr="/tmp/esp32p4_guide/icons/book_0D2036.png">    </p:cNvPr>
+          <p:cNvPr id="34" name="Image 2" descr="/tmp/esp32p4_guide/icons/book_0D2036.png"/>
           <p:cNvPicPr>
             <a:picLocks noChangeAspect="1"/>
           </p:cNvPicPr>
           <p:nvPr/>
         </p:nvPicPr>
         <p:blipFill>
-          <a:blip r:embed="rId3"/>
+          <a:blip r:embed="rId5"/>
           <a:stretch>
             <a:fillRect/>
           </a:stretch>
@@ -12075,7 +12793,7 @@
           <a:bodyPr wrap="square" lIns="0" tIns="0" rIns="0" bIns="0" rtlCol="0" anchor="ctr"/>
           <a:lstStyle/>
           <a:p>
-            <a:pPr indent="0" marL="0">
+            <a:pPr marL="0" indent="0">
               <a:buNone/>
             </a:pPr>
             <a:r>
@@ -12114,7 +12832,7 @@
           <a:bodyPr wrap="square" lIns="0" tIns="0" rIns="0" bIns="0" rtlCol="0" anchor="t"/>
           <a:lstStyle/>
           <a:p>
-            <a:pPr indent="0" marL="0">
+            <a:pPr marL="0" indent="0">
               <a:lnSpc>
                 <a:spcPct val="115000"/>
               </a:lnSpc>
@@ -12156,7 +12874,7 @@
           <a:bodyPr wrap="square" rtlCol="0" anchor="ctr"/>
           <a:lstStyle/>
           <a:p>
-            <a:pPr algn="l" indent="0" marL="0">
+            <a:pPr marL="0" indent="0" algn="l">
               <a:buNone/>
             </a:pPr>
             <a:r>
@@ -12195,7 +12913,7 @@
           <a:bodyPr wrap="square" rtlCol="0" anchor="ctr"/>
           <a:lstStyle/>
           <a:p>
-            <a:pPr algn="r" indent="0" marL="0">
+            <a:pPr marL="0" indent="0" algn="r">
               <a:buNone/>
             </a:pPr>
             <a:r>
@@ -12229,6 +12947,7 @@
         <a:solidFill>
           <a:srgbClr val="FFFFFF"/>
         </a:solidFill>
+        <a:effectLst/>
       </p:bgPr>
     </p:bg>
     <p:spTree>
@@ -12266,6 +12985,13 @@
           </a:solidFill>
           <a:ln/>
         </p:spPr>
+        <p:txBody>
+          <a:bodyPr/>
+          <a:lstStyle/>
+          <a:p>
+            <a:endParaRPr lang="ja-JP" altLang="en-US"/>
+          </a:p>
+        </p:txBody>
       </p:sp>
       <p:sp>
         <p:nvSpPr>
@@ -12288,7 +13014,7 @@
           <a:bodyPr wrap="square" lIns="0" tIns="0" rIns="0" bIns="0" rtlCol="0" anchor="ctr"/>
           <a:lstStyle/>
           <a:p>
-            <a:pPr algn="ctr" indent="0" marL="0">
+            <a:pPr marL="0" indent="0" algn="ctr">
               <a:buNone/>
             </a:pPr>
             <a:r>
@@ -12327,7 +13053,7 @@
           <a:bodyPr wrap="square" lIns="0" tIns="0" rIns="0" bIns="0" rtlCol="0" anchor="ctr"/>
           <a:lstStyle/>
           <a:p>
-            <a:pPr algn="l" indent="0" marL="0">
+            <a:pPr marL="0" indent="0" algn="l">
               <a:buNone/>
             </a:pPr>
             <a:r>
@@ -12366,11 +13092,11 @@
           <a:bodyPr wrap="square" lIns="0" tIns="0" rIns="0" bIns="0" rtlCol="0" anchor="ctr"/>
           <a:lstStyle/>
           <a:p>
-            <a:pPr algn="l" indent="0" marL="0">
-              <a:buNone/>
-            </a:pPr>
-            <a:r>
-              <a:rPr lang="en-US" sz="1100" b="1" spc="100" kern="0" dirty="0">
+            <a:pPr marL="0" indent="0" algn="l">
+              <a:buNone/>
+            </a:pPr>
+            <a:r>
+              <a:rPr lang="en-US" sz="1100" b="1" kern="0" spc="100" dirty="0">
                 <a:solidFill>
                   <a:srgbClr val="0A5FB4"/>
                 </a:solidFill>
@@ -12403,17 +13129,24 @@
           </a:solidFill>
           <a:ln/>
         </p:spPr>
+        <p:txBody>
+          <a:bodyPr/>
+          <a:lstStyle/>
+          <a:p>
+            <a:endParaRPr lang="ja-JP" altLang="en-US"/>
+          </a:p>
+        </p:txBody>
       </p:sp>
       <p:pic>
         <p:nvPicPr>
-          <p:cNvPr id="7" name="Image 0" descr="/tmp/esp32p4_guide/icons/cloud_0A5FB4.png">    </p:cNvPr>
+          <p:cNvPr id="7" name="Image 0" descr="/tmp/esp32p4_guide/icons/cloud_0A5FB4.png"/>
           <p:cNvPicPr>
             <a:picLocks noChangeAspect="1"/>
           </p:cNvPicPr>
           <p:nvPr/>
         </p:nvPicPr>
         <p:blipFill>
-          <a:blip r:embed="rId1"/>
+          <a:blip r:embed="rId3"/>
           <a:stretch>
             <a:fillRect/>
           </a:stretch>
@@ -12447,6 +13180,13 @@
           </a:solidFill>
           <a:ln/>
         </p:spPr>
+        <p:txBody>
+          <a:bodyPr/>
+          <a:lstStyle/>
+          <a:p>
+            <a:endParaRPr lang="ja-JP" altLang="en-US"/>
+          </a:p>
+        </p:txBody>
       </p:sp>
       <p:sp>
         <p:nvSpPr>
@@ -12469,7 +13209,7 @@
           <a:bodyPr wrap="square" lIns="0" tIns="0" rIns="0" bIns="0" rtlCol="0" anchor="ctr"/>
           <a:lstStyle/>
           <a:p>
-            <a:pPr algn="ctr" indent="0" marL="0">
+            <a:pPr marL="0" indent="0" algn="ctr">
               <a:buNone/>
             </a:pPr>
             <a:r>
@@ -12508,7 +13248,7 @@
           <a:bodyPr wrap="square" lIns="0" tIns="0" rIns="0" bIns="0" rtlCol="0" anchor="t"/>
           <a:lstStyle/>
           <a:p>
-            <a:pPr indent="0" marL="0">
+            <a:pPr marL="0" indent="0">
               <a:lnSpc>
                 <a:spcPct val="118000"/>
               </a:lnSpc>
@@ -12523,7 +13263,7 @@
                 <a:ea typeface="Calibri" pitchFamily="34" charset="-122"/>
                 <a:cs typeface="Calibri" pitchFamily="34" charset="-120"/>
               </a:rPr>
-              <a:t>コマンドパレット（Ctrl+Shift+P）で「ESP-IDF: Configure ESP-IDF Extension」を実行</a:t>
+              <a:t>Explorerパネルの「Advanced」から「Open ESP-IDF Installation Manager」を実行</a:t>
             </a:r>
             <a:endParaRPr lang="en-US" sz="1200" dirty="0"/>
           </a:p>
@@ -12548,6 +13288,13 @@
           </a:solidFill>
           <a:ln/>
         </p:spPr>
+        <p:txBody>
+          <a:bodyPr/>
+          <a:lstStyle/>
+          <a:p>
+            <a:endParaRPr lang="ja-JP" altLang="en-US"/>
+          </a:p>
+        </p:txBody>
       </p:sp>
       <p:sp>
         <p:nvSpPr>
@@ -12570,7 +13317,7 @@
           <a:bodyPr wrap="square" lIns="0" tIns="0" rIns="0" bIns="0" rtlCol="0" anchor="ctr"/>
           <a:lstStyle/>
           <a:p>
-            <a:pPr algn="ctr" indent="0" marL="0">
+            <a:pPr marL="0" indent="0" algn="ctr">
               <a:buNone/>
             </a:pPr>
             <a:r>
@@ -12609,7 +13356,7 @@
           <a:bodyPr wrap="square" lIns="0" tIns="0" rIns="0" bIns="0" rtlCol="0" anchor="t"/>
           <a:lstStyle/>
           <a:p>
-            <a:pPr indent="0" marL="0">
+            <a:pPr marL="0" indent="0">
               <a:lnSpc>
                 <a:spcPct val="118000"/>
               </a:lnSpc>
@@ -12624,7 +13371,7 @@
                 <a:ea typeface="Calibri" pitchFamily="34" charset="-122"/>
                 <a:cs typeface="Calibri" pitchFamily="34" charset="-120"/>
               </a:rPr>
-              <a:t>セットアップモードは「EXPRESS（簡易）」を選択</a:t>
+              <a:t>インストール方法は「Easy Installation」を選択</a:t>
             </a:r>
             <a:endParaRPr lang="en-US" sz="1200" dirty="0"/>
           </a:p>
@@ -12649,6 +13396,13 @@
           </a:solidFill>
           <a:ln/>
         </p:spPr>
+        <p:txBody>
+          <a:bodyPr/>
+          <a:lstStyle/>
+          <a:p>
+            <a:endParaRPr lang="ja-JP" altLang="en-US"/>
+          </a:p>
+        </p:txBody>
       </p:sp>
       <p:sp>
         <p:nvSpPr>
@@ -12671,7 +13425,7 @@
           <a:bodyPr wrap="square" lIns="0" tIns="0" rIns="0" bIns="0" rtlCol="0" anchor="ctr"/>
           <a:lstStyle/>
           <a:p>
-            <a:pPr algn="ctr" indent="0" marL="0">
+            <a:pPr marL="0" indent="0" algn="ctr">
               <a:buNone/>
             </a:pPr>
             <a:r>
@@ -12710,7 +13464,7 @@
           <a:bodyPr wrap="square" lIns="0" tIns="0" rIns="0" bIns="0" rtlCol="0" anchor="t"/>
           <a:lstStyle/>
           <a:p>
-            <a:pPr indent="0" marL="0">
+            <a:pPr marL="0" indent="0">
               <a:lnSpc>
                 <a:spcPct val="118000"/>
               </a:lnSpc>
@@ -12725,7 +13479,7 @@
                 <a:ea typeface="Calibri" pitchFamily="34" charset="-122"/>
                 <a:cs typeface="Calibri" pitchFamily="34" charset="-120"/>
               </a:rPr>
-              <a:t>ESP-IDFバージョン一覧から v5.4.2 を選択する（右のポイント参照）</a:t>
+              <a:t>「Ready to Install」画面でバージョン・インストール先を確認（右のポイント参照）</a:t>
             </a:r>
             <a:endParaRPr lang="en-US" sz="1200" dirty="0"/>
           </a:p>
@@ -12750,6 +13504,13 @@
           </a:solidFill>
           <a:ln/>
         </p:spPr>
+        <p:txBody>
+          <a:bodyPr/>
+          <a:lstStyle/>
+          <a:p>
+            <a:endParaRPr lang="ja-JP" altLang="en-US"/>
+          </a:p>
+        </p:txBody>
       </p:sp>
       <p:sp>
         <p:nvSpPr>
@@ -12772,7 +13533,7 @@
           <a:bodyPr wrap="square" lIns="0" tIns="0" rIns="0" bIns="0" rtlCol="0" anchor="ctr"/>
           <a:lstStyle/>
           <a:p>
-            <a:pPr algn="ctr" indent="0" marL="0">
+            <a:pPr marL="0" indent="0" algn="ctr">
               <a:buNone/>
             </a:pPr>
             <a:r>
@@ -12811,7 +13572,7 @@
           <a:bodyPr wrap="square" lIns="0" tIns="0" rIns="0" bIns="0" rtlCol="0" anchor="t"/>
           <a:lstStyle/>
           <a:p>
-            <a:pPr indent="0" marL="0">
+            <a:pPr marL="0" indent="0">
               <a:lnSpc>
                 <a:spcPct val="118000"/>
               </a:lnSpc>
@@ -12826,7 +13587,7 @@
                 <a:ea typeface="Calibri" pitchFamily="34" charset="-122"/>
                 <a:cs typeface="Calibri" pitchFamily="34" charset="-120"/>
               </a:rPr>
-              <a:t>インストール先を確認し「Install」を実行 → 自動ダウンロード（15〜40分程度）</a:t>
+              <a:t>「Start Installation」を実行 → 自動ダウンロード・展開（10〜45分程度）</a:t>
             </a:r>
             <a:endParaRPr lang="en-US" sz="1200" dirty="0"/>
           </a:p>
@@ -12851,6 +13612,13 @@
           </a:solidFill>
           <a:ln/>
         </p:spPr>
+        <p:txBody>
+          <a:bodyPr/>
+          <a:lstStyle/>
+          <a:p>
+            <a:endParaRPr lang="ja-JP" altLang="en-US"/>
+          </a:p>
+        </p:txBody>
       </p:sp>
       <p:sp>
         <p:nvSpPr>
@@ -12873,7 +13641,7 @@
           <a:bodyPr wrap="square" lIns="0" tIns="0" rIns="0" bIns="0" rtlCol="0" anchor="ctr"/>
           <a:lstStyle/>
           <a:p>
-            <a:pPr algn="ctr" indent="0" marL="0">
+            <a:pPr marL="0" indent="0" algn="ctr">
               <a:buNone/>
             </a:pPr>
             <a:r>
@@ -12912,7 +13680,7 @@
           <a:bodyPr wrap="square" lIns="0" tIns="0" rIns="0" bIns="0" rtlCol="0" anchor="t"/>
           <a:lstStyle/>
           <a:p>
-            <a:pPr indent="0" marL="0">
+            <a:pPr marL="0" indent="0">
               <a:lnSpc>
                 <a:spcPct val="118000"/>
               </a:lnSpc>
@@ -12927,7 +13695,7 @@
                 <a:ea typeface="Calibri" pitchFamily="34" charset="-122"/>
                 <a:cs typeface="Calibri" pitchFamily="34" charset="-120"/>
               </a:rPr>
-              <a:t>完了後「ESP-IDF: Doctor Command」で構成に問題がないか確認</a:t>
+              <a:t>完了後、プロジェクトを開いてバージョン選択→Doctor Commandで確認</a:t>
             </a:r>
             <a:endParaRPr lang="en-US" sz="1200" dirty="0"/>
           </a:p>
@@ -12954,6 +13722,13 @@
           </a:solidFill>
           <a:ln/>
         </p:spPr>
+        <p:txBody>
+          <a:bodyPr/>
+          <a:lstStyle/>
+          <a:p>
+            <a:endParaRPr lang="ja-JP" altLang="en-US"/>
+          </a:p>
+        </p:txBody>
       </p:sp>
       <p:sp>
         <p:nvSpPr>
@@ -12976,7 +13751,7 @@
           <a:bodyPr wrap="square" lIns="0" tIns="0" rIns="0" bIns="0" rtlCol="0" anchor="ctr"/>
           <a:lstStyle/>
           <a:p>
-            <a:pPr indent="0" marL="0">
+            <a:pPr marL="0" indent="0">
               <a:buNone/>
             </a:pPr>
             <a:r>
@@ -12988,7 +13763,7 @@
                 <a:ea typeface="Calibri" pitchFamily="34" charset="-122"/>
                 <a:cs typeface="Calibri" pitchFamily="34" charset="-120"/>
               </a:rPr>
-              <a:t>選択するバージョン</a:t>
+              <a:t>導入されるバージョン</a:t>
             </a:r>
             <a:endParaRPr lang="en-US" sz="1050" dirty="0"/>
           </a:p>
@@ -13015,7 +13790,7 @@
           <a:bodyPr wrap="square" lIns="0" tIns="0" rIns="0" bIns="0" rtlCol="0" anchor="ctr"/>
           <a:lstStyle/>
           <a:p>
-            <a:pPr indent="0" marL="0">
+            <a:pPr marL="0" indent="0">
               <a:buNone/>
             </a:pPr>
             <a:r>
@@ -13027,7 +13802,7 @@
                 <a:ea typeface="Bookman Old Style" pitchFamily="34" charset="-122"/>
                 <a:cs typeface="Bookman Old Style" pitchFamily="34" charset="-120"/>
               </a:rPr>
-              <a:t>v5.4.2</a:t>
+              <a:t>v5.5.5</a:t>
             </a:r>
             <a:endParaRPr lang="en-US" sz="3800" dirty="0"/>
           </a:p>
@@ -13054,7 +13829,7 @@
           <a:bodyPr wrap="square" lIns="0" tIns="0" rIns="0" bIns="0" rtlCol="0" anchor="ctr"/>
           <a:lstStyle/>
           <a:p>
-            <a:pPr indent="0" marL="0">
+            <a:pPr marL="0" indent="0">
               <a:buNone/>
             </a:pPr>
             <a:r>
@@ -13066,7 +13841,7 @@
                 <a:ea typeface="Calibri" pitchFamily="34" charset="-122"/>
                 <a:cs typeface="Calibri" pitchFamily="34" charset="-120"/>
               </a:rPr>
-              <a:t>Elecrow公式サンプルの動作基準バージョン</a:t>
+              <a:t>Easy Installationが導入する最新安定版</a:t>
             </a:r>
             <a:endParaRPr lang="en-US" sz="950" dirty="0"/>
           </a:p>
@@ -13098,17 +13873,24 @@
             <a:prstDash val="solid"/>
           </a:ln>
         </p:spPr>
+        <p:txBody>
+          <a:bodyPr/>
+          <a:lstStyle/>
+          <a:p>
+            <a:endParaRPr lang="ja-JP" altLang="en-US"/>
+          </a:p>
+        </p:txBody>
       </p:sp>
       <p:pic>
         <p:nvPicPr>
-          <p:cNvPr id="28" name="Image 1" descr="/tmp/esp32p4_guide/icons/warning_0D2036.png">    </p:cNvPr>
+          <p:cNvPr id="28" name="Image 1" descr="/tmp/esp32p4_guide/icons/warning_0D2036.png"/>
           <p:cNvPicPr>
             <a:picLocks noChangeAspect="1"/>
           </p:cNvPicPr>
           <p:nvPr/>
         </p:nvPicPr>
         <p:blipFill>
-          <a:blip r:embed="rId2"/>
+          <a:blip r:embed="rId4"/>
           <a:stretch>
             <a:fillRect/>
           </a:stretch>
@@ -13144,7 +13926,7 @@
           <a:bodyPr wrap="square" lIns="0" tIns="0" rIns="0" bIns="0" rtlCol="0" anchor="ctr"/>
           <a:lstStyle/>
           <a:p>
-            <a:pPr indent="0" marL="0">
+            <a:pPr marL="0" indent="0">
               <a:buNone/>
             </a:pPr>
             <a:r>
@@ -13156,7 +13938,7 @@
                 <a:ea typeface="Calibri" pitchFamily="34" charset="-122"/>
                 <a:cs typeface="Calibri" pitchFamily="34" charset="-120"/>
               </a:rPr>
-              <a:t>バージョン選択が重要な理由</a:t>
+              <a:t>バージョンについて</a:t>
             </a:r>
             <a:endParaRPr lang="en-US" sz="1150" dirty="0"/>
           </a:p>
@@ -13183,7 +13965,7 @@
           <a:bodyPr wrap="square" lIns="0" tIns="0" rIns="0" bIns="0" rtlCol="0" anchor="t"/>
           <a:lstStyle/>
           <a:p>
-            <a:pPr indent="0" marL="0">
+            <a:pPr marL="0" indent="0">
               <a:lnSpc>
                 <a:spcPct val="115000"/>
               </a:lnSpc>
@@ -13198,7 +13980,7 @@
                 <a:ea typeface="Calibri" pitchFamily="34" charset="-122"/>
                 <a:cs typeface="Calibri" pitchFamily="34" charset="-120"/>
               </a:rPr>
-              <a:t>最新安定版はv6.x系ですが、公式サンプルはv5.4.2基準で作成されています。v5.5以降やv6.x系はディスプレイAPI名称変更（例：lcd_color_rgb_pixel_format_t → lcd_color_format_t）等でそのままビルドできない場合があります。</a:t>
+              <a:t>v5.5.5でHello Worldのビルド・書き込みまで動作確認済みです。LVGL等ディスプレイ系サンプルは一部API変更の影響を受ける場合があります。v5.4.2等に固定したい場合はCustom Installationも選択できます。</a:t>
             </a:r>
             <a:endParaRPr lang="en-US" sz="1000" dirty="0"/>
           </a:p>
@@ -13225,7 +14007,7 @@
           <a:bodyPr wrap="square" rtlCol="0" anchor="ctr"/>
           <a:lstStyle/>
           <a:p>
-            <a:pPr algn="l" indent="0" marL="0">
+            <a:pPr marL="0" indent="0" algn="l">
               <a:buNone/>
             </a:pPr>
             <a:r>
@@ -13264,7 +14046,7 @@
           <a:bodyPr wrap="square" rtlCol="0" anchor="ctr"/>
           <a:lstStyle/>
           <a:p>
-            <a:pPr algn="r" indent="0" marL="0">
+            <a:pPr marL="0" indent="0" algn="r">
               <a:buNone/>
             </a:pPr>
             <a:r>
@@ -13298,6 +14080,7 @@
         <a:solidFill>
           <a:srgbClr val="FFFFFF"/>
         </a:solidFill>
+        <a:effectLst/>
       </p:bgPr>
     </p:bg>
     <p:spTree>
@@ -13335,6 +14118,13 @@
           </a:solidFill>
           <a:ln/>
         </p:spPr>
+        <p:txBody>
+          <a:bodyPr/>
+          <a:lstStyle/>
+          <a:p>
+            <a:endParaRPr lang="ja-JP" altLang="en-US"/>
+          </a:p>
+        </p:txBody>
       </p:sp>
       <p:sp>
         <p:nvSpPr>
@@ -13357,7 +14147,7 @@
           <a:bodyPr wrap="square" lIns="0" tIns="0" rIns="0" bIns="0" rtlCol="0" anchor="ctr"/>
           <a:lstStyle/>
           <a:p>
-            <a:pPr algn="ctr" indent="0" marL="0">
+            <a:pPr marL="0" indent="0" algn="ctr">
               <a:buNone/>
             </a:pPr>
             <a:r>
@@ -13396,7 +14186,7 @@
           <a:bodyPr wrap="square" lIns="0" tIns="0" rIns="0" bIns="0" rtlCol="0" anchor="ctr"/>
           <a:lstStyle/>
           <a:p>
-            <a:pPr algn="l" indent="0" marL="0">
+            <a:pPr marL="0" indent="0" algn="l">
               <a:buNone/>
             </a:pPr>
             <a:r>
@@ -13435,11 +14225,11 @@
           <a:bodyPr wrap="square" lIns="0" tIns="0" rIns="0" bIns="0" rtlCol="0" anchor="ctr"/>
           <a:lstStyle/>
           <a:p>
-            <a:pPr algn="l" indent="0" marL="0">
-              <a:buNone/>
-            </a:pPr>
-            <a:r>
-              <a:rPr lang="en-US" sz="1100" b="1" spc="100" kern="0" dirty="0">
+            <a:pPr marL="0" indent="0" algn="l">
+              <a:buNone/>
+            </a:pPr>
+            <a:r>
+              <a:rPr lang="en-US" sz="1100" b="1" kern="0" spc="100" dirty="0">
                 <a:solidFill>
                   <a:srgbClr val="0A5FB4"/>
                 </a:solidFill>
@@ -13472,17 +14262,24 @@
           </a:solidFill>
           <a:ln/>
         </p:spPr>
+        <p:txBody>
+          <a:bodyPr/>
+          <a:lstStyle/>
+          <a:p>
+            <a:endParaRPr lang="ja-JP" altLang="en-US"/>
+          </a:p>
+        </p:txBody>
       </p:sp>
       <p:pic>
         <p:nvPicPr>
-          <p:cNvPr id="7" name="Image 0" descr="/tmp/esp32p4_guide/icons/bolt_0A5FB4.png">    </p:cNvPr>
+          <p:cNvPr id="7" name="Image 0" descr="/tmp/esp32p4_guide/icons/bolt_0A5FB4.png"/>
           <p:cNvPicPr>
             <a:picLocks noChangeAspect="1"/>
           </p:cNvPicPr>
           <p:nvPr/>
         </p:nvPicPr>
         <p:blipFill>
-          <a:blip r:embed="rId1"/>
+          <a:blip r:embed="rId3"/>
           <a:stretch>
             <a:fillRect/>
           </a:stretch>
@@ -13518,7 +14315,7 @@
           <a:bodyPr wrap="square" lIns="0" tIns="0" rIns="0" bIns="0" rtlCol="0" anchor="ctr"/>
           <a:lstStyle/>
           <a:p>
-            <a:pPr indent="0" marL="0">
+            <a:pPr marL="0" indent="0">
               <a:buNone/>
             </a:pPr>
             <a:r>
@@ -13562,6 +14359,13 @@
             <a:prstDash val="solid"/>
           </a:ln>
         </p:spPr>
+        <p:txBody>
+          <a:bodyPr/>
+          <a:lstStyle/>
+          <a:p>
+            <a:endParaRPr lang="ja-JP" altLang="en-US"/>
+          </a:p>
+        </p:txBody>
       </p:sp>
       <p:sp>
         <p:nvSpPr>
@@ -13582,17 +14386,24 @@
           </a:solidFill>
           <a:ln/>
         </p:spPr>
+        <p:txBody>
+          <a:bodyPr/>
+          <a:lstStyle/>
+          <a:p>
+            <a:endParaRPr lang="ja-JP" altLang="en-US"/>
+          </a:p>
+        </p:txBody>
       </p:sp>
       <p:pic>
         <p:nvPicPr>
-          <p:cNvPr id="11" name="Image 1" descr="/tmp/esp32p4_guide/icons/power_FFFFFF.png">    </p:cNvPr>
+          <p:cNvPr id="11" name="Image 1" descr="/tmp/esp32p4_guide/icons/power_FFFFFF.png"/>
           <p:cNvPicPr>
             <a:picLocks noChangeAspect="1"/>
           </p:cNvPicPr>
           <p:nvPr/>
         </p:nvPicPr>
         <p:blipFill>
-          <a:blip r:embed="rId2"/>
+          <a:blip r:embed="rId4"/>
           <a:stretch>
             <a:fillRect/>
           </a:stretch>
@@ -13628,7 +14439,7 @@
           <a:bodyPr wrap="square" lIns="0" tIns="0" rIns="0" bIns="0" rtlCol="0" anchor="ctr"/>
           <a:lstStyle/>
           <a:p>
-            <a:pPr indent="0" marL="0">
+            <a:pPr marL="0" indent="0">
               <a:buNone/>
             </a:pPr>
             <a:r>
@@ -13667,7 +14478,7 @@
           <a:bodyPr wrap="square" lIns="0" tIns="0" rIns="0" bIns="0" rtlCol="0" anchor="t"/>
           <a:lstStyle/>
           <a:p>
-            <a:pPr indent="0" marL="0">
+            <a:pPr marL="0" indent="0">
               <a:lnSpc>
                 <a:spcPct val="115000"/>
               </a:lnSpc>
@@ -13690,14 +14501,14 @@
       </p:sp>
       <p:pic>
         <p:nvPicPr>
-          <p:cNvPr id="14" name="Image 2" descr="/tmp/esp32p4_guide/icons/arrowright_0A5FB4.png">    </p:cNvPr>
+          <p:cNvPr id="14" name="Image 2" descr="/tmp/esp32p4_guide/icons/arrowright_0A5FB4.png"/>
           <p:cNvPicPr>
             <a:picLocks noChangeAspect="1"/>
           </p:cNvPicPr>
           <p:nvPr/>
         </p:nvPicPr>
         <p:blipFill>
-          <a:blip r:embed="rId3"/>
+          <a:blip r:embed="rId5"/>
           <a:stretch>
             <a:fillRect/>
           </a:stretch>
@@ -13738,6 +14549,13 @@
             <a:prstDash val="solid"/>
           </a:ln>
         </p:spPr>
+        <p:txBody>
+          <a:bodyPr/>
+          <a:lstStyle/>
+          <a:p>
+            <a:endParaRPr lang="ja-JP" altLang="en-US"/>
+          </a:p>
+        </p:txBody>
       </p:sp>
       <p:sp>
         <p:nvSpPr>
@@ -13758,10 +14576,17 @@
           </a:solidFill>
           <a:ln/>
         </p:spPr>
+        <p:txBody>
+          <a:bodyPr/>
+          <a:lstStyle/>
+          <a:p>
+            <a:endParaRPr lang="ja-JP" altLang="en-US"/>
+          </a:p>
+        </p:txBody>
       </p:sp>
       <p:pic>
         <p:nvPicPr>
-          <p:cNvPr id="17" name="Image 3" descr="/tmp/esp32p4_guide/icons/power_FFFFFF.png">    </p:cNvPr>
+          <p:cNvPr id="17" name="Image 3" descr="/tmp/esp32p4_guide/icons/power_FFFFFF.png"/>
           <p:cNvPicPr>
             <a:picLocks noChangeAspect="1"/>
           </p:cNvPicPr>
@@ -13804,7 +14629,7 @@
           <a:bodyPr wrap="square" lIns="0" tIns="0" rIns="0" bIns="0" rtlCol="0" anchor="ctr"/>
           <a:lstStyle/>
           <a:p>
-            <a:pPr indent="0" marL="0">
+            <a:pPr marL="0" indent="0">
               <a:buNone/>
             </a:pPr>
             <a:r>
@@ -13843,7 +14668,7 @@
           <a:bodyPr wrap="square" lIns="0" tIns="0" rIns="0" bIns="0" rtlCol="0" anchor="t"/>
           <a:lstStyle/>
           <a:p>
-            <a:pPr indent="0" marL="0">
+            <a:pPr marL="0" indent="0">
               <a:lnSpc>
                 <a:spcPct val="115000"/>
               </a:lnSpc>
@@ -13866,7 +14691,7 @@
       </p:sp>
       <p:pic>
         <p:nvPicPr>
-          <p:cNvPr id="20" name="Image 4" descr="/tmp/esp32p4_guide/icons/arrowright_0A5FB4.png">    </p:cNvPr>
+          <p:cNvPr id="20" name="Image 4" descr="/tmp/esp32p4_guide/icons/arrowright_0A5FB4.png"/>
           <p:cNvPicPr>
             <a:picLocks noChangeAspect="1"/>
           </p:cNvPicPr>
@@ -13914,6 +14739,13 @@
             <a:prstDash val="solid"/>
           </a:ln>
         </p:spPr>
+        <p:txBody>
+          <a:bodyPr/>
+          <a:lstStyle/>
+          <a:p>
+            <a:endParaRPr lang="ja-JP" altLang="en-US"/>
+          </a:p>
+        </p:txBody>
       </p:sp>
       <p:sp>
         <p:nvSpPr>
@@ -13934,17 +14766,24 @@
           </a:solidFill>
           <a:ln/>
         </p:spPr>
+        <p:txBody>
+          <a:bodyPr/>
+          <a:lstStyle/>
+          <a:p>
+            <a:endParaRPr lang="ja-JP" altLang="en-US"/>
+          </a:p>
+        </p:txBody>
       </p:sp>
       <p:pic>
         <p:nvPicPr>
-          <p:cNvPr id="23" name="Image 5" descr="/tmp/esp32p4_guide/icons/power_FFFFFF.png">    </p:cNvPr>
+          <p:cNvPr id="23" name="Image 5" descr="/tmp/esp32p4_guide/icons/power_FFFFFF.png"/>
           <p:cNvPicPr>
             <a:picLocks noChangeAspect="1"/>
           </p:cNvPicPr>
           <p:nvPr/>
         </p:nvPicPr>
         <p:blipFill>
-          <a:blip r:embed="rId6"/>
+          <a:blip r:embed="rId4"/>
           <a:stretch>
             <a:fillRect/>
           </a:stretch>
@@ -13980,7 +14819,7 @@
           <a:bodyPr wrap="square" lIns="0" tIns="0" rIns="0" bIns="0" rtlCol="0" anchor="ctr"/>
           <a:lstStyle/>
           <a:p>
-            <a:pPr indent="0" marL="0">
+            <a:pPr marL="0" indent="0">
               <a:buNone/>
             </a:pPr>
             <a:r>
@@ -14019,7 +14858,7 @@
           <a:bodyPr wrap="square" lIns="0" tIns="0" rIns="0" bIns="0" rtlCol="0" anchor="t"/>
           <a:lstStyle/>
           <a:p>
-            <a:pPr indent="0" marL="0">
+            <a:pPr marL="0" indent="0">
               <a:lnSpc>
                 <a:spcPct val="115000"/>
               </a:lnSpc>
@@ -14061,7 +14900,7 @@
           <a:bodyPr wrap="square" lIns="0" tIns="0" rIns="0" bIns="0" rtlCol="0" anchor="ctr"/>
           <a:lstStyle/>
           <a:p>
-            <a:pPr indent="0" marL="0">
+            <a:pPr marL="0" indent="0">
               <a:buNone/>
             </a:pPr>
             <a:r>
@@ -14105,6 +14944,13 @@
             <a:prstDash val="solid"/>
           </a:ln>
         </p:spPr>
+        <p:txBody>
+          <a:bodyPr/>
+          <a:lstStyle/>
+          <a:p>
+            <a:endParaRPr lang="ja-JP" altLang="en-US"/>
+          </a:p>
+        </p:txBody>
       </p:sp>
       <p:sp>
         <p:nvSpPr>
@@ -14125,17 +14971,24 @@
           </a:solidFill>
           <a:ln/>
         </p:spPr>
+        <p:txBody>
+          <a:bodyPr/>
+          <a:lstStyle/>
+          <a:p>
+            <a:endParaRPr lang="ja-JP" altLang="en-US"/>
+          </a:p>
+        </p:txBody>
       </p:sp>
       <p:pic>
         <p:nvPicPr>
-          <p:cNvPr id="29" name="Image 6" descr="/tmp/esp32p4_guide/icons/usb_0A5FB4.png">    </p:cNvPr>
+          <p:cNvPr id="29" name="Image 6" descr="/tmp/esp32p4_guide/icons/usb_0A5FB4.png"/>
           <p:cNvPicPr>
             <a:picLocks noChangeAspect="1"/>
           </p:cNvPicPr>
           <p:nvPr/>
         </p:nvPicPr>
         <p:blipFill>
-          <a:blip r:embed="rId7"/>
+          <a:blip r:embed="rId6"/>
           <a:stretch>
             <a:fillRect/>
           </a:stretch>
@@ -14171,7 +15024,7 @@
           <a:bodyPr wrap="square" lIns="0" tIns="0" rIns="0" bIns="0" rtlCol="0" anchor="ctr"/>
           <a:lstStyle/>
           <a:p>
-            <a:pPr algn="ctr" indent="0" marL="0">
+            <a:pPr marL="0" indent="0" algn="ctr">
               <a:buNone/>
             </a:pPr>
             <a:r>
@@ -14210,7 +15063,7 @@
           <a:bodyPr wrap="square" lIns="0" tIns="0" rIns="0" bIns="0" rtlCol="0" anchor="ctr"/>
           <a:lstStyle/>
           <a:p>
-            <a:pPr algn="ctr" indent="0" marL="0">
+            <a:pPr marL="0" indent="0" algn="ctr">
               <a:buNone/>
             </a:pPr>
             <a:r>
@@ -14230,14 +15083,14 @@
       </p:sp>
       <p:pic>
         <p:nvPicPr>
-          <p:cNvPr id="32" name="Image 7" descr="/tmp/esp32p4_guide/icons/arrowright_8A97A4.png">    </p:cNvPr>
+          <p:cNvPr id="32" name="Image 7" descr="/tmp/esp32p4_guide/icons/arrowright_8A97A4.png"/>
           <p:cNvPicPr>
             <a:picLocks noChangeAspect="1"/>
           </p:cNvPicPr>
           <p:nvPr/>
         </p:nvPicPr>
         <p:blipFill>
-          <a:blip r:embed="rId8"/>
+          <a:blip r:embed="rId7"/>
           <a:stretch>
             <a:fillRect/>
           </a:stretch>
@@ -14278,6 +15131,13 @@
             <a:prstDash val="solid"/>
           </a:ln>
         </p:spPr>
+        <p:txBody>
+          <a:bodyPr/>
+          <a:lstStyle/>
+          <a:p>
+            <a:endParaRPr lang="ja-JP" altLang="en-US"/>
+          </a:p>
+        </p:txBody>
       </p:sp>
       <p:sp>
         <p:nvSpPr>
@@ -14298,17 +15158,24 @@
           </a:solidFill>
           <a:ln/>
         </p:spPr>
+        <p:txBody>
+          <a:bodyPr/>
+          <a:lstStyle/>
+          <a:p>
+            <a:endParaRPr lang="ja-JP" altLang="en-US"/>
+          </a:p>
+        </p:txBody>
       </p:sp>
       <p:pic>
         <p:nvPicPr>
-          <p:cNvPr id="35" name="Image 8" descr="/tmp/esp32p4_guide/icons/terminal_0A5FB4.png">    </p:cNvPr>
+          <p:cNvPr id="35" name="Image 8" descr="/tmp/esp32p4_guide/icons/terminal_0A5FB4.png"/>
           <p:cNvPicPr>
             <a:picLocks noChangeAspect="1"/>
           </p:cNvPicPr>
           <p:nvPr/>
         </p:nvPicPr>
         <p:blipFill>
-          <a:blip r:embed="rId9"/>
+          <a:blip r:embed="rId8"/>
           <a:stretch>
             <a:fillRect/>
           </a:stretch>
@@ -14344,7 +15211,7 @@
           <a:bodyPr wrap="square" lIns="0" tIns="0" rIns="0" bIns="0" rtlCol="0" anchor="ctr"/>
           <a:lstStyle/>
           <a:p>
-            <a:pPr algn="ctr" indent="0" marL="0">
+            <a:pPr marL="0" indent="0" algn="ctr">
               <a:buNone/>
             </a:pPr>
             <a:r>
@@ -14383,7 +15250,7 @@
           <a:bodyPr wrap="square" lIns="0" tIns="0" rIns="0" bIns="0" rtlCol="0" anchor="ctr"/>
           <a:lstStyle/>
           <a:p>
-            <a:pPr algn="ctr" indent="0" marL="0">
+            <a:pPr marL="0" indent="0" algn="ctr">
               <a:buNone/>
             </a:pPr>
             <a:r>
@@ -14403,14 +15270,14 @@
       </p:sp>
       <p:pic>
         <p:nvPicPr>
-          <p:cNvPr id="38" name="Image 9" descr="/tmp/esp32p4_guide/icons/arrowright_8A97A4.png">    </p:cNvPr>
+          <p:cNvPr id="38" name="Image 9" descr="/tmp/esp32p4_guide/icons/arrowright_8A97A4.png"/>
           <p:cNvPicPr>
             <a:picLocks noChangeAspect="1"/>
           </p:cNvPicPr>
           <p:nvPr/>
         </p:nvPicPr>
         <p:blipFill>
-          <a:blip r:embed="rId10"/>
+          <a:blip r:embed="rId7"/>
           <a:stretch>
             <a:fillRect/>
           </a:stretch>
@@ -14451,6 +15318,13 @@
             <a:prstDash val="solid"/>
           </a:ln>
         </p:spPr>
+        <p:txBody>
+          <a:bodyPr/>
+          <a:lstStyle/>
+          <a:p>
+            <a:endParaRPr lang="ja-JP" altLang="en-US"/>
+          </a:p>
+        </p:txBody>
       </p:sp>
       <p:sp>
         <p:nvSpPr>
@@ -14471,17 +15345,24 @@
           </a:solidFill>
           <a:ln/>
         </p:spPr>
+        <p:txBody>
+          <a:bodyPr/>
+          <a:lstStyle/>
+          <a:p>
+            <a:endParaRPr lang="ja-JP" altLang="en-US"/>
+          </a:p>
+        </p:txBody>
       </p:sp>
       <p:pic>
         <p:nvPicPr>
-          <p:cNvPr id="41" name="Image 10" descr="/tmp/esp32p4_guide/icons/bolt_0A5FB4.png">    </p:cNvPr>
+          <p:cNvPr id="41" name="Image 10" descr="/tmp/esp32p4_guide/icons/bolt_0A5FB4.png"/>
           <p:cNvPicPr>
             <a:picLocks noChangeAspect="1"/>
           </p:cNvPicPr>
           <p:nvPr/>
         </p:nvPicPr>
         <p:blipFill>
-          <a:blip r:embed="rId11"/>
+          <a:blip r:embed="rId3"/>
           <a:stretch>
             <a:fillRect/>
           </a:stretch>
@@ -14517,7 +15398,7 @@
           <a:bodyPr wrap="square" lIns="0" tIns="0" rIns="0" bIns="0" rtlCol="0" anchor="ctr"/>
           <a:lstStyle/>
           <a:p>
-            <a:pPr algn="ctr" indent="0" marL="0">
+            <a:pPr marL="0" indent="0" algn="ctr">
               <a:buNone/>
             </a:pPr>
             <a:r>
@@ -14556,7 +15437,7 @@
           <a:bodyPr wrap="square" lIns="0" tIns="0" rIns="0" bIns="0" rtlCol="0" anchor="ctr"/>
           <a:lstStyle/>
           <a:p>
-            <a:pPr algn="ctr" indent="0" marL="0">
+            <a:pPr marL="0" indent="0" algn="ctr">
               <a:buNone/>
             </a:pPr>
             <a:r>
@@ -14576,14 +15457,14 @@
       </p:sp>
       <p:pic>
         <p:nvPicPr>
-          <p:cNvPr id="44" name="Image 11" descr="/tmp/esp32p4_guide/icons/arrowright_8A97A4.png">    </p:cNvPr>
+          <p:cNvPr id="44" name="Image 11" descr="/tmp/esp32p4_guide/icons/arrowright_8A97A4.png"/>
           <p:cNvPicPr>
             <a:picLocks noChangeAspect="1"/>
           </p:cNvPicPr>
           <p:nvPr/>
         </p:nvPicPr>
         <p:blipFill>
-          <a:blip r:embed="rId12"/>
+          <a:blip r:embed="rId7"/>
           <a:stretch>
             <a:fillRect/>
           </a:stretch>
@@ -14624,6 +15505,13 @@
             <a:prstDash val="solid"/>
           </a:ln>
         </p:spPr>
+        <p:txBody>
+          <a:bodyPr/>
+          <a:lstStyle/>
+          <a:p>
+            <a:endParaRPr lang="ja-JP" altLang="en-US"/>
+          </a:p>
+        </p:txBody>
       </p:sp>
       <p:sp>
         <p:nvSpPr>
@@ -14644,17 +15532,24 @@
           </a:solidFill>
           <a:ln/>
         </p:spPr>
+        <p:txBody>
+          <a:bodyPr/>
+          <a:lstStyle/>
+          <a:p>
+            <a:endParaRPr lang="ja-JP" altLang="en-US"/>
+          </a:p>
+        </p:txBody>
       </p:sp>
       <p:pic>
         <p:nvPicPr>
-          <p:cNvPr id="47" name="Image 12" descr="/tmp/esp32p4_guide/icons/monitor_0A5FB4.png">    </p:cNvPr>
+          <p:cNvPr id="47" name="Image 12" descr="/tmp/esp32p4_guide/icons/monitor_0A5FB4.png"/>
           <p:cNvPicPr>
             <a:picLocks noChangeAspect="1"/>
           </p:cNvPicPr>
           <p:nvPr/>
         </p:nvPicPr>
         <p:blipFill>
-          <a:blip r:embed="rId13"/>
+          <a:blip r:embed="rId9"/>
           <a:stretch>
             <a:fillRect/>
           </a:stretch>
@@ -14690,7 +15585,7 @@
           <a:bodyPr wrap="square" lIns="0" tIns="0" rIns="0" bIns="0" rtlCol="0" anchor="ctr"/>
           <a:lstStyle/>
           <a:p>
-            <a:pPr algn="ctr" indent="0" marL="0">
+            <a:pPr marL="0" indent="0" algn="ctr">
               <a:buNone/>
             </a:pPr>
             <a:r>
@@ -14729,7 +15624,7 @@
           <a:bodyPr wrap="square" lIns="0" tIns="0" rIns="0" bIns="0" rtlCol="0" anchor="ctr"/>
           <a:lstStyle/>
           <a:p>
-            <a:pPr algn="ctr" indent="0" marL="0">
+            <a:pPr marL="0" indent="0" algn="ctr">
               <a:buNone/>
             </a:pPr>
             <a:r>
@@ -14773,17 +15668,24 @@
             <a:prstDash val="solid"/>
           </a:ln>
         </p:spPr>
+        <p:txBody>
+          <a:bodyPr/>
+          <a:lstStyle/>
+          <a:p>
+            <a:endParaRPr lang="ja-JP" altLang="en-US"/>
+          </a:p>
+        </p:txBody>
       </p:sp>
       <p:pic>
         <p:nvPicPr>
-          <p:cNvPr id="51" name="Image 13" descr="/tmp/esp32p4_guide/icons/lightbulb_0D2036.png">    </p:cNvPr>
+          <p:cNvPr id="51" name="Image 13" descr="/tmp/esp32p4_guide/icons/lightbulb_0D2036.png"/>
           <p:cNvPicPr>
             <a:picLocks noChangeAspect="1"/>
           </p:cNvPicPr>
           <p:nvPr/>
         </p:nvPicPr>
         <p:blipFill>
-          <a:blip r:embed="rId14"/>
+          <a:blip r:embed="rId10"/>
           <a:stretch>
             <a:fillRect/>
           </a:stretch>
@@ -14819,7 +15721,7 @@
           <a:bodyPr wrap="square" lIns="0" tIns="0" rIns="0" bIns="0" rtlCol="0" anchor="ctr"/>
           <a:lstStyle/>
           <a:p>
-            <a:pPr indent="0" marL="0">
+            <a:pPr marL="0" indent="0">
               <a:buNone/>
             </a:pPr>
             <a:r>
@@ -14858,7 +15760,7 @@
           <a:bodyPr wrap="square" lIns="0" tIns="0" rIns="0" bIns="0" rtlCol="0" anchor="t"/>
           <a:lstStyle/>
           <a:p>
-            <a:pPr indent="0" marL="0">
+            <a:pPr marL="0" indent="0">
               <a:lnSpc>
                 <a:spcPct val="115000"/>
               </a:lnSpc>
@@ -14900,7 +15802,7 @@
           <a:bodyPr wrap="square" rtlCol="0" anchor="ctr"/>
           <a:lstStyle/>
           <a:p>
-            <a:pPr algn="l" indent="0" marL="0">
+            <a:pPr marL="0" indent="0" algn="l">
               <a:buNone/>
             </a:pPr>
             <a:r>
@@ -14939,7 +15841,7 @@
           <a:bodyPr wrap="square" rtlCol="0" anchor="ctr"/>
           <a:lstStyle/>
           <a:p>
-            <a:pPr algn="r" indent="0" marL="0">
+            <a:pPr marL="0" indent="0" algn="r">
               <a:buNone/>
             </a:pPr>
             <a:r>
@@ -15258,4 +16160,319 @@
     </a:ext>
   </a:extLst>
 </a:theme>
+</file>
+
+<file path=ppt/theme/theme2.xml><?xml version="1.0" encoding="utf-8"?>
+<a:theme xmlns:a="http://schemas.openxmlformats.org/drawingml/2006/main" name="Office テーマ">
+  <a:themeElements>
+    <a:clrScheme name="Office">
+      <a:dk1>
+        <a:sysClr val="windowText" lastClr="000000"/>
+      </a:dk1>
+      <a:lt1>
+        <a:sysClr val="window" lastClr="FFFFFF"/>
+      </a:lt1>
+      <a:dk2>
+        <a:srgbClr val="0E2841"/>
+      </a:dk2>
+      <a:lt2>
+        <a:srgbClr val="E8E8E8"/>
+      </a:lt2>
+      <a:accent1>
+        <a:srgbClr val="156082"/>
+      </a:accent1>
+      <a:accent2>
+        <a:srgbClr val="E97132"/>
+      </a:accent2>
+      <a:accent3>
+        <a:srgbClr val="196B24"/>
+      </a:accent3>
+      <a:accent4>
+        <a:srgbClr val="0F9ED5"/>
+      </a:accent4>
+      <a:accent5>
+        <a:srgbClr val="A02B93"/>
+      </a:accent5>
+      <a:accent6>
+        <a:srgbClr val="4EA72E"/>
+      </a:accent6>
+      <a:hlink>
+        <a:srgbClr val="467886"/>
+      </a:hlink>
+      <a:folHlink>
+        <a:srgbClr val="96607D"/>
+      </a:folHlink>
+    </a:clrScheme>
+    <a:fontScheme name="Office">
+      <a:majorFont>
+        <a:latin typeface="游ゴシック Light" panose="02110004020202020204"/>
+        <a:ea typeface=""/>
+        <a:cs typeface=""/>
+        <a:font script="Jpan" typeface="游ゴシック Light"/>
+        <a:font script="Hang" typeface="맑은 고딕"/>
+        <a:font script="Hans" typeface="等线 Light"/>
+        <a:font script="Hant" typeface="新細明體"/>
+        <a:font script="Arab" typeface="Times New Roman"/>
+        <a:font script="Hebr" typeface="Times New Roman"/>
+        <a:font script="Thai" typeface="Angsana New"/>
+        <a:font script="Ethi" typeface="Nyala"/>
+        <a:font script="Beng" typeface="Vrinda"/>
+        <a:font script="Gujr" typeface="Shruti"/>
+        <a:font script="Khmr" typeface="MoolBoran"/>
+        <a:font script="Knda" typeface="Tunga"/>
+        <a:font script="Guru" typeface="Raavi"/>
+        <a:font script="Cans" typeface="Euphemia"/>
+        <a:font script="Cher" typeface="Plantagenet Cherokee"/>
+        <a:font script="Yiii" typeface="Microsoft Yi Baiti"/>
+        <a:font script="Tibt" typeface="Microsoft Himalaya"/>
+        <a:font script="Thaa" typeface="MV Boli"/>
+        <a:font script="Deva" typeface="Mangal"/>
+        <a:font script="Telu" typeface="Gautami"/>
+        <a:font script="Taml" typeface="Latha"/>
+        <a:font script="Syrc" typeface="Estrangelo Edessa"/>
+        <a:font script="Orya" typeface="Kalinga"/>
+        <a:font script="Mlym" typeface="Kartika"/>
+        <a:font script="Laoo" typeface="DokChampa"/>
+        <a:font script="Sinh" typeface="Iskoola Pota"/>
+        <a:font script="Mong" typeface="Mongolian Baiti"/>
+        <a:font script="Viet" typeface="Times New Roman"/>
+        <a:font script="Uigh" typeface="Microsoft Uighur"/>
+        <a:font script="Geor" typeface="Sylfaen"/>
+        <a:font script="Armn" typeface="Arial"/>
+        <a:font script="Bugi" typeface="Leelawadee UI"/>
+        <a:font script="Bopo" typeface="Microsoft JhengHei"/>
+        <a:font script="Java" typeface="Javanese Text"/>
+        <a:font script="Lisu" typeface="Segoe UI"/>
+        <a:font script="Mymr" typeface="Myanmar Text"/>
+        <a:font script="Nkoo" typeface="Ebrima"/>
+        <a:font script="Olck" typeface="Nirmala UI"/>
+        <a:font script="Osma" typeface="Ebrima"/>
+        <a:font script="Phag" typeface="Phagspa"/>
+        <a:font script="Syrn" typeface="Estrangelo Edessa"/>
+        <a:font script="Syrj" typeface="Estrangelo Edessa"/>
+        <a:font script="Syre" typeface="Estrangelo Edessa"/>
+        <a:font script="Sora" typeface="Nirmala UI"/>
+        <a:font script="Tale" typeface="Microsoft Tai Le"/>
+        <a:font script="Talu" typeface="Microsoft New Tai Lue"/>
+        <a:font script="Tfng" typeface="Ebrima"/>
+      </a:majorFont>
+      <a:minorFont>
+        <a:latin typeface="游ゴシック" panose="02110004020202020204"/>
+        <a:ea typeface=""/>
+        <a:cs typeface=""/>
+        <a:font script="Jpan" typeface="游ゴシック"/>
+        <a:font script="Hang" typeface="맑은 고딕"/>
+        <a:font script="Hans" typeface="等线"/>
+        <a:font script="Hant" typeface="新細明體"/>
+        <a:font script="Arab" typeface="Arial"/>
+        <a:font script="Hebr" typeface="Arial"/>
+        <a:font script="Thai" typeface="Cordia New"/>
+        <a:font script="Ethi" typeface="Nyala"/>
+        <a:font script="Beng" typeface="Vrinda"/>
+        <a:font script="Gujr" typeface="Shruti"/>
+        <a:font script="Khmr" typeface="DaunPenh"/>
+        <a:font script="Knda" typeface="Tunga"/>
+        <a:font script="Guru" typeface="Raavi"/>
+        <a:font script="Cans" typeface="Euphemia"/>
+        <a:font script="Cher" typeface="Plantagenet Cherokee"/>
+        <a:font script="Yiii" typeface="Microsoft Yi Baiti"/>
+        <a:font script="Tibt" typeface="Microsoft Himalaya"/>
+        <a:font script="Thaa" typeface="MV Boli"/>
+        <a:font script="Deva" typeface="Mangal"/>
+        <a:font script="Telu" typeface="Gautami"/>
+        <a:font script="Taml" typeface="Latha"/>
+        <a:font script="Syrc" typeface="Estrangelo Edessa"/>
+        <a:font script="Orya" typeface="Kalinga"/>
+        <a:font script="Mlym" typeface="Kartika"/>
+        <a:font script="Laoo" typeface="DokChampa"/>
+        <a:font script="Sinh" typeface="Iskoola Pota"/>
+        <a:font script="Mong" typeface="Mongolian Baiti"/>
+        <a:font script="Viet" typeface="Arial"/>
+        <a:font script="Uigh" typeface="Microsoft Uighur"/>
+        <a:font script="Geor" typeface="Sylfaen"/>
+        <a:font script="Armn" typeface="Arial"/>
+        <a:font script="Bugi" typeface="Leelawadee UI"/>
+        <a:font script="Bopo" typeface="Microsoft JhengHei"/>
+        <a:font script="Java" typeface="Javanese Text"/>
+        <a:font script="Lisu" typeface="Segoe UI"/>
+        <a:font script="Mymr" typeface="Myanmar Text"/>
+        <a:font script="Nkoo" typeface="Ebrima"/>
+        <a:font script="Olck" typeface="Nirmala UI"/>
+        <a:font script="Osma" typeface="Ebrima"/>
+        <a:font script="Phag" typeface="Phagspa"/>
+        <a:font script="Syrn" typeface="Estrangelo Edessa"/>
+        <a:font script="Syrj" typeface="Estrangelo Edessa"/>
+        <a:font script="Syre" typeface="Estrangelo Edessa"/>
+        <a:font script="Sora" typeface="Nirmala UI"/>
+        <a:font script="Tale" typeface="Microsoft Tai Le"/>
+        <a:font script="Talu" typeface="Microsoft New Tai Lue"/>
+        <a:font script="Tfng" typeface="Ebrima"/>
+      </a:minorFont>
+    </a:fontScheme>
+    <a:fmtScheme name="Office">
+      <a:fillStyleLst>
+        <a:solidFill>
+          <a:schemeClr val="phClr"/>
+        </a:solidFill>
+        <a:gradFill rotWithShape="1">
+          <a:gsLst>
+            <a:gs pos="0">
+              <a:schemeClr val="phClr">
+                <a:lumMod val="110000"/>
+                <a:satMod val="105000"/>
+                <a:tint val="67000"/>
+              </a:schemeClr>
+            </a:gs>
+            <a:gs pos="50000">
+              <a:schemeClr val="phClr">
+                <a:lumMod val="105000"/>
+                <a:satMod val="103000"/>
+                <a:tint val="73000"/>
+              </a:schemeClr>
+            </a:gs>
+            <a:gs pos="100000">
+              <a:schemeClr val="phClr">
+                <a:lumMod val="105000"/>
+                <a:satMod val="109000"/>
+                <a:tint val="81000"/>
+              </a:schemeClr>
+            </a:gs>
+          </a:gsLst>
+          <a:lin ang="5400000" scaled="0"/>
+        </a:gradFill>
+        <a:gradFill rotWithShape="1">
+          <a:gsLst>
+            <a:gs pos="0">
+              <a:schemeClr val="phClr">
+                <a:satMod val="103000"/>
+                <a:lumMod val="102000"/>
+                <a:tint val="94000"/>
+              </a:schemeClr>
+            </a:gs>
+            <a:gs pos="50000">
+              <a:schemeClr val="phClr">
+                <a:satMod val="110000"/>
+                <a:lumMod val="100000"/>
+                <a:shade val="100000"/>
+              </a:schemeClr>
+            </a:gs>
+            <a:gs pos="100000">
+              <a:schemeClr val="phClr">
+                <a:lumMod val="99000"/>
+                <a:satMod val="120000"/>
+                <a:shade val="78000"/>
+              </a:schemeClr>
+            </a:gs>
+          </a:gsLst>
+          <a:lin ang="5400000" scaled="0"/>
+        </a:gradFill>
+      </a:fillStyleLst>
+      <a:lnStyleLst>
+        <a:ln w="12700" cap="flat" cmpd="sng" algn="ctr">
+          <a:solidFill>
+            <a:schemeClr val="phClr"/>
+          </a:solidFill>
+          <a:prstDash val="solid"/>
+          <a:miter lim="800000"/>
+        </a:ln>
+        <a:ln w="19050" cap="flat" cmpd="sng" algn="ctr">
+          <a:solidFill>
+            <a:schemeClr val="phClr"/>
+          </a:solidFill>
+          <a:prstDash val="solid"/>
+          <a:miter lim="800000"/>
+        </a:ln>
+        <a:ln w="25400" cap="flat" cmpd="sng" algn="ctr">
+          <a:solidFill>
+            <a:schemeClr val="phClr"/>
+          </a:solidFill>
+          <a:prstDash val="solid"/>
+          <a:miter lim="800000"/>
+        </a:ln>
+      </a:lnStyleLst>
+      <a:effectStyleLst>
+        <a:effectStyle>
+          <a:effectLst/>
+        </a:effectStyle>
+        <a:effectStyle>
+          <a:effectLst/>
+        </a:effectStyle>
+        <a:effectStyle>
+          <a:effectLst>
+            <a:outerShdw blurRad="57150" dist="19050" dir="5400000" algn="ctr" rotWithShape="0">
+              <a:srgbClr val="000000">
+                <a:alpha val="63000"/>
+              </a:srgbClr>
+            </a:outerShdw>
+          </a:effectLst>
+        </a:effectStyle>
+      </a:effectStyleLst>
+      <a:bgFillStyleLst>
+        <a:solidFill>
+          <a:schemeClr val="phClr"/>
+        </a:solidFill>
+        <a:solidFill>
+          <a:schemeClr val="phClr">
+            <a:tint val="95000"/>
+            <a:satMod val="170000"/>
+          </a:schemeClr>
+        </a:solidFill>
+        <a:gradFill rotWithShape="1">
+          <a:gsLst>
+            <a:gs pos="0">
+              <a:schemeClr val="phClr">
+                <a:tint val="93000"/>
+                <a:satMod val="150000"/>
+                <a:shade val="98000"/>
+                <a:lumMod val="102000"/>
+              </a:schemeClr>
+            </a:gs>
+            <a:gs pos="50000">
+              <a:schemeClr val="phClr">
+                <a:tint val="98000"/>
+                <a:satMod val="130000"/>
+                <a:shade val="90000"/>
+                <a:lumMod val="103000"/>
+              </a:schemeClr>
+            </a:gs>
+            <a:gs pos="100000">
+              <a:schemeClr val="phClr">
+                <a:shade val="63000"/>
+                <a:satMod val="120000"/>
+              </a:schemeClr>
+            </a:gs>
+          </a:gsLst>
+          <a:lin ang="5400000" scaled="0"/>
+        </a:gradFill>
+      </a:bgFillStyleLst>
+    </a:fmtScheme>
+  </a:themeElements>
+  <a:objectDefaults>
+    <a:lnDef>
+      <a:spPr/>
+      <a:bodyPr/>
+      <a:lstStyle/>
+      <a:style>
+        <a:lnRef idx="2">
+          <a:schemeClr val="accent1"/>
+        </a:lnRef>
+        <a:fillRef idx="0">
+          <a:schemeClr val="accent1"/>
+        </a:fillRef>
+        <a:effectRef idx="1">
+          <a:schemeClr val="accent1"/>
+        </a:effectRef>
+        <a:fontRef idx="minor">
+          <a:schemeClr val="tx1"/>
+        </a:fontRef>
+      </a:style>
+    </a:lnDef>
+  </a:objectDefaults>
+  <a:extraClrSchemeLst/>
+  <a:extLst>
+    <a:ext uri="{05A4C25C-085E-4340-85A3-A5531E510DB2}">
+      <thm15:themeFamily xmlns:thm15="http://schemas.microsoft.com/office/thememl/2012/main" name="Office Theme" id="{2E142A2C-CD16-42D6-873A-C26D2A0506FA}" vid="{1BDDFF52-6CD6-40A5-AB3C-68EB2F1E4D0A}"/>
+    </a:ext>
+  </a:extLst>
+</a:theme>
 </file>